--- a/output/wordlabs-treat-3day.pptx
+++ b/output/wordlabs-treat-3day.pptx
@@ -4240,7 +4240,7 @@
                 <a:ea typeface="Calibri" pitchFamily="34" charset="-122"/>
                 <a:cs typeface="Calibri" pitchFamily="34" charset="-120"/>
               </a:rPr>
-              <a:t>"handle, deal with, negotiate"</a:t>
+              <a:t>"to deal with; a special thing"</a:t>
             </a:r>
             <a:endParaRPr lang="en-US" sz="2200" dirty="0"/>
           </a:p>
@@ -4279,7 +4279,7 @@
                 <a:ea typeface="Calibri" pitchFamily="34" charset="-122"/>
                 <a:cs typeface="Calibri" pitchFamily="34" charset="-120"/>
               </a:rPr>
-              <a:t>Origin: Latin: tractare</a:t>
+              <a:t>Origin: Core English root</a:t>
             </a:r>
             <a:endParaRPr lang="en-US" sz="1300" dirty="0"/>
           </a:p>
@@ -5288,7 +5288,7 @@
                 <a:ea typeface="Calibri" pitchFamily="34" charset="-122"/>
                 <a:cs typeface="Calibri" pitchFamily="34" charset="-120"/>
               </a:rPr>
-              <a:t>Word Labs  •  wordlabs.app  •  Root: 'treat' = handle, deal with, negotiate</a:t>
+              <a:t>Word Labs  •  wordlabs.app  •  Root: 'treat' = to deal with; a special thing</a:t>
             </a:r>
             <a:endParaRPr lang="en-US" sz="800" dirty="0"/>
           </a:p>
@@ -5622,7 +5622,7 @@
                 <a:ea typeface="Trebuchet MS" pitchFamily="34" charset="-122"/>
                 <a:cs typeface="Trebuchet MS" pitchFamily="34" charset="-120"/>
               </a:rPr>
-              <a:t>1</a:t>
+              <a:t>0</a:t>
             </a:r>
             <a:pPr algn="ctr" indent="0" marL="0">
               <a:buNone/>
@@ -5928,7 +5928,7 @@
                 <a:ea typeface="Calibri" pitchFamily="34" charset="-122"/>
                 <a:cs typeface="Calibri" pitchFamily="34" charset="-120"/>
               </a:rPr>
-              <a:t>Word Labs  •  wordlabs.app  •  Root: 'treat' = handle, deal with, negotiate</a:t>
+              <a:t>Word Labs  •  wordlabs.app  •  Root: 'treat' = to deal with; a special thing</a:t>
             </a:r>
             <a:endParaRPr lang="en-US" sz="800" dirty="0"/>
           </a:p>
@@ -6040,7 +6040,7 @@
                 <a:ea typeface="Calibri" pitchFamily="34" charset="-122"/>
                 <a:cs typeface="Calibri" pitchFamily="34" charset="-120"/>
               </a:rPr>
-              <a:t>The vet said the injured bird was </a:t>
+              <a:t>The two nations signed several </a:t>
             </a:r>
             <a:pPr algn="l" indent="0" marL="0">
               <a:buNone/>
@@ -6057,7 +6057,7 @@
                 <a:ea typeface="Calibri" pitchFamily="34" charset="-122"/>
                 <a:cs typeface="Calibri" pitchFamily="34" charset="-120"/>
               </a:rPr>
-              <a:t>treatable</a:t>
+              <a:t>treaties</a:t>
             </a:r>
             <a:pPr algn="l" indent="0" marL="0">
               <a:buNone/>
@@ -6071,7 +6071,7 @@
                 <a:ea typeface="Calibri" pitchFamily="34" charset="-122"/>
                 <a:cs typeface="Calibri" pitchFamily="34" charset="-120"/>
               </a:rPr>
-              <a:t>, so she began </a:t>
+              <a:t> to end the long war. The nurse was </a:t>
             </a:r>
             <a:pPr algn="l" indent="0" marL="0">
               <a:buNone/>
@@ -6102,7 +6102,7 @@
                 <a:ea typeface="Calibri" pitchFamily="34" charset="-122"/>
                 <a:cs typeface="Calibri" pitchFamily="34" charset="-120"/>
               </a:rPr>
-              <a:t> it straight away.</a:t>
+              <a:t> the patient's cut with a clean bandage.</a:t>
             </a:r>
             <a:endParaRPr lang="en-US" sz="1800" dirty="0"/>
           </a:p>
@@ -6257,7 +6257,7 @@
                 <a:ea typeface="Trebuchet MS" pitchFamily="34" charset="-122"/>
                 <a:cs typeface="Trebuchet MS" pitchFamily="34" charset="-120"/>
               </a:rPr>
-              <a:t>treatable</a:t>
+              <a:t>treaties</a:t>
             </a:r>
             <a:endParaRPr lang="en-US" sz="1400" dirty="0"/>
           </a:p>
@@ -6716,7 +6716,7 @@
                 <a:ea typeface="Calibri" pitchFamily="34" charset="-122"/>
                 <a:cs typeface="Calibri" pitchFamily="34" charset="-120"/>
               </a:rPr>
-              <a:t>Word Labs  •  wordlabs.app  •  Root: 'treat' = handle, deal with, negotiate</a:t>
+              <a:t>Word Labs  •  wordlabs.app  •  Root: 'treat' = to deal with; a special thing</a:t>
             </a:r>
             <a:endParaRPr lang="en-US" sz="800" dirty="0"/>
           </a:p>
@@ -6855,7 +6855,7 @@
                 <a:ea typeface="Trebuchet MS" pitchFamily="34" charset="-122"/>
                 <a:cs typeface="Trebuchet MS" pitchFamily="34" charset="-120"/>
               </a:rPr>
-              <a:t>treatable</a:t>
+              <a:t>treaties</a:t>
             </a:r>
             <a:endParaRPr lang="en-US" sz="2800" dirty="0"/>
           </a:p>
@@ -7543,7 +7543,7 @@
                 <a:ea typeface="Calibri" pitchFamily="34" charset="-122"/>
                 <a:cs typeface="Calibri" pitchFamily="34" charset="-120"/>
               </a:rPr>
-              <a:t>Word Labs  •  wordlabs.app  •  Root: 'treat' = handle, deal with, negotiate</a:t>
+              <a:t>Word Labs  •  wordlabs.app  •  Root: 'treat' = to deal with; a special thing</a:t>
             </a:r>
             <a:endParaRPr lang="en-US" sz="800" dirty="0"/>
           </a:p>
@@ -7682,7 +7682,7 @@
                 <a:ea typeface="Trebuchet MS" pitchFamily="34" charset="-122"/>
                 <a:cs typeface="Trebuchet MS" pitchFamily="34" charset="-120"/>
               </a:rPr>
-              <a:t>treatable</a:t>
+              <a:t>treaties</a:t>
             </a:r>
             <a:endParaRPr lang="en-US" sz="2800" dirty="0"/>
           </a:p>
@@ -7762,7 +7762,7 @@
         </p:nvSpPr>
         <p:spPr>
           <a:xfrm>
-            <a:off x="2938272" y="2258568"/>
+            <a:off x="2221992" y="2258568"/>
             <a:ext cx="1828800" cy="292608"/>
           </a:xfrm>
           <a:prstGeom prst="rect">
@@ -7796,7 +7796,7 @@
         </p:nvSpPr>
         <p:spPr>
           <a:xfrm>
-            <a:off x="2938272" y="2258568"/>
+            <a:off x="2221992" y="2258568"/>
             <a:ext cx="1828800" cy="292608"/>
           </a:xfrm>
           <a:prstGeom prst="rect">
@@ -7835,7 +7835,7 @@
         </p:nvSpPr>
         <p:spPr>
           <a:xfrm>
-            <a:off x="2938272" y="2569464"/>
+            <a:off x="2221992" y="2569464"/>
             <a:ext cx="1828800" cy="201168"/>
           </a:xfrm>
           <a:prstGeom prst="rect">
@@ -7860,7 +7860,7 @@
                 <a:ea typeface="Calibri" pitchFamily="34" charset="-122"/>
                 <a:cs typeface="Calibri" pitchFamily="34" charset="-120"/>
               </a:rPr>
-              <a:t>handle or deal with</a:t>
+              <a:t>to deal with; a special thing</a:t>
             </a:r>
             <a:endParaRPr lang="en-US" sz="850" dirty="0"/>
           </a:p>
@@ -7874,7 +7874,7 @@
         </p:nvSpPr>
         <p:spPr>
           <a:xfrm>
-            <a:off x="5803392" y="2258568"/>
+            <a:off x="4370832" y="2258568"/>
             <a:ext cx="1828800" cy="292608"/>
           </a:xfrm>
           <a:prstGeom prst="rect">
@@ -7908,7 +7908,7 @@
         </p:nvSpPr>
         <p:spPr>
           <a:xfrm>
-            <a:off x="5803392" y="2258568"/>
+            <a:off x="4370832" y="2258568"/>
             <a:ext cx="1828800" cy="292608"/>
           </a:xfrm>
           <a:prstGeom prst="rect">
@@ -7933,7 +7933,7 @@
                 <a:ea typeface="Trebuchet MS" pitchFamily="34" charset="-122"/>
                 <a:cs typeface="Trebuchet MS" pitchFamily="34" charset="-120"/>
               </a:rPr>
-              <a:t>able</a:t>
+              <a:t>y</a:t>
             </a:r>
             <a:endParaRPr lang="en-US" sz="1300" dirty="0"/>
           </a:p>
@@ -7947,7 +7947,7 @@
         </p:nvSpPr>
         <p:spPr>
           <a:xfrm>
-            <a:off x="5803392" y="2569464"/>
+            <a:off x="4370832" y="2569464"/>
             <a:ext cx="1828800" cy="201168"/>
           </a:xfrm>
           <a:prstGeom prst="rect">
@@ -7972,7 +7972,7 @@
                 <a:ea typeface="Calibri" pitchFamily="34" charset="-122"/>
                 <a:cs typeface="Calibri" pitchFamily="34" charset="-120"/>
               </a:rPr>
-              <a:t>able to be</a:t>
+              <a:t>characterised by</a:t>
             </a:r>
             <a:endParaRPr lang="en-US" sz="850" dirty="0"/>
           </a:p>
@@ -7981,6 +7981,118 @@
       <p:sp>
         <p:nvSpPr>
           <p:cNvPr id="22" name="Shape 20"/>
+          <p:cNvSpPr/>
+          <p:nvPr/>
+        </p:nvSpPr>
+        <p:spPr>
+          <a:xfrm>
+            <a:off x="6519672" y="2258568"/>
+            <a:ext cx="1828800" cy="292608"/>
+          </a:xfrm>
+          <a:prstGeom prst="rect">
+            <a:avLst>
+              <a:gd name="adj" fmla="val 25000"/>
+            </a:avLst>
+          </a:prstGeom>
+          <a:solidFill>
+            <a:srgbClr val="FCE7F3"/>
+          </a:solidFill>
+          <a:ln w="19050">
+            <a:solidFill>
+              <a:srgbClr val="DB2777"/>
+            </a:solidFill>
+            <a:prstDash val="solid"/>
+          </a:ln>
+          <a:effectLst>
+            <a:outerShdw sx="100000" sy="100000" kx="0" ky="0" algn="bl" rotWithShape="0" blurRad="101600" dist="38100" dir="8100000">
+              <a:srgbClr val="000000">
+                <a:alpha val="12000"/>
+              </a:srgbClr>
+            </a:outerShdw>
+          </a:effectLst>
+        </p:spPr>
+      </p:sp>
+      <p:sp>
+        <p:nvSpPr>
+          <p:cNvPr id="23" name="Text 21"/>
+          <p:cNvSpPr/>
+          <p:nvPr/>
+        </p:nvSpPr>
+        <p:spPr>
+          <a:xfrm>
+            <a:off x="6519672" y="2258568"/>
+            <a:ext cx="1828800" cy="292608"/>
+          </a:xfrm>
+          <a:prstGeom prst="rect">
+            <a:avLst/>
+          </a:prstGeom>
+          <a:noFill/>
+          <a:ln/>
+        </p:spPr>
+        <p:txBody>
+          <a:bodyPr wrap="square" lIns="0" tIns="0" rIns="0" bIns="0" rtlCol="0" anchor="ctr"/>
+          <a:lstStyle/>
+          <a:p>
+            <a:pPr algn="ctr" indent="0" marL="0">
+              <a:buNone/>
+            </a:pPr>
+            <a:r>
+              <a:rPr lang="en-US" sz="1300" b="1" dirty="0">
+                <a:solidFill>
+                  <a:srgbClr val="9D174D"/>
+                </a:solidFill>
+                <a:latin typeface="Trebuchet MS" pitchFamily="34" charset="0"/>
+                <a:ea typeface="Trebuchet MS" pitchFamily="34" charset="-122"/>
+                <a:cs typeface="Trebuchet MS" pitchFamily="34" charset="-120"/>
+              </a:rPr>
+              <a:t>es</a:t>
+            </a:r>
+            <a:endParaRPr lang="en-US" sz="1300" dirty="0"/>
+          </a:p>
+        </p:txBody>
+      </p:sp>
+      <p:sp>
+        <p:nvSpPr>
+          <p:cNvPr id="24" name="Text 22"/>
+          <p:cNvSpPr/>
+          <p:nvPr/>
+        </p:nvSpPr>
+        <p:spPr>
+          <a:xfrm>
+            <a:off x="6519672" y="2569464"/>
+            <a:ext cx="1828800" cy="201168"/>
+          </a:xfrm>
+          <a:prstGeom prst="rect">
+            <a:avLst/>
+          </a:prstGeom>
+          <a:noFill/>
+          <a:ln/>
+        </p:spPr>
+        <p:txBody>
+          <a:bodyPr wrap="square" lIns="0" tIns="0" rIns="0" bIns="0" rtlCol="0" anchor="t"/>
+          <a:lstStyle/>
+          <a:p>
+            <a:pPr algn="ctr" indent="0" marL="0">
+              <a:buNone/>
+            </a:pPr>
+            <a:r>
+              <a:rPr lang="en-US" sz="850" dirty="0">
+                <a:solidFill>
+                  <a:srgbClr val="475569"/>
+                </a:solidFill>
+                <a:latin typeface="Calibri" pitchFamily="34" charset="0"/>
+                <a:ea typeface="Calibri" pitchFamily="34" charset="-122"/>
+                <a:cs typeface="Calibri" pitchFamily="34" charset="-120"/>
+              </a:rPr>
+              <a:t>plural or present tense</a:t>
+            </a:r>
+            <a:endParaRPr lang="en-US" sz="850" dirty="0"/>
+          </a:p>
+        </p:txBody>
+      </p:sp>
+      <p:sp>
+        <p:nvSpPr>
+          <p:cNvPr id="25" name="Shape 23"/>
           <p:cNvSpPr/>
           <p:nvPr/>
         </p:nvSpPr>
@@ -8007,7 +8119,7 @@
       </p:sp>
       <p:sp>
         <p:nvSpPr>
-          <p:cNvPr id="23" name="Text 21"/>
+          <p:cNvPr id="26" name="Text 24"/>
           <p:cNvSpPr/>
           <p:nvPr/>
         </p:nvSpPr>
@@ -8046,7 +8158,7 @@
       </p:sp>
       <p:sp>
         <p:nvSpPr>
-          <p:cNvPr id="24" name="Shape 22"/>
+          <p:cNvPr id="27" name="Shape 25"/>
           <p:cNvSpPr/>
           <p:nvPr/>
         </p:nvSpPr>
@@ -8073,7 +8185,7 @@
       </p:sp>
       <p:sp>
         <p:nvSpPr>
-          <p:cNvPr id="25" name="Text 23"/>
+          <p:cNvPr id="28" name="Text 26"/>
           <p:cNvSpPr/>
           <p:nvPr/>
         </p:nvSpPr>
@@ -8112,7 +8224,7 @@
       </p:sp>
       <p:sp>
         <p:nvSpPr>
-          <p:cNvPr id="26" name="Shape 24"/>
+          <p:cNvPr id="29" name="Shape 27"/>
           <p:cNvSpPr/>
           <p:nvPr/>
         </p:nvSpPr>
@@ -8139,7 +8251,7 @@
       </p:sp>
       <p:sp>
         <p:nvSpPr>
-          <p:cNvPr id="27" name="Text 25"/>
+          <p:cNvPr id="30" name="Text 28"/>
           <p:cNvSpPr/>
           <p:nvPr/>
         </p:nvSpPr>
@@ -8178,7 +8290,7 @@
       </p:sp>
       <p:sp>
         <p:nvSpPr>
-          <p:cNvPr id="28" name="Shape 26"/>
+          <p:cNvPr id="31" name="Shape 29"/>
           <p:cNvSpPr/>
           <p:nvPr/>
         </p:nvSpPr>
@@ -8205,7 +8317,7 @@
       </p:sp>
       <p:sp>
         <p:nvSpPr>
-          <p:cNvPr id="29" name="Text 27"/>
+          <p:cNvPr id="32" name="Text 30"/>
           <p:cNvSpPr/>
           <p:nvPr/>
         </p:nvSpPr>
@@ -8528,7 +8640,7 @@
                 <a:ea typeface="Calibri" pitchFamily="34" charset="-122"/>
                 <a:cs typeface="Calibri" pitchFamily="34" charset="-120"/>
               </a:rPr>
-              <a:t>Word Labs  •  wordlabs.app  •  Root: 'treat' = handle, deal with, negotiate</a:t>
+              <a:t>Word Labs  •  wordlabs.app  •  Root: 'treat' = to deal with; a special thing</a:t>
             </a:r>
             <a:endParaRPr lang="en-US" sz="800" dirty="0"/>
           </a:p>
@@ -8667,7 +8779,7 @@
                 <a:ea typeface="Trebuchet MS" pitchFamily="34" charset="-122"/>
                 <a:cs typeface="Trebuchet MS" pitchFamily="34" charset="-120"/>
               </a:rPr>
-              <a:t>treatable</a:t>
+              <a:t>treaties</a:t>
             </a:r>
             <a:endParaRPr lang="en-US" sz="2800" dirty="0"/>
           </a:p>
@@ -8747,7 +8859,7 @@
         </p:nvSpPr>
         <p:spPr>
           <a:xfrm>
-            <a:off x="2938272" y="2258568"/>
+            <a:off x="2221992" y="2258568"/>
             <a:ext cx="1828800" cy="292608"/>
           </a:xfrm>
           <a:prstGeom prst="rect">
@@ -8781,7 +8893,7 @@
         </p:nvSpPr>
         <p:spPr>
           <a:xfrm>
-            <a:off x="2938272" y="2258568"/>
+            <a:off x="2221992" y="2258568"/>
             <a:ext cx="1828800" cy="292608"/>
           </a:xfrm>
           <a:prstGeom prst="rect">
@@ -8820,7 +8932,7 @@
         </p:nvSpPr>
         <p:spPr>
           <a:xfrm>
-            <a:off x="2938272" y="2569464"/>
+            <a:off x="2221992" y="2569464"/>
             <a:ext cx="1828800" cy="201168"/>
           </a:xfrm>
           <a:prstGeom prst="rect">
@@ -8845,7 +8957,7 @@
                 <a:ea typeface="Calibri" pitchFamily="34" charset="-122"/>
                 <a:cs typeface="Calibri" pitchFamily="34" charset="-120"/>
               </a:rPr>
-              <a:t>handle or deal with</a:t>
+              <a:t>to deal with; a special thing</a:t>
             </a:r>
             <a:endParaRPr lang="en-US" sz="850" dirty="0"/>
           </a:p>
@@ -8859,7 +8971,7 @@
         </p:nvSpPr>
         <p:spPr>
           <a:xfrm>
-            <a:off x="5803392" y="2258568"/>
+            <a:off x="4370832" y="2258568"/>
             <a:ext cx="1828800" cy="292608"/>
           </a:xfrm>
           <a:prstGeom prst="rect">
@@ -8893,7 +9005,7 @@
         </p:nvSpPr>
         <p:spPr>
           <a:xfrm>
-            <a:off x="5803392" y="2258568"/>
+            <a:off x="4370832" y="2258568"/>
             <a:ext cx="1828800" cy="292608"/>
           </a:xfrm>
           <a:prstGeom prst="rect">
@@ -8918,7 +9030,7 @@
                 <a:ea typeface="Trebuchet MS" pitchFamily="34" charset="-122"/>
                 <a:cs typeface="Trebuchet MS" pitchFamily="34" charset="-120"/>
               </a:rPr>
-              <a:t>able</a:t>
+              <a:t>y</a:t>
             </a:r>
             <a:endParaRPr lang="en-US" sz="1300" dirty="0"/>
           </a:p>
@@ -8932,7 +9044,7 @@
         </p:nvSpPr>
         <p:spPr>
           <a:xfrm>
-            <a:off x="5803392" y="2569464"/>
+            <a:off x="4370832" y="2569464"/>
             <a:ext cx="1828800" cy="201168"/>
           </a:xfrm>
           <a:prstGeom prst="rect">
@@ -8957,7 +9069,7 @@
                 <a:ea typeface="Calibri" pitchFamily="34" charset="-122"/>
                 <a:cs typeface="Calibri" pitchFamily="34" charset="-120"/>
               </a:rPr>
-              <a:t>able to be</a:t>
+              <a:t>characterised by</a:t>
             </a:r>
             <a:endParaRPr lang="en-US" sz="850" dirty="0"/>
           </a:p>
@@ -8966,6 +9078,118 @@
       <p:sp>
         <p:nvSpPr>
           <p:cNvPr id="22" name="Shape 20"/>
+          <p:cNvSpPr/>
+          <p:nvPr/>
+        </p:nvSpPr>
+        <p:spPr>
+          <a:xfrm>
+            <a:off x="6519672" y="2258568"/>
+            <a:ext cx="1828800" cy="292608"/>
+          </a:xfrm>
+          <a:prstGeom prst="rect">
+            <a:avLst>
+              <a:gd name="adj" fmla="val 25000"/>
+            </a:avLst>
+          </a:prstGeom>
+          <a:solidFill>
+            <a:srgbClr val="FCE7F3"/>
+          </a:solidFill>
+          <a:ln w="19050">
+            <a:solidFill>
+              <a:srgbClr val="DB2777"/>
+            </a:solidFill>
+            <a:prstDash val="solid"/>
+          </a:ln>
+          <a:effectLst>
+            <a:outerShdw sx="100000" sy="100000" kx="0" ky="0" algn="bl" rotWithShape="0" blurRad="101600" dist="38100" dir="8100000">
+              <a:srgbClr val="000000">
+                <a:alpha val="12000"/>
+              </a:srgbClr>
+            </a:outerShdw>
+          </a:effectLst>
+        </p:spPr>
+      </p:sp>
+      <p:sp>
+        <p:nvSpPr>
+          <p:cNvPr id="23" name="Text 21"/>
+          <p:cNvSpPr/>
+          <p:nvPr/>
+        </p:nvSpPr>
+        <p:spPr>
+          <a:xfrm>
+            <a:off x="6519672" y="2258568"/>
+            <a:ext cx="1828800" cy="292608"/>
+          </a:xfrm>
+          <a:prstGeom prst="rect">
+            <a:avLst/>
+          </a:prstGeom>
+          <a:noFill/>
+          <a:ln/>
+        </p:spPr>
+        <p:txBody>
+          <a:bodyPr wrap="square" lIns="0" tIns="0" rIns="0" bIns="0" rtlCol="0" anchor="ctr"/>
+          <a:lstStyle/>
+          <a:p>
+            <a:pPr algn="ctr" indent="0" marL="0">
+              <a:buNone/>
+            </a:pPr>
+            <a:r>
+              <a:rPr lang="en-US" sz="1300" b="1" dirty="0">
+                <a:solidFill>
+                  <a:srgbClr val="9D174D"/>
+                </a:solidFill>
+                <a:latin typeface="Trebuchet MS" pitchFamily="34" charset="0"/>
+                <a:ea typeface="Trebuchet MS" pitchFamily="34" charset="-122"/>
+                <a:cs typeface="Trebuchet MS" pitchFamily="34" charset="-120"/>
+              </a:rPr>
+              <a:t>es</a:t>
+            </a:r>
+            <a:endParaRPr lang="en-US" sz="1300" dirty="0"/>
+          </a:p>
+        </p:txBody>
+      </p:sp>
+      <p:sp>
+        <p:nvSpPr>
+          <p:cNvPr id="24" name="Text 22"/>
+          <p:cNvSpPr/>
+          <p:nvPr/>
+        </p:nvSpPr>
+        <p:spPr>
+          <a:xfrm>
+            <a:off x="6519672" y="2569464"/>
+            <a:ext cx="1828800" cy="201168"/>
+          </a:xfrm>
+          <a:prstGeom prst="rect">
+            <a:avLst/>
+          </a:prstGeom>
+          <a:noFill/>
+          <a:ln/>
+        </p:spPr>
+        <p:txBody>
+          <a:bodyPr wrap="square" lIns="0" tIns="0" rIns="0" bIns="0" rtlCol="0" anchor="t"/>
+          <a:lstStyle/>
+          <a:p>
+            <a:pPr algn="ctr" indent="0" marL="0">
+              <a:buNone/>
+            </a:pPr>
+            <a:r>
+              <a:rPr lang="en-US" sz="850" dirty="0">
+                <a:solidFill>
+                  <a:srgbClr val="475569"/>
+                </a:solidFill>
+                <a:latin typeface="Calibri" pitchFamily="34" charset="0"/>
+                <a:ea typeface="Calibri" pitchFamily="34" charset="-122"/>
+                <a:cs typeface="Calibri" pitchFamily="34" charset="-120"/>
+              </a:rPr>
+              <a:t>plural or present tense</a:t>
+            </a:r>
+            <a:endParaRPr lang="en-US" sz="850" dirty="0"/>
+          </a:p>
+        </p:txBody>
+      </p:sp>
+      <p:sp>
+        <p:nvSpPr>
+          <p:cNvPr id="25" name="Shape 23"/>
           <p:cNvSpPr/>
           <p:nvPr/>
         </p:nvSpPr>
@@ -8992,7 +9216,7 @@
       </p:sp>
       <p:sp>
         <p:nvSpPr>
-          <p:cNvPr id="23" name="Text 21"/>
+          <p:cNvPr id="26" name="Text 24"/>
           <p:cNvSpPr/>
           <p:nvPr/>
         </p:nvSpPr>
@@ -9031,7 +9255,7 @@
       </p:sp>
       <p:sp>
         <p:nvSpPr>
-          <p:cNvPr id="24" name="Shape 22"/>
+          <p:cNvPr id="27" name="Shape 25"/>
           <p:cNvSpPr/>
           <p:nvPr/>
         </p:nvSpPr>
@@ -9058,13 +9282,13 @@
       </p:sp>
       <p:sp>
         <p:nvSpPr>
-          <p:cNvPr id="25" name="Shape 23"/>
-          <p:cNvSpPr/>
-          <p:nvPr/>
-        </p:nvSpPr>
-        <p:spPr>
-          <a:xfrm>
-            <a:off x="2313432" y="3364992"/>
+          <p:cNvPr id="28" name="Shape 26"/>
+          <p:cNvSpPr/>
+          <p:nvPr/>
+        </p:nvSpPr>
+        <p:spPr>
+          <a:xfrm>
+            <a:off x="2999232" y="3364992"/>
             <a:ext cx="1645920" cy="475488"/>
           </a:xfrm>
           <a:prstGeom prst="rect">
@@ -9085,13 +9309,13 @@
       </p:sp>
       <p:sp>
         <p:nvSpPr>
-          <p:cNvPr id="26" name="Text 24"/>
-          <p:cNvSpPr/>
-          <p:nvPr/>
-        </p:nvSpPr>
-        <p:spPr>
-          <a:xfrm>
-            <a:off x="2313432" y="3364992"/>
+          <p:cNvPr id="29" name="Text 27"/>
+          <p:cNvSpPr/>
+          <p:nvPr/>
+        </p:nvSpPr>
+        <p:spPr>
+          <a:xfrm>
+            <a:off x="2999232" y="3364992"/>
             <a:ext cx="1645920" cy="475488"/>
           </a:xfrm>
           <a:prstGeom prst="rect">
@@ -9116,7 +9340,7 @@
                 <a:ea typeface="Trebuchet MS" pitchFamily="34" charset="-122"/>
                 <a:cs typeface="Trebuchet MS" pitchFamily="34" charset="-120"/>
               </a:rPr>
-              <a:t>treat</a:t>
+              <a:t>trea</a:t>
             </a:r>
             <a:endParaRPr lang="en-US" sz="1400" dirty="0"/>
           </a:p>
@@ -9124,14 +9348,14 @@
       </p:sp>
       <p:sp>
         <p:nvSpPr>
-          <p:cNvPr id="27" name="Text 25"/>
-          <p:cNvSpPr/>
-          <p:nvPr/>
-        </p:nvSpPr>
-        <p:spPr>
-          <a:xfrm>
-            <a:off x="3959352" y="3364992"/>
-            <a:ext cx="411480" cy="475488"/>
+          <p:cNvPr id="30" name="Text 28"/>
+          <p:cNvSpPr/>
+          <p:nvPr/>
+        </p:nvSpPr>
+        <p:spPr>
+          <a:xfrm>
+            <a:off x="4645152" y="3364992"/>
+            <a:ext cx="1097280" cy="475488"/>
           </a:xfrm>
           <a:prstGeom prst="rect">
             <a:avLst/>
@@ -9163,13 +9387,13 @@
       </p:sp>
       <p:sp>
         <p:nvSpPr>
-          <p:cNvPr id="28" name="Shape 26"/>
-          <p:cNvSpPr/>
-          <p:nvPr/>
-        </p:nvSpPr>
-        <p:spPr>
-          <a:xfrm>
-            <a:off x="4370832" y="3364992"/>
+          <p:cNvPr id="31" name="Shape 29"/>
+          <p:cNvSpPr/>
+          <p:nvPr/>
+        </p:nvSpPr>
+        <p:spPr>
+          <a:xfrm>
+            <a:off x="5742432" y="3364992"/>
             <a:ext cx="1645920" cy="475488"/>
           </a:xfrm>
           <a:prstGeom prst="rect">
@@ -9190,13 +9414,13 @@
       </p:sp>
       <p:sp>
         <p:nvSpPr>
-          <p:cNvPr id="29" name="Text 27"/>
-          <p:cNvSpPr/>
-          <p:nvPr/>
-        </p:nvSpPr>
-        <p:spPr>
-          <a:xfrm>
-            <a:off x="4370832" y="3364992"/>
+          <p:cNvPr id="32" name="Text 30"/>
+          <p:cNvSpPr/>
+          <p:nvPr/>
+        </p:nvSpPr>
+        <p:spPr>
+          <a:xfrm>
+            <a:off x="5742432" y="3364992"/>
             <a:ext cx="1645920" cy="475488"/>
           </a:xfrm>
           <a:prstGeom prst="rect">
@@ -9221,112 +9445,7 @@
                 <a:ea typeface="Trebuchet MS" pitchFamily="34" charset="-122"/>
                 <a:cs typeface="Trebuchet MS" pitchFamily="34" charset="-120"/>
               </a:rPr>
-              <a:t>a</a:t>
-            </a:r>
-            <a:endParaRPr lang="en-US" sz="1400" dirty="0"/>
-          </a:p>
-        </p:txBody>
-      </p:sp>
-      <p:sp>
-        <p:nvSpPr>
-          <p:cNvPr id="30" name="Text 28"/>
-          <p:cNvSpPr/>
-          <p:nvPr/>
-        </p:nvSpPr>
-        <p:spPr>
-          <a:xfrm>
-            <a:off x="6016752" y="3364992"/>
-            <a:ext cx="411480" cy="475488"/>
-          </a:xfrm>
-          <a:prstGeom prst="rect">
-            <a:avLst/>
-          </a:prstGeom>
-          <a:noFill/>
-          <a:ln/>
-        </p:spPr>
-        <p:txBody>
-          <a:bodyPr wrap="square" lIns="0" tIns="0" rIns="0" bIns="0" rtlCol="0" anchor="ctr"/>
-          <a:lstStyle/>
-          <a:p>
-            <a:pPr algn="ctr" indent="0" marL="0">
-              <a:buNone/>
-            </a:pPr>
-            <a:r>
-              <a:rPr lang="en-US" sz="1600" b="1" dirty="0">
-                <a:solidFill>
-                  <a:srgbClr val="0D9488"/>
-                </a:solidFill>
-                <a:latin typeface="Trebuchet MS" pitchFamily="34" charset="0"/>
-                <a:ea typeface="Trebuchet MS" pitchFamily="34" charset="-122"/>
-                <a:cs typeface="Trebuchet MS" pitchFamily="34" charset="-120"/>
-              </a:rPr>
-              <a:t>·</a:t>
-            </a:r>
-            <a:endParaRPr lang="en-US" sz="1600" dirty="0"/>
-          </a:p>
-        </p:txBody>
-      </p:sp>
-      <p:sp>
-        <p:nvSpPr>
-          <p:cNvPr id="31" name="Shape 29"/>
-          <p:cNvSpPr/>
-          <p:nvPr/>
-        </p:nvSpPr>
-        <p:spPr>
-          <a:xfrm>
-            <a:off x="6428232" y="3364992"/>
-            <a:ext cx="1645920" cy="475488"/>
-          </a:xfrm>
-          <a:prstGeom prst="rect">
-            <a:avLst>
-              <a:gd name="adj" fmla="val 9615"/>
-            </a:avLst>
-          </a:prstGeom>
-          <a:solidFill>
-            <a:srgbClr val="FFFFFF"/>
-          </a:solidFill>
-          <a:ln w="12700">
-            <a:solidFill>
-              <a:srgbClr val="0D9488"/>
-            </a:solidFill>
-            <a:prstDash val="solid"/>
-          </a:ln>
-        </p:spPr>
-      </p:sp>
-      <p:sp>
-        <p:nvSpPr>
-          <p:cNvPr id="32" name="Text 30"/>
-          <p:cNvSpPr/>
-          <p:nvPr/>
-        </p:nvSpPr>
-        <p:spPr>
-          <a:xfrm>
-            <a:off x="6428232" y="3364992"/>
-            <a:ext cx="1645920" cy="475488"/>
-          </a:xfrm>
-          <a:prstGeom prst="rect">
-            <a:avLst/>
-          </a:prstGeom>
-          <a:noFill/>
-          <a:ln/>
-        </p:spPr>
-        <p:txBody>
-          <a:bodyPr wrap="square" lIns="0" tIns="0" rIns="0" bIns="0" rtlCol="0" anchor="ctr"/>
-          <a:lstStyle/>
-          <a:p>
-            <a:pPr algn="ctr" indent="0" marL="0">
-              <a:buNone/>
-            </a:pPr>
-            <a:r>
-              <a:rPr lang="en-US" sz="1400" b="1" dirty="0">
-                <a:solidFill>
-                  <a:srgbClr val="0D9488"/>
-                </a:solidFill>
-                <a:latin typeface="Trebuchet MS" pitchFamily="34" charset="0"/>
-                <a:ea typeface="Trebuchet MS" pitchFamily="34" charset="-122"/>
-                <a:cs typeface="Trebuchet MS" pitchFamily="34" charset="-120"/>
-              </a:rPr>
-              <a:t>ble</a:t>
+              <a:t>ties</a:t>
             </a:r>
             <a:endParaRPr lang="en-US" sz="1400" dirty="0"/>
           </a:p>
@@ -9750,7 +9869,7 @@
                 <a:ea typeface="Calibri" pitchFamily="34" charset="-122"/>
                 <a:cs typeface="Calibri" pitchFamily="34" charset="-120"/>
               </a:rPr>
-              <a:t>Word Labs  •  wordlabs.app  •  Root: 'treat' = handle, deal with, negotiate</a:t>
+              <a:t>Word Labs  •  wordlabs.app  •  Root: 'treat' = to deal with; a special thing</a:t>
             </a:r>
             <a:endParaRPr lang="en-US" sz="800" dirty="0"/>
           </a:p>
@@ -9889,7 +10008,7 @@
                 <a:ea typeface="Trebuchet MS" pitchFamily="34" charset="-122"/>
                 <a:cs typeface="Trebuchet MS" pitchFamily="34" charset="-120"/>
               </a:rPr>
-              <a:t>treatable</a:t>
+              <a:t>treaties</a:t>
             </a:r>
             <a:endParaRPr lang="en-US" sz="2800" dirty="0"/>
           </a:p>
@@ -9969,7 +10088,7 @@
         </p:nvSpPr>
         <p:spPr>
           <a:xfrm>
-            <a:off x="2938272" y="2258568"/>
+            <a:off x="2221992" y="2258568"/>
             <a:ext cx="1828800" cy="292608"/>
           </a:xfrm>
           <a:prstGeom prst="rect">
@@ -10003,7 +10122,7 @@
         </p:nvSpPr>
         <p:spPr>
           <a:xfrm>
-            <a:off x="2938272" y="2258568"/>
+            <a:off x="2221992" y="2258568"/>
             <a:ext cx="1828800" cy="292608"/>
           </a:xfrm>
           <a:prstGeom prst="rect">
@@ -10042,7 +10161,7 @@
         </p:nvSpPr>
         <p:spPr>
           <a:xfrm>
-            <a:off x="2938272" y="2569464"/>
+            <a:off x="2221992" y="2569464"/>
             <a:ext cx="1828800" cy="201168"/>
           </a:xfrm>
           <a:prstGeom prst="rect">
@@ -10067,7 +10186,7 @@
                 <a:ea typeface="Calibri" pitchFamily="34" charset="-122"/>
                 <a:cs typeface="Calibri" pitchFamily="34" charset="-120"/>
               </a:rPr>
-              <a:t>handle or deal with</a:t>
+              <a:t>to deal with; a special thing</a:t>
             </a:r>
             <a:endParaRPr lang="en-US" sz="850" dirty="0"/>
           </a:p>
@@ -10081,7 +10200,7 @@
         </p:nvSpPr>
         <p:spPr>
           <a:xfrm>
-            <a:off x="5803392" y="2258568"/>
+            <a:off x="4370832" y="2258568"/>
             <a:ext cx="1828800" cy="292608"/>
           </a:xfrm>
           <a:prstGeom prst="rect">
@@ -10115,7 +10234,7 @@
         </p:nvSpPr>
         <p:spPr>
           <a:xfrm>
-            <a:off x="5803392" y="2258568"/>
+            <a:off x="4370832" y="2258568"/>
             <a:ext cx="1828800" cy="292608"/>
           </a:xfrm>
           <a:prstGeom prst="rect">
@@ -10140,7 +10259,7 @@
                 <a:ea typeface="Trebuchet MS" pitchFamily="34" charset="-122"/>
                 <a:cs typeface="Trebuchet MS" pitchFamily="34" charset="-120"/>
               </a:rPr>
-              <a:t>able</a:t>
+              <a:t>y</a:t>
             </a:r>
             <a:endParaRPr lang="en-US" sz="1300" dirty="0"/>
           </a:p>
@@ -10154,7 +10273,7 @@
         </p:nvSpPr>
         <p:spPr>
           <a:xfrm>
-            <a:off x="5803392" y="2569464"/>
+            <a:off x="4370832" y="2569464"/>
             <a:ext cx="1828800" cy="201168"/>
           </a:xfrm>
           <a:prstGeom prst="rect">
@@ -10179,7 +10298,7 @@
                 <a:ea typeface="Calibri" pitchFamily="34" charset="-122"/>
                 <a:cs typeface="Calibri" pitchFamily="34" charset="-120"/>
               </a:rPr>
-              <a:t>able to be</a:t>
+              <a:t>characterised by</a:t>
             </a:r>
             <a:endParaRPr lang="en-US" sz="850" dirty="0"/>
           </a:p>
@@ -10188,6 +10307,118 @@
       <p:sp>
         <p:nvSpPr>
           <p:cNvPr id="22" name="Shape 20"/>
+          <p:cNvSpPr/>
+          <p:nvPr/>
+        </p:nvSpPr>
+        <p:spPr>
+          <a:xfrm>
+            <a:off x="6519672" y="2258568"/>
+            <a:ext cx="1828800" cy="292608"/>
+          </a:xfrm>
+          <a:prstGeom prst="rect">
+            <a:avLst>
+              <a:gd name="adj" fmla="val 25000"/>
+            </a:avLst>
+          </a:prstGeom>
+          <a:solidFill>
+            <a:srgbClr val="FCE7F3"/>
+          </a:solidFill>
+          <a:ln w="19050">
+            <a:solidFill>
+              <a:srgbClr val="DB2777"/>
+            </a:solidFill>
+            <a:prstDash val="solid"/>
+          </a:ln>
+          <a:effectLst>
+            <a:outerShdw sx="100000" sy="100000" kx="0" ky="0" algn="bl" rotWithShape="0" blurRad="101600" dist="38100" dir="8100000">
+              <a:srgbClr val="000000">
+                <a:alpha val="12000"/>
+              </a:srgbClr>
+            </a:outerShdw>
+          </a:effectLst>
+        </p:spPr>
+      </p:sp>
+      <p:sp>
+        <p:nvSpPr>
+          <p:cNvPr id="23" name="Text 21"/>
+          <p:cNvSpPr/>
+          <p:nvPr/>
+        </p:nvSpPr>
+        <p:spPr>
+          <a:xfrm>
+            <a:off x="6519672" y="2258568"/>
+            <a:ext cx="1828800" cy="292608"/>
+          </a:xfrm>
+          <a:prstGeom prst="rect">
+            <a:avLst/>
+          </a:prstGeom>
+          <a:noFill/>
+          <a:ln/>
+        </p:spPr>
+        <p:txBody>
+          <a:bodyPr wrap="square" lIns="0" tIns="0" rIns="0" bIns="0" rtlCol="0" anchor="ctr"/>
+          <a:lstStyle/>
+          <a:p>
+            <a:pPr algn="ctr" indent="0" marL="0">
+              <a:buNone/>
+            </a:pPr>
+            <a:r>
+              <a:rPr lang="en-US" sz="1300" b="1" dirty="0">
+                <a:solidFill>
+                  <a:srgbClr val="9D174D"/>
+                </a:solidFill>
+                <a:latin typeface="Trebuchet MS" pitchFamily="34" charset="0"/>
+                <a:ea typeface="Trebuchet MS" pitchFamily="34" charset="-122"/>
+                <a:cs typeface="Trebuchet MS" pitchFamily="34" charset="-120"/>
+              </a:rPr>
+              <a:t>es</a:t>
+            </a:r>
+            <a:endParaRPr lang="en-US" sz="1300" dirty="0"/>
+          </a:p>
+        </p:txBody>
+      </p:sp>
+      <p:sp>
+        <p:nvSpPr>
+          <p:cNvPr id="24" name="Text 22"/>
+          <p:cNvSpPr/>
+          <p:nvPr/>
+        </p:nvSpPr>
+        <p:spPr>
+          <a:xfrm>
+            <a:off x="6519672" y="2569464"/>
+            <a:ext cx="1828800" cy="201168"/>
+          </a:xfrm>
+          <a:prstGeom prst="rect">
+            <a:avLst/>
+          </a:prstGeom>
+          <a:noFill/>
+          <a:ln/>
+        </p:spPr>
+        <p:txBody>
+          <a:bodyPr wrap="square" lIns="0" tIns="0" rIns="0" bIns="0" rtlCol="0" anchor="t"/>
+          <a:lstStyle/>
+          <a:p>
+            <a:pPr algn="ctr" indent="0" marL="0">
+              <a:buNone/>
+            </a:pPr>
+            <a:r>
+              <a:rPr lang="en-US" sz="850" dirty="0">
+                <a:solidFill>
+                  <a:srgbClr val="475569"/>
+                </a:solidFill>
+                <a:latin typeface="Calibri" pitchFamily="34" charset="0"/>
+                <a:ea typeface="Calibri" pitchFamily="34" charset="-122"/>
+                <a:cs typeface="Calibri" pitchFamily="34" charset="-120"/>
+              </a:rPr>
+              <a:t>plural or present tense</a:t>
+            </a:r>
+            <a:endParaRPr lang="en-US" sz="850" dirty="0"/>
+          </a:p>
+        </p:txBody>
+      </p:sp>
+      <p:sp>
+        <p:nvSpPr>
+          <p:cNvPr id="25" name="Shape 23"/>
           <p:cNvSpPr/>
           <p:nvPr/>
         </p:nvSpPr>
@@ -10214,7 +10445,7 @@
       </p:sp>
       <p:sp>
         <p:nvSpPr>
-          <p:cNvPr id="23" name="Text 21"/>
+          <p:cNvPr id="26" name="Text 24"/>
           <p:cNvSpPr/>
           <p:nvPr/>
         </p:nvSpPr>
@@ -10253,7 +10484,7 @@
       </p:sp>
       <p:sp>
         <p:nvSpPr>
-          <p:cNvPr id="24" name="Shape 22"/>
+          <p:cNvPr id="27" name="Shape 25"/>
           <p:cNvSpPr/>
           <p:nvPr/>
         </p:nvSpPr>
@@ -10280,13 +10511,13 @@
       </p:sp>
       <p:sp>
         <p:nvSpPr>
-          <p:cNvPr id="25" name="Shape 23"/>
-          <p:cNvSpPr/>
-          <p:nvPr/>
-        </p:nvSpPr>
-        <p:spPr>
-          <a:xfrm>
-            <a:off x="2313432" y="3364992"/>
+          <p:cNvPr id="28" name="Shape 26"/>
+          <p:cNvSpPr/>
+          <p:nvPr/>
+        </p:nvSpPr>
+        <p:spPr>
+          <a:xfrm>
+            <a:off x="2999232" y="3364992"/>
             <a:ext cx="1645920" cy="475488"/>
           </a:xfrm>
           <a:prstGeom prst="rect">
@@ -10307,13 +10538,13 @@
       </p:sp>
       <p:sp>
         <p:nvSpPr>
-          <p:cNvPr id="26" name="Text 24"/>
-          <p:cNvSpPr/>
-          <p:nvPr/>
-        </p:nvSpPr>
-        <p:spPr>
-          <a:xfrm>
-            <a:off x="2313432" y="3364992"/>
+          <p:cNvPr id="29" name="Text 27"/>
+          <p:cNvSpPr/>
+          <p:nvPr/>
+        </p:nvSpPr>
+        <p:spPr>
+          <a:xfrm>
+            <a:off x="2999232" y="3364992"/>
             <a:ext cx="1645920" cy="475488"/>
           </a:xfrm>
           <a:prstGeom prst="rect">
@@ -10338,7 +10569,7 @@
                 <a:ea typeface="Trebuchet MS" pitchFamily="34" charset="-122"/>
                 <a:cs typeface="Trebuchet MS" pitchFamily="34" charset="-120"/>
               </a:rPr>
-              <a:t>treat</a:t>
+              <a:t>trea</a:t>
             </a:r>
             <a:endParaRPr lang="en-US" sz="1400" dirty="0"/>
           </a:p>
@@ -10346,14 +10577,14 @@
       </p:sp>
       <p:sp>
         <p:nvSpPr>
-          <p:cNvPr id="27" name="Text 25"/>
-          <p:cNvSpPr/>
-          <p:nvPr/>
-        </p:nvSpPr>
-        <p:spPr>
-          <a:xfrm>
-            <a:off x="3959352" y="3364992"/>
-            <a:ext cx="411480" cy="475488"/>
+          <p:cNvPr id="30" name="Text 28"/>
+          <p:cNvSpPr/>
+          <p:nvPr/>
+        </p:nvSpPr>
+        <p:spPr>
+          <a:xfrm>
+            <a:off x="4645152" y="3364992"/>
+            <a:ext cx="1097280" cy="475488"/>
           </a:xfrm>
           <a:prstGeom prst="rect">
             <a:avLst/>
@@ -10385,13 +10616,13 @@
       </p:sp>
       <p:sp>
         <p:nvSpPr>
-          <p:cNvPr id="28" name="Shape 26"/>
-          <p:cNvSpPr/>
-          <p:nvPr/>
-        </p:nvSpPr>
-        <p:spPr>
-          <a:xfrm>
-            <a:off x="4370832" y="3364992"/>
+          <p:cNvPr id="31" name="Shape 29"/>
+          <p:cNvSpPr/>
+          <p:nvPr/>
+        </p:nvSpPr>
+        <p:spPr>
+          <a:xfrm>
+            <a:off x="5742432" y="3364992"/>
             <a:ext cx="1645920" cy="475488"/>
           </a:xfrm>
           <a:prstGeom prst="rect">
@@ -10412,13 +10643,13 @@
       </p:sp>
       <p:sp>
         <p:nvSpPr>
-          <p:cNvPr id="29" name="Text 27"/>
-          <p:cNvSpPr/>
-          <p:nvPr/>
-        </p:nvSpPr>
-        <p:spPr>
-          <a:xfrm>
-            <a:off x="4370832" y="3364992"/>
+          <p:cNvPr id="32" name="Text 30"/>
+          <p:cNvSpPr/>
+          <p:nvPr/>
+        </p:nvSpPr>
+        <p:spPr>
+          <a:xfrm>
+            <a:off x="5742432" y="3364992"/>
             <a:ext cx="1645920" cy="475488"/>
           </a:xfrm>
           <a:prstGeom prst="rect">
@@ -10443,7 +10674,7 @@
                 <a:ea typeface="Trebuchet MS" pitchFamily="34" charset="-122"/>
                 <a:cs typeface="Trebuchet MS" pitchFamily="34" charset="-120"/>
               </a:rPr>
-              <a:t>a</a:t>
+              <a:t>ties</a:t>
             </a:r>
             <a:endParaRPr lang="en-US" sz="1400" dirty="0"/>
           </a:p>
@@ -10451,14 +10682,41 @@
       </p:sp>
       <p:sp>
         <p:nvSpPr>
-          <p:cNvPr id="30" name="Text 28"/>
-          <p:cNvSpPr/>
-          <p:nvPr/>
-        </p:nvSpPr>
-        <p:spPr>
-          <a:xfrm>
-            <a:off x="6016752" y="3364992"/>
-            <a:ext cx="411480" cy="475488"/>
+          <p:cNvPr id="33" name="Shape 31"/>
+          <p:cNvSpPr/>
+          <p:nvPr/>
+        </p:nvSpPr>
+        <p:spPr>
+          <a:xfrm>
+            <a:off x="365760" y="4096512"/>
+            <a:ext cx="1371600" cy="804672"/>
+          </a:xfrm>
+          <a:prstGeom prst="rect">
+            <a:avLst>
+              <a:gd name="adj" fmla="val 6818"/>
+            </a:avLst>
+          </a:prstGeom>
+          <a:solidFill>
+            <a:srgbClr val="E2E8F0"/>
+          </a:solidFill>
+          <a:ln w="12700">
+            <a:solidFill>
+              <a:srgbClr val="E2E8F0"/>
+            </a:solidFill>
+            <a:prstDash val="solid"/>
+          </a:ln>
+        </p:spPr>
+      </p:sp>
+      <p:sp>
+        <p:nvSpPr>
+          <p:cNvPr id="34" name="Text 32"/>
+          <p:cNvSpPr/>
+          <p:nvPr/>
+        </p:nvSpPr>
+        <p:spPr>
+          <a:xfrm>
+            <a:off x="365760" y="4096512"/>
+            <a:ext cx="1371600" cy="804672"/>
           </a:xfrm>
           <a:prstGeom prst="rect">
             <a:avLst/>
@@ -10474,57 +10732,84 @@
               <a:buNone/>
             </a:pPr>
             <a:r>
-              <a:rPr lang="en-US" sz="1600" b="1" dirty="0">
-                <a:solidFill>
-                  <a:srgbClr val="0D9488"/>
+              <a:rPr lang="en-US" sz="1100" b="1" dirty="0">
+                <a:solidFill>
+                  <a:srgbClr val="475569"/>
                 </a:solidFill>
                 <a:latin typeface="Trebuchet MS" pitchFamily="34" charset="0"/>
                 <a:ea typeface="Trebuchet MS" pitchFamily="34" charset="-122"/>
                 <a:cs typeface="Trebuchet MS" pitchFamily="34" charset="-120"/>
               </a:rPr>
-              <a:t>·</a:t>
-            </a:r>
-            <a:endParaRPr lang="en-US" sz="1600" dirty="0"/>
-          </a:p>
-        </p:txBody>
-      </p:sp>
-      <p:sp>
-        <p:nvSpPr>
-          <p:cNvPr id="31" name="Shape 29"/>
-          <p:cNvSpPr/>
-          <p:nvPr/>
-        </p:nvSpPr>
-        <p:spPr>
-          <a:xfrm>
-            <a:off x="6428232" y="3364992"/>
-            <a:ext cx="1645920" cy="475488"/>
+              <a:t>Phonemes</a:t>
+            </a:r>
+            <a:endParaRPr lang="en-US" sz="1100" dirty="0"/>
+          </a:p>
+        </p:txBody>
+      </p:sp>
+      <p:sp>
+        <p:nvSpPr>
+          <p:cNvPr id="35" name="Shape 33"/>
+          <p:cNvSpPr/>
+          <p:nvPr/>
+        </p:nvSpPr>
+        <p:spPr>
+          <a:xfrm>
+            <a:off x="1874520" y="4096512"/>
+            <a:ext cx="6903720" cy="658368"/>
           </a:xfrm>
           <a:prstGeom prst="rect">
             <a:avLst>
-              <a:gd name="adj" fmla="val 9615"/>
+              <a:gd name="adj" fmla="val 8333"/>
             </a:avLst>
           </a:prstGeom>
           <a:solidFill>
+            <a:srgbClr val="FCE7F3"/>
+          </a:solidFill>
+          <a:ln w="12700">
+            <a:solidFill>
+              <a:srgbClr val="DB2777"/>
+            </a:solidFill>
+            <a:prstDash val="solid"/>
+          </a:ln>
+        </p:spPr>
+      </p:sp>
+      <p:sp>
+        <p:nvSpPr>
+          <p:cNvPr id="36" name="Shape 34"/>
+          <p:cNvSpPr/>
+          <p:nvPr/>
+        </p:nvSpPr>
+        <p:spPr>
+          <a:xfrm>
+            <a:off x="2254649" y="4169664"/>
+            <a:ext cx="685800" cy="475488"/>
+          </a:xfrm>
+          <a:prstGeom prst="rect">
+            <a:avLst>
+              <a:gd name="adj" fmla="val 7692"/>
+            </a:avLst>
+          </a:prstGeom>
+          <a:solidFill>
             <a:srgbClr val="FFFFFF"/>
           </a:solidFill>
           <a:ln w="12700">
             <a:solidFill>
-              <a:srgbClr val="0D9488"/>
-            </a:solidFill>
-            <a:prstDash val="solid"/>
-          </a:ln>
-        </p:spPr>
-      </p:sp>
-      <p:sp>
-        <p:nvSpPr>
-          <p:cNvPr id="32" name="Text 30"/>
-          <p:cNvSpPr/>
-          <p:nvPr/>
-        </p:nvSpPr>
-        <p:spPr>
-          <a:xfrm>
-            <a:off x="6428232" y="3364992"/>
-            <a:ext cx="1645920" cy="475488"/>
+              <a:srgbClr val="DB2777"/>
+            </a:solidFill>
+            <a:prstDash val="solid"/>
+          </a:ln>
+        </p:spPr>
+      </p:sp>
+      <p:sp>
+        <p:nvSpPr>
+          <p:cNvPr id="37" name="Text 35"/>
+          <p:cNvSpPr/>
+          <p:nvPr/>
+        </p:nvSpPr>
+        <p:spPr>
+          <a:xfrm>
+            <a:off x="2254649" y="4169664"/>
+            <a:ext cx="685800" cy="475488"/>
           </a:xfrm>
           <a:prstGeom prst="rect">
             <a:avLst/>
@@ -10540,57 +10825,57 @@
               <a:buNone/>
             </a:pPr>
             <a:r>
-              <a:rPr lang="en-US" sz="1400" b="1" dirty="0">
-                <a:solidFill>
-                  <a:srgbClr val="0D9488"/>
+              <a:rPr lang="en-US" sz="900" b="1" dirty="0">
+                <a:solidFill>
+                  <a:srgbClr val="9D174D"/>
                 </a:solidFill>
                 <a:latin typeface="Trebuchet MS" pitchFamily="34" charset="0"/>
                 <a:ea typeface="Trebuchet MS" pitchFamily="34" charset="-122"/>
                 <a:cs typeface="Trebuchet MS" pitchFamily="34" charset="-120"/>
               </a:rPr>
-              <a:t>ble</a:t>
-            </a:r>
-            <a:endParaRPr lang="en-US" sz="1400" dirty="0"/>
-          </a:p>
-        </p:txBody>
-      </p:sp>
-      <p:sp>
-        <p:nvSpPr>
-          <p:cNvPr id="33" name="Shape 31"/>
-          <p:cNvSpPr/>
-          <p:nvPr/>
-        </p:nvSpPr>
-        <p:spPr>
-          <a:xfrm>
-            <a:off x="365760" y="4096512"/>
-            <a:ext cx="1371600" cy="804672"/>
+              <a:t>t</a:t>
+            </a:r>
+            <a:endParaRPr lang="en-US" sz="900" dirty="0"/>
+          </a:p>
+        </p:txBody>
+      </p:sp>
+      <p:sp>
+        <p:nvSpPr>
+          <p:cNvPr id="38" name="Shape 36"/>
+          <p:cNvSpPr/>
+          <p:nvPr/>
+        </p:nvSpPr>
+        <p:spPr>
+          <a:xfrm>
+            <a:off x="3293146" y="4169664"/>
+            <a:ext cx="685800" cy="475488"/>
           </a:xfrm>
           <a:prstGeom prst="rect">
             <a:avLst>
-              <a:gd name="adj" fmla="val 6818"/>
+              <a:gd name="adj" fmla="val 7692"/>
             </a:avLst>
           </a:prstGeom>
           <a:solidFill>
-            <a:srgbClr val="E2E8F0"/>
-          </a:solidFill>
-          <a:ln w="12700">
-            <a:solidFill>
-              <a:srgbClr val="E2E8F0"/>
-            </a:solidFill>
-            <a:prstDash val="solid"/>
-          </a:ln>
-        </p:spPr>
-      </p:sp>
-      <p:sp>
-        <p:nvSpPr>
-          <p:cNvPr id="34" name="Text 32"/>
-          <p:cNvSpPr/>
-          <p:nvPr/>
-        </p:nvSpPr>
-        <p:spPr>
-          <a:xfrm>
-            <a:off x="365760" y="4096512"/>
-            <a:ext cx="1371600" cy="804672"/>
+            <a:srgbClr val="FFFFFF"/>
+          </a:solidFill>
+          <a:ln w="12700">
+            <a:solidFill>
+              <a:srgbClr val="DB2777"/>
+            </a:solidFill>
+            <a:prstDash val="solid"/>
+          </a:ln>
+        </p:spPr>
+      </p:sp>
+      <p:sp>
+        <p:nvSpPr>
+          <p:cNvPr id="39" name="Text 37"/>
+          <p:cNvSpPr/>
+          <p:nvPr/>
+        </p:nvSpPr>
+        <p:spPr>
+          <a:xfrm>
+            <a:off x="3293146" y="4169664"/>
+            <a:ext cx="685800" cy="475488"/>
           </a:xfrm>
           <a:prstGeom prst="rect">
             <a:avLst/>
@@ -10606,56 +10891,29 @@
               <a:buNone/>
             </a:pPr>
             <a:r>
-              <a:rPr lang="en-US" sz="1100" b="1" dirty="0">
-                <a:solidFill>
-                  <a:srgbClr val="475569"/>
+              <a:rPr lang="en-US" sz="900" b="1" dirty="0">
+                <a:solidFill>
+                  <a:srgbClr val="9D174D"/>
                 </a:solidFill>
                 <a:latin typeface="Trebuchet MS" pitchFamily="34" charset="0"/>
                 <a:ea typeface="Trebuchet MS" pitchFamily="34" charset="-122"/>
                 <a:cs typeface="Trebuchet MS" pitchFamily="34" charset="-120"/>
               </a:rPr>
-              <a:t>Phonemes</a:t>
-            </a:r>
-            <a:endParaRPr lang="en-US" sz="1100" dirty="0"/>
-          </a:p>
-        </p:txBody>
-      </p:sp>
-      <p:sp>
-        <p:nvSpPr>
-          <p:cNvPr id="35" name="Shape 33"/>
-          <p:cNvSpPr/>
-          <p:nvPr/>
-        </p:nvSpPr>
-        <p:spPr>
-          <a:xfrm>
-            <a:off x="1874520" y="4096512"/>
-            <a:ext cx="6903720" cy="658368"/>
-          </a:xfrm>
-          <a:prstGeom prst="rect">
-            <a:avLst>
-              <a:gd name="adj" fmla="val 8333"/>
-            </a:avLst>
-          </a:prstGeom>
-          <a:solidFill>
-            <a:srgbClr val="FCE7F3"/>
-          </a:solidFill>
-          <a:ln w="12700">
-            <a:solidFill>
-              <a:srgbClr val="DB2777"/>
-            </a:solidFill>
-            <a:prstDash val="solid"/>
-          </a:ln>
-        </p:spPr>
-      </p:sp>
-      <p:sp>
-        <p:nvSpPr>
-          <p:cNvPr id="36" name="Shape 34"/>
-          <p:cNvSpPr/>
-          <p:nvPr/>
-        </p:nvSpPr>
-        <p:spPr>
-          <a:xfrm>
-            <a:off x="2124837" y="4169664"/>
+              <a:t>r</a:t>
+            </a:r>
+            <a:endParaRPr lang="en-US" sz="900" dirty="0"/>
+          </a:p>
+        </p:txBody>
+      </p:sp>
+      <p:sp>
+        <p:nvSpPr>
+          <p:cNvPr id="40" name="Shape 38"/>
+          <p:cNvSpPr/>
+          <p:nvPr/>
+        </p:nvSpPr>
+        <p:spPr>
+          <a:xfrm>
+            <a:off x="4331643" y="4169664"/>
             <a:ext cx="685800" cy="475488"/>
           </a:xfrm>
           <a:prstGeom prst="rect">
@@ -10676,13 +10934,13 @@
       </p:sp>
       <p:sp>
         <p:nvSpPr>
-          <p:cNvPr id="37" name="Text 35"/>
-          <p:cNvSpPr/>
-          <p:nvPr/>
-        </p:nvSpPr>
-        <p:spPr>
-          <a:xfrm>
-            <a:off x="2124837" y="4169664"/>
+          <p:cNvPr id="41" name="Text 39"/>
+          <p:cNvSpPr/>
+          <p:nvPr/>
+        </p:nvSpPr>
+        <p:spPr>
+          <a:xfrm>
+            <a:off x="4331643" y="4169664"/>
             <a:ext cx="685800" cy="475488"/>
           </a:xfrm>
           <a:prstGeom prst="rect">
@@ -10707,7 +10965,7 @@
                 <a:ea typeface="Trebuchet MS" pitchFamily="34" charset="-122"/>
                 <a:cs typeface="Trebuchet MS" pitchFamily="34" charset="-120"/>
               </a:rPr>
-              <a:t>t</a:t>
+              <a:t>ea</a:t>
             </a:r>
             <a:endParaRPr lang="en-US" sz="900" dirty="0"/>
           </a:p>
@@ -10715,13 +10973,13 @@
       </p:sp>
       <p:sp>
         <p:nvSpPr>
-          <p:cNvPr id="38" name="Shape 36"/>
-          <p:cNvSpPr/>
-          <p:nvPr/>
-        </p:nvSpPr>
-        <p:spPr>
-          <a:xfrm>
-            <a:off x="3033522" y="4169664"/>
+          <p:cNvPr id="42" name="Shape 40"/>
+          <p:cNvSpPr/>
+          <p:nvPr/>
+        </p:nvSpPr>
+        <p:spPr>
+          <a:xfrm>
+            <a:off x="5370141" y="4169664"/>
             <a:ext cx="685800" cy="475488"/>
           </a:xfrm>
           <a:prstGeom prst="rect">
@@ -10742,13 +11000,13 @@
       </p:sp>
       <p:sp>
         <p:nvSpPr>
-          <p:cNvPr id="39" name="Text 37"/>
-          <p:cNvSpPr/>
-          <p:nvPr/>
-        </p:nvSpPr>
-        <p:spPr>
-          <a:xfrm>
-            <a:off x="3033522" y="4169664"/>
+          <p:cNvPr id="43" name="Text 41"/>
+          <p:cNvSpPr/>
+          <p:nvPr/>
+        </p:nvSpPr>
+        <p:spPr>
+          <a:xfrm>
+            <a:off x="5370141" y="4169664"/>
             <a:ext cx="685800" cy="475488"/>
           </a:xfrm>
           <a:prstGeom prst="rect">
@@ -10773,7 +11031,7 @@
                 <a:ea typeface="Trebuchet MS" pitchFamily="34" charset="-122"/>
                 <a:cs typeface="Trebuchet MS" pitchFamily="34" charset="-120"/>
               </a:rPr>
-              <a:t>r</a:t>
+              <a:t>t</a:t>
             </a:r>
             <a:endParaRPr lang="en-US" sz="900" dirty="0"/>
           </a:p>
@@ -10781,13 +11039,13 @@
       </p:sp>
       <p:sp>
         <p:nvSpPr>
-          <p:cNvPr id="40" name="Shape 38"/>
-          <p:cNvSpPr/>
-          <p:nvPr/>
-        </p:nvSpPr>
-        <p:spPr>
-          <a:xfrm>
-            <a:off x="3942207" y="4169664"/>
+          <p:cNvPr id="44" name="Shape 42"/>
+          <p:cNvSpPr/>
+          <p:nvPr/>
+        </p:nvSpPr>
+        <p:spPr>
+          <a:xfrm>
+            <a:off x="6408638" y="4169664"/>
             <a:ext cx="685800" cy="475488"/>
           </a:xfrm>
           <a:prstGeom prst="rect">
@@ -10808,13 +11066,13 @@
       </p:sp>
       <p:sp>
         <p:nvSpPr>
-          <p:cNvPr id="41" name="Text 39"/>
-          <p:cNvSpPr/>
-          <p:nvPr/>
-        </p:nvSpPr>
-        <p:spPr>
-          <a:xfrm>
-            <a:off x="3942207" y="4169664"/>
+          <p:cNvPr id="45" name="Text 43"/>
+          <p:cNvSpPr/>
+          <p:nvPr/>
+        </p:nvSpPr>
+        <p:spPr>
+          <a:xfrm>
+            <a:off x="6408638" y="4169664"/>
             <a:ext cx="685800" cy="475488"/>
           </a:xfrm>
           <a:prstGeom prst="rect">
@@ -10839,7 +11097,7 @@
                 <a:ea typeface="Trebuchet MS" pitchFamily="34" charset="-122"/>
                 <a:cs typeface="Trebuchet MS" pitchFamily="34" charset="-120"/>
               </a:rPr>
-              <a:t>ea</a:t>
+              <a:t>ie</a:t>
             </a:r>
             <a:endParaRPr lang="en-US" sz="900" dirty="0"/>
           </a:p>
@@ -10847,13 +11105,13 @@
       </p:sp>
       <p:sp>
         <p:nvSpPr>
-          <p:cNvPr id="42" name="Shape 40"/>
-          <p:cNvSpPr/>
-          <p:nvPr/>
-        </p:nvSpPr>
-        <p:spPr>
-          <a:xfrm>
-            <a:off x="4850892" y="4169664"/>
+          <p:cNvPr id="46" name="Shape 44"/>
+          <p:cNvSpPr/>
+          <p:nvPr/>
+        </p:nvSpPr>
+        <p:spPr>
+          <a:xfrm>
+            <a:off x="7447135" y="4169664"/>
             <a:ext cx="685800" cy="475488"/>
           </a:xfrm>
           <a:prstGeom prst="rect">
@@ -10874,13 +11132,13 @@
       </p:sp>
       <p:sp>
         <p:nvSpPr>
-          <p:cNvPr id="43" name="Text 41"/>
-          <p:cNvSpPr/>
-          <p:nvPr/>
-        </p:nvSpPr>
-        <p:spPr>
-          <a:xfrm>
-            <a:off x="4850892" y="4169664"/>
+          <p:cNvPr id="47" name="Text 45"/>
+          <p:cNvSpPr/>
+          <p:nvPr/>
+        </p:nvSpPr>
+        <p:spPr>
+          <a:xfrm>
+            <a:off x="7447135" y="4169664"/>
             <a:ext cx="685800" cy="475488"/>
           </a:xfrm>
           <a:prstGeom prst="rect">
@@ -10905,205 +11163,7 @@
                 <a:ea typeface="Trebuchet MS" pitchFamily="34" charset="-122"/>
                 <a:cs typeface="Trebuchet MS" pitchFamily="34" charset="-120"/>
               </a:rPr>
-              <a:t>t</a:t>
-            </a:r>
-            <a:endParaRPr lang="en-US" sz="900" dirty="0"/>
-          </a:p>
-        </p:txBody>
-      </p:sp>
-      <p:sp>
-        <p:nvSpPr>
-          <p:cNvPr id="44" name="Shape 42"/>
-          <p:cNvSpPr/>
-          <p:nvPr/>
-        </p:nvSpPr>
-        <p:spPr>
-          <a:xfrm>
-            <a:off x="5759577" y="4169664"/>
-            <a:ext cx="685800" cy="475488"/>
-          </a:xfrm>
-          <a:prstGeom prst="rect">
-            <a:avLst>
-              <a:gd name="adj" fmla="val 7692"/>
-            </a:avLst>
-          </a:prstGeom>
-          <a:solidFill>
-            <a:srgbClr val="FFFFFF"/>
-          </a:solidFill>
-          <a:ln w="12700">
-            <a:solidFill>
-              <a:srgbClr val="DB2777"/>
-            </a:solidFill>
-            <a:prstDash val="solid"/>
-          </a:ln>
-        </p:spPr>
-      </p:sp>
-      <p:sp>
-        <p:nvSpPr>
-          <p:cNvPr id="45" name="Text 43"/>
-          <p:cNvSpPr/>
-          <p:nvPr/>
-        </p:nvSpPr>
-        <p:spPr>
-          <a:xfrm>
-            <a:off x="5759577" y="4169664"/>
-            <a:ext cx="685800" cy="475488"/>
-          </a:xfrm>
-          <a:prstGeom prst="rect">
-            <a:avLst/>
-          </a:prstGeom>
-          <a:noFill/>
-          <a:ln/>
-        </p:spPr>
-        <p:txBody>
-          <a:bodyPr wrap="square" lIns="0" tIns="0" rIns="0" bIns="0" rtlCol="0" anchor="ctr"/>
-          <a:lstStyle/>
-          <a:p>
-            <a:pPr algn="ctr" indent="0" marL="0">
-              <a:buNone/>
-            </a:pPr>
-            <a:r>
-              <a:rPr lang="en-US" sz="900" b="1" dirty="0">
-                <a:solidFill>
-                  <a:srgbClr val="9D174D"/>
-                </a:solidFill>
-                <a:latin typeface="Trebuchet MS" pitchFamily="34" charset="0"/>
-                <a:ea typeface="Trebuchet MS" pitchFamily="34" charset="-122"/>
-                <a:cs typeface="Trebuchet MS" pitchFamily="34" charset="-120"/>
-              </a:rPr>
-              <a:t>a</a:t>
-            </a:r>
-            <a:endParaRPr lang="en-US" sz="900" dirty="0"/>
-          </a:p>
-        </p:txBody>
-      </p:sp>
-      <p:sp>
-        <p:nvSpPr>
-          <p:cNvPr id="46" name="Shape 44"/>
-          <p:cNvSpPr/>
-          <p:nvPr/>
-        </p:nvSpPr>
-        <p:spPr>
-          <a:xfrm>
-            <a:off x="6668262" y="4169664"/>
-            <a:ext cx="685800" cy="475488"/>
-          </a:xfrm>
-          <a:prstGeom prst="rect">
-            <a:avLst>
-              <a:gd name="adj" fmla="val 7692"/>
-            </a:avLst>
-          </a:prstGeom>
-          <a:solidFill>
-            <a:srgbClr val="FFFFFF"/>
-          </a:solidFill>
-          <a:ln w="12700">
-            <a:solidFill>
-              <a:srgbClr val="DB2777"/>
-            </a:solidFill>
-            <a:prstDash val="solid"/>
-          </a:ln>
-        </p:spPr>
-      </p:sp>
-      <p:sp>
-        <p:nvSpPr>
-          <p:cNvPr id="47" name="Text 45"/>
-          <p:cNvSpPr/>
-          <p:nvPr/>
-        </p:nvSpPr>
-        <p:spPr>
-          <a:xfrm>
-            <a:off x="6668262" y="4169664"/>
-            <a:ext cx="685800" cy="475488"/>
-          </a:xfrm>
-          <a:prstGeom prst="rect">
-            <a:avLst/>
-          </a:prstGeom>
-          <a:noFill/>
-          <a:ln/>
-        </p:spPr>
-        <p:txBody>
-          <a:bodyPr wrap="square" lIns="0" tIns="0" rIns="0" bIns="0" rtlCol="0" anchor="ctr"/>
-          <a:lstStyle/>
-          <a:p>
-            <a:pPr algn="ctr" indent="0" marL="0">
-              <a:buNone/>
-            </a:pPr>
-            <a:r>
-              <a:rPr lang="en-US" sz="900" b="1" dirty="0">
-                <a:solidFill>
-                  <a:srgbClr val="9D174D"/>
-                </a:solidFill>
-                <a:latin typeface="Trebuchet MS" pitchFamily="34" charset="0"/>
-                <a:ea typeface="Trebuchet MS" pitchFamily="34" charset="-122"/>
-                <a:cs typeface="Trebuchet MS" pitchFamily="34" charset="-120"/>
-              </a:rPr>
-              <a:t>b</a:t>
-            </a:r>
-            <a:endParaRPr lang="en-US" sz="900" dirty="0"/>
-          </a:p>
-        </p:txBody>
-      </p:sp>
-      <p:sp>
-        <p:nvSpPr>
-          <p:cNvPr id="48" name="Shape 46"/>
-          <p:cNvSpPr/>
-          <p:nvPr/>
-        </p:nvSpPr>
-        <p:spPr>
-          <a:xfrm>
-            <a:off x="7576947" y="4169664"/>
-            <a:ext cx="685800" cy="475488"/>
-          </a:xfrm>
-          <a:prstGeom prst="rect">
-            <a:avLst>
-              <a:gd name="adj" fmla="val 7692"/>
-            </a:avLst>
-          </a:prstGeom>
-          <a:solidFill>
-            <a:srgbClr val="FFFFFF"/>
-          </a:solidFill>
-          <a:ln w="12700">
-            <a:solidFill>
-              <a:srgbClr val="DB2777"/>
-            </a:solidFill>
-            <a:prstDash val="solid"/>
-          </a:ln>
-        </p:spPr>
-      </p:sp>
-      <p:sp>
-        <p:nvSpPr>
-          <p:cNvPr id="49" name="Text 47"/>
-          <p:cNvSpPr/>
-          <p:nvPr/>
-        </p:nvSpPr>
-        <p:spPr>
-          <a:xfrm>
-            <a:off x="7576947" y="4169664"/>
-            <a:ext cx="685800" cy="475488"/>
-          </a:xfrm>
-          <a:prstGeom prst="rect">
-            <a:avLst/>
-          </a:prstGeom>
-          <a:noFill/>
-          <a:ln/>
-        </p:spPr>
-        <p:txBody>
-          <a:bodyPr wrap="square" lIns="0" tIns="0" rIns="0" bIns="0" rtlCol="0" anchor="ctr"/>
-          <a:lstStyle/>
-          <a:p>
-            <a:pPr algn="ctr" indent="0" marL="0">
-              <a:buNone/>
-            </a:pPr>
-            <a:r>
-              <a:rPr lang="en-US" sz="900" b="1" dirty="0">
-                <a:solidFill>
-                  <a:srgbClr val="9D174D"/>
-                </a:solidFill>
-                <a:latin typeface="Trebuchet MS" pitchFamily="34" charset="0"/>
-                <a:ea typeface="Trebuchet MS" pitchFamily="34" charset="-122"/>
-                <a:cs typeface="Trebuchet MS" pitchFamily="34" charset="-120"/>
-              </a:rPr>
-              <a:t>le</a:t>
+              <a:t>s</a:t>
             </a:r>
             <a:endParaRPr lang="en-US" sz="900" dirty="0"/>
           </a:p>
@@ -11395,7 +11455,7 @@
                 <a:ea typeface="Calibri" pitchFamily="34" charset="-122"/>
                 <a:cs typeface="Calibri" pitchFamily="34" charset="-120"/>
               </a:rPr>
-              <a:t>Word Labs  •  wordlabs.app  •  Root: 'treat' = handle, deal with, negotiate</a:t>
+              <a:t>Word Labs  •  wordlabs.app  •  Root: 'treat' = to deal with; a special thing</a:t>
             </a:r>
             <a:endParaRPr lang="en-US" sz="800" dirty="0"/>
           </a:p>
@@ -12222,7 +12282,7 @@
                 <a:ea typeface="Calibri" pitchFamily="34" charset="-122"/>
                 <a:cs typeface="Calibri" pitchFamily="34" charset="-120"/>
               </a:rPr>
-              <a:t>Word Labs  •  wordlabs.app  •  Root: 'treat' = handle, deal with, negotiate</a:t>
+              <a:t>Word Labs  •  wordlabs.app  •  Root: 'treat' = to deal with; a special thing</a:t>
             </a:r>
             <a:endParaRPr lang="en-US" sz="800" dirty="0"/>
           </a:p>
@@ -12539,7 +12599,7 @@
                 <a:ea typeface="Calibri" pitchFamily="34" charset="-122"/>
                 <a:cs typeface="Calibri" pitchFamily="34" charset="-120"/>
               </a:rPr>
-              <a:t>handle or deal with</a:t>
+              <a:t>to deal with; a special thing</a:t>
             </a:r>
             <a:endParaRPr lang="en-US" sz="850" dirty="0"/>
           </a:p>
@@ -12651,7 +12711,7 @@
                 <a:ea typeface="Calibri" pitchFamily="34" charset="-122"/>
                 <a:cs typeface="Calibri" pitchFamily="34" charset="-120"/>
               </a:rPr>
-              <a:t>action happening now</a:t>
+              <a:t>happening now</a:t>
             </a:r>
             <a:endParaRPr lang="en-US" sz="850" dirty="0"/>
           </a:p>
@@ -13207,7 +13267,7 @@
                 <a:ea typeface="Calibri" pitchFamily="34" charset="-122"/>
                 <a:cs typeface="Calibri" pitchFamily="34" charset="-120"/>
               </a:rPr>
-              <a:t>Word Labs  •  wordlabs.app  •  Root: 'treat' = handle, deal with, negotiate</a:t>
+              <a:t>Word Labs  •  wordlabs.app  •  Root: 'treat' = to deal with; a special thing</a:t>
             </a:r>
             <a:endParaRPr lang="en-US" sz="800" dirty="0"/>
           </a:p>
@@ -13524,7 +13584,7 @@
                 <a:ea typeface="Calibri" pitchFamily="34" charset="-122"/>
                 <a:cs typeface="Calibri" pitchFamily="34" charset="-120"/>
               </a:rPr>
-              <a:t>handle or deal with</a:t>
+              <a:t>to deal with; a special thing</a:t>
             </a:r>
             <a:endParaRPr lang="en-US" sz="850" dirty="0"/>
           </a:p>
@@ -13636,7 +13696,7 @@
                 <a:ea typeface="Calibri" pitchFamily="34" charset="-122"/>
                 <a:cs typeface="Calibri" pitchFamily="34" charset="-120"/>
               </a:rPr>
-              <a:t>action happening now</a:t>
+              <a:t>happening now</a:t>
             </a:r>
             <a:endParaRPr lang="en-US" sz="850" dirty="0"/>
           </a:p>
@@ -14233,7 +14293,7 @@
                 <a:ea typeface="Calibri" pitchFamily="34" charset="-122"/>
                 <a:cs typeface="Calibri" pitchFamily="34" charset="-120"/>
               </a:rPr>
-              <a:t>Root 'treat' — handle, deal with, negotiate</a:t>
+              <a:t>Root 'treat' — to deal with; a special thing</a:t>
             </a:r>
             <a:endParaRPr lang="en-US" sz="1600" dirty="0"/>
           </a:p>
@@ -14589,7 +14649,7 @@
                 <a:ea typeface="Calibri" pitchFamily="34" charset="-122"/>
                 <a:cs typeface="Calibri" pitchFamily="34" charset="-120"/>
               </a:rPr>
-              <a:t>Word Labs  •  wordlabs.app  •  Root: 'treat' = handle, deal with, negotiate</a:t>
+              <a:t>Word Labs  •  wordlabs.app  •  Root: 'treat' = to deal with; a special thing</a:t>
             </a:r>
             <a:endParaRPr lang="en-US" sz="800" dirty="0"/>
           </a:p>
@@ -14906,7 +14966,7 @@
                 <a:ea typeface="Calibri" pitchFamily="34" charset="-122"/>
                 <a:cs typeface="Calibri" pitchFamily="34" charset="-120"/>
               </a:rPr>
-              <a:t>handle or deal with</a:t>
+              <a:t>to deal with; a special thing</a:t>
             </a:r>
             <a:endParaRPr lang="en-US" sz="850" dirty="0"/>
           </a:p>
@@ -15018,7 +15078,7 @@
                 <a:ea typeface="Calibri" pitchFamily="34" charset="-122"/>
                 <a:cs typeface="Calibri" pitchFamily="34" charset="-120"/>
               </a:rPr>
-              <a:t>action happening now</a:t>
+              <a:t>happening now</a:t>
             </a:r>
             <a:endParaRPr lang="en-US" sz="850" dirty="0"/>
           </a:p>
@@ -16345,7 +16405,7 @@
                 <a:ea typeface="Calibri" pitchFamily="34" charset="-122"/>
                 <a:cs typeface="Calibri" pitchFamily="34" charset="-120"/>
               </a:rPr>
-              <a:t>Word Labs  •  wordlabs.app  •  Root: 'treat' = handle, deal with, negotiate</a:t>
+              <a:t>Word Labs  •  wordlabs.app  •  Root: 'treat' = to deal with; a special thing</a:t>
             </a:r>
             <a:endParaRPr lang="en-US" sz="800" dirty="0"/>
           </a:p>
@@ -16679,7 +16739,7 @@
                 <a:ea typeface="Trebuchet MS" pitchFamily="34" charset="-122"/>
                 <a:cs typeface="Trebuchet MS" pitchFamily="34" charset="-120"/>
               </a:rPr>
-              <a:t>2</a:t>
+              <a:t>0</a:t>
             </a:r>
             <a:pPr algn="ctr" indent="0" marL="0">
               <a:buNone/>
@@ -16693,7 +16753,7 @@
                 <a:ea typeface="Trebuchet MS" pitchFamily="34" charset="-122"/>
                 <a:cs typeface="Trebuchet MS" pitchFamily="34" charset="-120"/>
               </a:rPr>
-              <a:t>  punctuation marks</a:t>
+              <a:t>  punctuation mark</a:t>
             </a:r>
             <a:endParaRPr lang="en-US" sz="2800" dirty="0"/>
           </a:p>
@@ -16985,7 +17045,7 @@
                 <a:ea typeface="Calibri" pitchFamily="34" charset="-122"/>
                 <a:cs typeface="Calibri" pitchFamily="34" charset="-120"/>
               </a:rPr>
-              <a:t>Word Labs  •  wordlabs.app  •  Root: 'treat' = handle, deal with, negotiate</a:t>
+              <a:t>Word Labs  •  wordlabs.app  •  Root: 'treat' = to deal with; a special thing</a:t>
             </a:r>
             <a:endParaRPr lang="en-US" sz="800" dirty="0"/>
           </a:p>
@@ -17097,7 +17157,7 @@
                 <a:ea typeface="Calibri" pitchFamily="34" charset="-122"/>
                 <a:cs typeface="Calibri" pitchFamily="34" charset="-120"/>
               </a:rPr>
-              <a:t>The army's </a:t>
+              <a:t>The doctor recommended a course of </a:t>
             </a:r>
             <a:pPr algn="l" indent="0" marL="0">
               <a:buNone/>
@@ -17114,7 +17174,7 @@
                 <a:ea typeface="Calibri" pitchFamily="34" charset="-122"/>
                 <a:cs typeface="Calibri" pitchFamily="34" charset="-120"/>
               </a:rPr>
-              <a:t>retreat</a:t>
+              <a:t>treatment</a:t>
             </a:r>
             <a:pPr algn="l" indent="0" marL="0">
               <a:buNone/>
@@ -17128,7 +17188,7 @@
                 <a:ea typeface="Calibri" pitchFamily="34" charset="-122"/>
                 <a:cs typeface="Calibri" pitchFamily="34" charset="-120"/>
               </a:rPr>
-              <a:t> was quick; the </a:t>
+              <a:t> for his broken arm. The hospital offers several </a:t>
             </a:r>
             <a:pPr algn="l" indent="0" marL="0">
               <a:buNone/>
@@ -17145,7 +17205,7 @@
                 <a:ea typeface="Calibri" pitchFamily="34" charset="-122"/>
                 <a:cs typeface="Calibri" pitchFamily="34" charset="-120"/>
               </a:rPr>
-              <a:t>mistreatment</a:t>
+              <a:t>treatments</a:t>
             </a:r>
             <a:pPr algn="l" indent="0" marL="0">
               <a:buNone/>
@@ -17159,7 +17219,38 @@
                 <a:ea typeface="Calibri" pitchFamily="34" charset="-122"/>
                 <a:cs typeface="Calibri" pitchFamily="34" charset="-120"/>
               </a:rPr>
-              <a:t> of soldiers had left them too weak to fight.</a:t>
+              <a:t> for the illness. It is against the law to </a:t>
+            </a:r>
+            <a:pPr algn="l" indent="0" marL="0">
+              <a:buNone/>
+            </a:pPr>
+            <a:r>
+              <a:rPr lang="en-US" sz="1800" b="1" dirty="0">
+                <a:solidFill>
+                  <a:srgbClr val="0D9488"/>
+                </a:solidFill>
+                <a:highlight>
+                  <a:srgbClr val="CCFBF1"/>
+                </a:highlight>
+                <a:latin typeface="Calibri" pitchFamily="34" charset="0"/>
+                <a:ea typeface="Calibri" pitchFamily="34" charset="-122"/>
+                <a:cs typeface="Calibri" pitchFamily="34" charset="-120"/>
+              </a:rPr>
+              <a:t>maltreat</a:t>
+            </a:r>
+            <a:pPr algn="l" indent="0" marL="0">
+              <a:buNone/>
+            </a:pPr>
+            <a:r>
+              <a:rPr lang="en-US" sz="1800" dirty="0">
+                <a:solidFill>
+                  <a:srgbClr val="0F172A"/>
+                </a:solidFill>
+                <a:latin typeface="Calibri" pitchFamily="34" charset="0"/>
+                <a:ea typeface="Calibri" pitchFamily="34" charset="-122"/>
+                <a:cs typeface="Calibri" pitchFamily="34" charset="-120"/>
+              </a:rPr>
+              <a:t> an animal.</a:t>
             </a:r>
             <a:endParaRPr lang="en-US" sz="1800" dirty="0"/>
           </a:p>
@@ -17314,7 +17405,7 @@
                 <a:ea typeface="Trebuchet MS" pitchFamily="34" charset="-122"/>
                 <a:cs typeface="Trebuchet MS" pitchFamily="34" charset="-120"/>
               </a:rPr>
-              <a:t>retreat</a:t>
+              <a:t>treatment</a:t>
             </a:r>
             <a:endParaRPr lang="en-US" sz="1400" dirty="0"/>
           </a:p>
@@ -17442,7 +17533,7 @@
                 <a:ea typeface="Trebuchet MS" pitchFamily="34" charset="-122"/>
                 <a:cs typeface="Trebuchet MS" pitchFamily="34" charset="-120"/>
               </a:rPr>
-              <a:t>mistreatment</a:t>
+              <a:t>treatments</a:t>
             </a:r>
             <a:endParaRPr lang="en-US" sz="1400" dirty="0"/>
           </a:p>
@@ -17570,7 +17661,7 @@
                 <a:ea typeface="Trebuchet MS" pitchFamily="34" charset="-122"/>
                 <a:cs typeface="Trebuchet MS" pitchFamily="34" charset="-120"/>
               </a:rPr>
-              <a:t>mistreat</a:t>
+              <a:t>maltreat</a:t>
             </a:r>
             <a:endParaRPr lang="en-US" sz="1400" dirty="0"/>
           </a:p>
@@ -17901,7 +17992,7 @@
                 <a:ea typeface="Calibri" pitchFamily="34" charset="-122"/>
                 <a:cs typeface="Calibri" pitchFamily="34" charset="-120"/>
               </a:rPr>
-              <a:t>Word Labs  •  wordlabs.app  •  Root: 'treat' = handle, deal with, negotiate</a:t>
+              <a:t>Word Labs  •  wordlabs.app  •  Root: 'treat' = to deal with; a special thing</a:t>
             </a:r>
             <a:endParaRPr lang="en-US" sz="800" dirty="0"/>
           </a:p>
@@ -18040,7 +18131,7 @@
                 <a:ea typeface="Trebuchet MS" pitchFamily="34" charset="-122"/>
                 <a:cs typeface="Trebuchet MS" pitchFamily="34" charset="-120"/>
               </a:rPr>
-              <a:t>retreat</a:t>
+              <a:t>treatment</a:t>
             </a:r>
             <a:endParaRPr lang="en-US" sz="2800" dirty="0"/>
           </a:p>
@@ -18728,7 +18819,7 @@
                 <a:ea typeface="Calibri" pitchFamily="34" charset="-122"/>
                 <a:cs typeface="Calibri" pitchFamily="34" charset="-120"/>
               </a:rPr>
-              <a:t>Word Labs  •  wordlabs.app  •  Root: 'treat' = handle, deal with, negotiate</a:t>
+              <a:t>Word Labs  •  wordlabs.app  •  Root: 'treat' = to deal with; a special thing</a:t>
             </a:r>
             <a:endParaRPr lang="en-US" sz="800" dirty="0"/>
           </a:p>
@@ -18867,7 +18958,7 @@
                 <a:ea typeface="Trebuchet MS" pitchFamily="34" charset="-122"/>
                 <a:cs typeface="Trebuchet MS" pitchFamily="34" charset="-120"/>
               </a:rPr>
-              <a:t>retreat</a:t>
+              <a:t>treatment</a:t>
             </a:r>
             <a:endParaRPr lang="en-US" sz="2800" dirty="0"/>
           </a:p>
@@ -18956,11 +19047,11 @@
             </a:avLst>
           </a:prstGeom>
           <a:solidFill>
-            <a:srgbClr val="DDD6FE"/>
+            <a:srgbClr val="CCFBF1"/>
           </a:solidFill>
           <a:ln w="19050">
             <a:solidFill>
-              <a:srgbClr val="7C3AED"/>
+              <a:srgbClr val="0D9488"/>
             </a:solidFill>
             <a:prstDash val="solid"/>
           </a:ln>
@@ -19000,13 +19091,13 @@
             <a:r>
               <a:rPr lang="en-US" sz="1300" b="1" dirty="0">
                 <a:solidFill>
-                  <a:srgbClr val="4C1D95"/>
+                  <a:srgbClr val="0F766E"/>
                 </a:solidFill>
                 <a:latin typeface="Trebuchet MS" pitchFamily="34" charset="0"/>
                 <a:ea typeface="Trebuchet MS" pitchFamily="34" charset="-122"/>
                 <a:cs typeface="Trebuchet MS" pitchFamily="34" charset="-120"/>
               </a:rPr>
-              <a:t>re</a:t>
+              <a:t>treat</a:t>
             </a:r>
             <a:endParaRPr lang="en-US" sz="1300" dirty="0"/>
           </a:p>
@@ -19045,7 +19136,7 @@
                 <a:ea typeface="Calibri" pitchFamily="34" charset="-122"/>
                 <a:cs typeface="Calibri" pitchFamily="34" charset="-120"/>
               </a:rPr>
-              <a:t>back or again</a:t>
+              <a:t>to deal with; a special thing</a:t>
             </a:r>
             <a:endParaRPr lang="en-US" sz="850" dirty="0"/>
           </a:p>
@@ -19068,11 +19159,11 @@
             </a:avLst>
           </a:prstGeom>
           <a:solidFill>
-            <a:srgbClr val="CCFBF1"/>
+            <a:srgbClr val="FCE7F3"/>
           </a:solidFill>
           <a:ln w="19050">
             <a:solidFill>
-              <a:srgbClr val="0D9488"/>
+              <a:srgbClr val="DB2777"/>
             </a:solidFill>
             <a:prstDash val="solid"/>
           </a:ln>
@@ -19112,13 +19203,13 @@
             <a:r>
               <a:rPr lang="en-US" sz="1300" b="1" dirty="0">
                 <a:solidFill>
-                  <a:srgbClr val="0F766E"/>
+                  <a:srgbClr val="9D174D"/>
                 </a:solidFill>
                 <a:latin typeface="Trebuchet MS" pitchFamily="34" charset="0"/>
                 <a:ea typeface="Trebuchet MS" pitchFamily="34" charset="-122"/>
                 <a:cs typeface="Trebuchet MS" pitchFamily="34" charset="-120"/>
               </a:rPr>
-              <a:t>treat</a:t>
+              <a:t>ment</a:t>
             </a:r>
             <a:endParaRPr lang="en-US" sz="1300" dirty="0"/>
           </a:p>
@@ -19157,7 +19248,7 @@
                 <a:ea typeface="Calibri" pitchFamily="34" charset="-122"/>
                 <a:cs typeface="Calibri" pitchFamily="34" charset="-120"/>
               </a:rPr>
-              <a:t>handle or deal with</a:t>
+              <a:t>result of action</a:t>
             </a:r>
             <a:endParaRPr lang="en-US" sz="850" dirty="0"/>
           </a:p>
@@ -19713,7 +19804,7 @@
                 <a:ea typeface="Calibri" pitchFamily="34" charset="-122"/>
                 <a:cs typeface="Calibri" pitchFamily="34" charset="-120"/>
               </a:rPr>
-              <a:t>Word Labs  •  wordlabs.app  •  Root: 'treat' = handle, deal with, negotiate</a:t>
+              <a:t>Word Labs  •  wordlabs.app  •  Root: 'treat' = to deal with; a special thing</a:t>
             </a:r>
             <a:endParaRPr lang="en-US" sz="800" dirty="0"/>
           </a:p>
@@ -19852,7 +19943,7 @@
                 <a:ea typeface="Trebuchet MS" pitchFamily="34" charset="-122"/>
                 <a:cs typeface="Trebuchet MS" pitchFamily="34" charset="-120"/>
               </a:rPr>
-              <a:t>retreat</a:t>
+              <a:t>treatment</a:t>
             </a:r>
             <a:endParaRPr lang="en-US" sz="2800" dirty="0"/>
           </a:p>
@@ -19941,11 +20032,11 @@
             </a:avLst>
           </a:prstGeom>
           <a:solidFill>
-            <a:srgbClr val="DDD6FE"/>
+            <a:srgbClr val="CCFBF1"/>
           </a:solidFill>
           <a:ln w="19050">
             <a:solidFill>
-              <a:srgbClr val="7C3AED"/>
+              <a:srgbClr val="0D9488"/>
             </a:solidFill>
             <a:prstDash val="solid"/>
           </a:ln>
@@ -19985,13 +20076,13 @@
             <a:r>
               <a:rPr lang="en-US" sz="1300" b="1" dirty="0">
                 <a:solidFill>
-                  <a:srgbClr val="4C1D95"/>
+                  <a:srgbClr val="0F766E"/>
                 </a:solidFill>
                 <a:latin typeface="Trebuchet MS" pitchFamily="34" charset="0"/>
                 <a:ea typeface="Trebuchet MS" pitchFamily="34" charset="-122"/>
                 <a:cs typeface="Trebuchet MS" pitchFamily="34" charset="-120"/>
               </a:rPr>
-              <a:t>re</a:t>
+              <a:t>treat</a:t>
             </a:r>
             <a:endParaRPr lang="en-US" sz="1300" dirty="0"/>
           </a:p>
@@ -20030,7 +20121,7 @@
                 <a:ea typeface="Calibri" pitchFamily="34" charset="-122"/>
                 <a:cs typeface="Calibri" pitchFamily="34" charset="-120"/>
               </a:rPr>
-              <a:t>back or again</a:t>
+              <a:t>to deal with; a special thing</a:t>
             </a:r>
             <a:endParaRPr lang="en-US" sz="850" dirty="0"/>
           </a:p>
@@ -20053,11 +20144,11 @@
             </a:avLst>
           </a:prstGeom>
           <a:solidFill>
-            <a:srgbClr val="CCFBF1"/>
+            <a:srgbClr val="FCE7F3"/>
           </a:solidFill>
           <a:ln w="19050">
             <a:solidFill>
-              <a:srgbClr val="0D9488"/>
+              <a:srgbClr val="DB2777"/>
             </a:solidFill>
             <a:prstDash val="solid"/>
           </a:ln>
@@ -20097,13 +20188,13 @@
             <a:r>
               <a:rPr lang="en-US" sz="1300" b="1" dirty="0">
                 <a:solidFill>
-                  <a:srgbClr val="0F766E"/>
+                  <a:srgbClr val="9D174D"/>
                 </a:solidFill>
                 <a:latin typeface="Trebuchet MS" pitchFamily="34" charset="0"/>
                 <a:ea typeface="Trebuchet MS" pitchFamily="34" charset="-122"/>
                 <a:cs typeface="Trebuchet MS" pitchFamily="34" charset="-120"/>
               </a:rPr>
-              <a:t>treat</a:t>
+              <a:t>ment</a:t>
             </a:r>
             <a:endParaRPr lang="en-US" sz="1300" dirty="0"/>
           </a:p>
@@ -20142,7 +20233,7 @@
                 <a:ea typeface="Calibri" pitchFamily="34" charset="-122"/>
                 <a:cs typeface="Calibri" pitchFamily="34" charset="-120"/>
               </a:rPr>
-              <a:t>handle or deal with</a:t>
+              <a:t>result of action</a:t>
             </a:r>
             <a:endParaRPr lang="en-US" sz="850" dirty="0"/>
           </a:p>
@@ -20301,7 +20392,7 @@
                 <a:ea typeface="Trebuchet MS" pitchFamily="34" charset="-122"/>
                 <a:cs typeface="Trebuchet MS" pitchFamily="34" charset="-120"/>
               </a:rPr>
-              <a:t>re</a:t>
+              <a:t>treat</a:t>
             </a:r>
             <a:endParaRPr lang="en-US" sz="1400" dirty="0"/>
           </a:p>
@@ -20406,7 +20497,7 @@
                 <a:ea typeface="Trebuchet MS" pitchFamily="34" charset="-122"/>
                 <a:cs typeface="Trebuchet MS" pitchFamily="34" charset="-120"/>
               </a:rPr>
-              <a:t>treat</a:t>
+              <a:t>ment</a:t>
             </a:r>
             <a:endParaRPr lang="en-US" sz="1400" dirty="0"/>
           </a:p>
@@ -20830,7 +20921,7 @@
                 <a:ea typeface="Calibri" pitchFamily="34" charset="-122"/>
                 <a:cs typeface="Calibri" pitchFamily="34" charset="-120"/>
               </a:rPr>
-              <a:t>Word Labs  •  wordlabs.app  •  Root: 'treat' = handle, deal with, negotiate</a:t>
+              <a:t>Word Labs  •  wordlabs.app  •  Root: 'treat' = to deal with; a special thing</a:t>
             </a:r>
             <a:endParaRPr lang="en-US" sz="800" dirty="0"/>
           </a:p>
@@ -20969,7 +21060,7 @@
                 <a:ea typeface="Trebuchet MS" pitchFamily="34" charset="-122"/>
                 <a:cs typeface="Trebuchet MS" pitchFamily="34" charset="-120"/>
               </a:rPr>
-              <a:t>retreat</a:t>
+              <a:t>treatment</a:t>
             </a:r>
             <a:endParaRPr lang="en-US" sz="2800" dirty="0"/>
           </a:p>
@@ -21058,11 +21149,11 @@
             </a:avLst>
           </a:prstGeom>
           <a:solidFill>
-            <a:srgbClr val="DDD6FE"/>
+            <a:srgbClr val="CCFBF1"/>
           </a:solidFill>
           <a:ln w="19050">
             <a:solidFill>
-              <a:srgbClr val="7C3AED"/>
+              <a:srgbClr val="0D9488"/>
             </a:solidFill>
             <a:prstDash val="solid"/>
           </a:ln>
@@ -21102,13 +21193,13 @@
             <a:r>
               <a:rPr lang="en-US" sz="1300" b="1" dirty="0">
                 <a:solidFill>
-                  <a:srgbClr val="4C1D95"/>
+                  <a:srgbClr val="0F766E"/>
                 </a:solidFill>
                 <a:latin typeface="Trebuchet MS" pitchFamily="34" charset="0"/>
                 <a:ea typeface="Trebuchet MS" pitchFamily="34" charset="-122"/>
                 <a:cs typeface="Trebuchet MS" pitchFamily="34" charset="-120"/>
               </a:rPr>
-              <a:t>re</a:t>
+              <a:t>treat</a:t>
             </a:r>
             <a:endParaRPr lang="en-US" sz="1300" dirty="0"/>
           </a:p>
@@ -21147,7 +21238,7 @@
                 <a:ea typeface="Calibri" pitchFamily="34" charset="-122"/>
                 <a:cs typeface="Calibri" pitchFamily="34" charset="-120"/>
               </a:rPr>
-              <a:t>back or again</a:t>
+              <a:t>to deal with; a special thing</a:t>
             </a:r>
             <a:endParaRPr lang="en-US" sz="850" dirty="0"/>
           </a:p>
@@ -21170,11 +21261,11 @@
             </a:avLst>
           </a:prstGeom>
           <a:solidFill>
-            <a:srgbClr val="CCFBF1"/>
+            <a:srgbClr val="FCE7F3"/>
           </a:solidFill>
           <a:ln w="19050">
             <a:solidFill>
-              <a:srgbClr val="0D9488"/>
+              <a:srgbClr val="DB2777"/>
             </a:solidFill>
             <a:prstDash val="solid"/>
           </a:ln>
@@ -21214,13 +21305,13 @@
             <a:r>
               <a:rPr lang="en-US" sz="1300" b="1" dirty="0">
                 <a:solidFill>
-                  <a:srgbClr val="0F766E"/>
+                  <a:srgbClr val="9D174D"/>
                 </a:solidFill>
                 <a:latin typeface="Trebuchet MS" pitchFamily="34" charset="0"/>
                 <a:ea typeface="Trebuchet MS" pitchFamily="34" charset="-122"/>
                 <a:cs typeface="Trebuchet MS" pitchFamily="34" charset="-120"/>
               </a:rPr>
-              <a:t>treat</a:t>
+              <a:t>ment</a:t>
             </a:r>
             <a:endParaRPr lang="en-US" sz="1300" dirty="0"/>
           </a:p>
@@ -21259,7 +21350,7 @@
                 <a:ea typeface="Calibri" pitchFamily="34" charset="-122"/>
                 <a:cs typeface="Calibri" pitchFamily="34" charset="-120"/>
               </a:rPr>
-              <a:t>handle or deal with</a:t>
+              <a:t>result of action</a:t>
             </a:r>
             <a:endParaRPr lang="en-US" sz="850" dirty="0"/>
           </a:p>
@@ -21418,7 +21509,7 @@
                 <a:ea typeface="Trebuchet MS" pitchFamily="34" charset="-122"/>
                 <a:cs typeface="Trebuchet MS" pitchFamily="34" charset="-120"/>
               </a:rPr>
-              <a:t>re</a:t>
+              <a:t>treat</a:t>
             </a:r>
             <a:endParaRPr lang="en-US" sz="1400" dirty="0"/>
           </a:p>
@@ -21523,7 +21614,7 @@
                 <a:ea typeface="Trebuchet MS" pitchFamily="34" charset="-122"/>
                 <a:cs typeface="Trebuchet MS" pitchFamily="34" charset="-120"/>
               </a:rPr>
-              <a:t>treat</a:t>
+              <a:t>ment</a:t>
             </a:r>
             <a:endParaRPr lang="en-US" sz="1400" dirty="0"/>
           </a:p>
@@ -21630,7 +21721,7 @@
         </p:nvSpPr>
         <p:spPr>
           <a:xfrm>
-            <a:off x="2254649" y="4169664"/>
+            <a:off x="2023872" y="4169664"/>
             <a:ext cx="685800" cy="475488"/>
           </a:xfrm>
           <a:prstGeom prst="rect">
@@ -21657,7 +21748,7 @@
         </p:nvSpPr>
         <p:spPr>
           <a:xfrm>
-            <a:off x="2254649" y="4169664"/>
+            <a:off x="2023872" y="4169664"/>
             <a:ext cx="685800" cy="475488"/>
           </a:xfrm>
           <a:prstGeom prst="rect">
@@ -21682,7 +21773,7 @@
                 <a:ea typeface="Trebuchet MS" pitchFamily="34" charset="-122"/>
                 <a:cs typeface="Trebuchet MS" pitchFamily="34" charset="-120"/>
               </a:rPr>
-              <a:t>r</a:t>
+              <a:t>t</a:t>
             </a:r>
             <a:endParaRPr lang="en-US" sz="900" dirty="0"/>
           </a:p>
@@ -21696,7 +21787,7 @@
         </p:nvSpPr>
         <p:spPr>
           <a:xfrm>
-            <a:off x="3293146" y="4169664"/>
+            <a:off x="2831592" y="4169664"/>
             <a:ext cx="685800" cy="475488"/>
           </a:xfrm>
           <a:prstGeom prst="rect">
@@ -21723,7 +21814,7 @@
         </p:nvSpPr>
         <p:spPr>
           <a:xfrm>
-            <a:off x="3293146" y="4169664"/>
+            <a:off x="2831592" y="4169664"/>
             <a:ext cx="685800" cy="475488"/>
           </a:xfrm>
           <a:prstGeom prst="rect">
@@ -21748,7 +21839,7 @@
                 <a:ea typeface="Trebuchet MS" pitchFamily="34" charset="-122"/>
                 <a:cs typeface="Trebuchet MS" pitchFamily="34" charset="-120"/>
               </a:rPr>
-              <a:t>e</a:t>
+              <a:t>r</a:t>
             </a:r>
             <a:endParaRPr lang="en-US" sz="900" dirty="0"/>
           </a:p>
@@ -21762,7 +21853,7 @@
         </p:nvSpPr>
         <p:spPr>
           <a:xfrm>
-            <a:off x="4331643" y="4169664"/>
+            <a:off x="3639312" y="4169664"/>
             <a:ext cx="685800" cy="475488"/>
           </a:xfrm>
           <a:prstGeom prst="rect">
@@ -21789,7 +21880,7 @@
         </p:nvSpPr>
         <p:spPr>
           <a:xfrm>
-            <a:off x="4331643" y="4169664"/>
+            <a:off x="3639312" y="4169664"/>
             <a:ext cx="685800" cy="475488"/>
           </a:xfrm>
           <a:prstGeom prst="rect">
@@ -21814,7 +21905,7 @@
                 <a:ea typeface="Trebuchet MS" pitchFamily="34" charset="-122"/>
                 <a:cs typeface="Trebuchet MS" pitchFamily="34" charset="-120"/>
               </a:rPr>
-              <a:t>t</a:t>
+              <a:t>ea</a:t>
             </a:r>
             <a:endParaRPr lang="en-US" sz="900" dirty="0"/>
           </a:p>
@@ -21828,7 +21919,7 @@
         </p:nvSpPr>
         <p:spPr>
           <a:xfrm>
-            <a:off x="5370141" y="4169664"/>
+            <a:off x="4447032" y="4169664"/>
             <a:ext cx="685800" cy="475488"/>
           </a:xfrm>
           <a:prstGeom prst="rect">
@@ -21855,7 +21946,7 @@
         </p:nvSpPr>
         <p:spPr>
           <a:xfrm>
-            <a:off x="5370141" y="4169664"/>
+            <a:off x="4447032" y="4169664"/>
             <a:ext cx="685800" cy="475488"/>
           </a:xfrm>
           <a:prstGeom prst="rect">
@@ -21880,7 +21971,7 @@
                 <a:ea typeface="Trebuchet MS" pitchFamily="34" charset="-122"/>
                 <a:cs typeface="Trebuchet MS" pitchFamily="34" charset="-120"/>
               </a:rPr>
-              <a:t>r</a:t>
+              <a:t>t</a:t>
             </a:r>
             <a:endParaRPr lang="en-US" sz="900" dirty="0"/>
           </a:p>
@@ -21894,7 +21985,7 @@
         </p:nvSpPr>
         <p:spPr>
           <a:xfrm>
-            <a:off x="6408638" y="4169664"/>
+            <a:off x="5254752" y="4169664"/>
             <a:ext cx="685800" cy="475488"/>
           </a:xfrm>
           <a:prstGeom prst="rect">
@@ -21921,7 +22012,7 @@
         </p:nvSpPr>
         <p:spPr>
           <a:xfrm>
-            <a:off x="6408638" y="4169664"/>
+            <a:off x="5254752" y="4169664"/>
             <a:ext cx="685800" cy="475488"/>
           </a:xfrm>
           <a:prstGeom prst="rect">
@@ -21946,7 +22037,7 @@
                 <a:ea typeface="Trebuchet MS" pitchFamily="34" charset="-122"/>
                 <a:cs typeface="Trebuchet MS" pitchFamily="34" charset="-120"/>
               </a:rPr>
-              <a:t>ea</a:t>
+              <a:t>m</a:t>
             </a:r>
             <a:endParaRPr lang="en-US" sz="900" dirty="0"/>
           </a:p>
@@ -21960,7 +22051,7 @@
         </p:nvSpPr>
         <p:spPr>
           <a:xfrm>
-            <a:off x="7447135" y="4169664"/>
+            <a:off x="6062472" y="4169664"/>
             <a:ext cx="685800" cy="475488"/>
           </a:xfrm>
           <a:prstGeom prst="rect">
@@ -21987,7 +22078,139 @@
         </p:nvSpPr>
         <p:spPr>
           <a:xfrm>
-            <a:off x="7447135" y="4169664"/>
+            <a:off x="6062472" y="4169664"/>
+            <a:ext cx="685800" cy="475488"/>
+          </a:xfrm>
+          <a:prstGeom prst="rect">
+            <a:avLst/>
+          </a:prstGeom>
+          <a:noFill/>
+          <a:ln/>
+        </p:spPr>
+        <p:txBody>
+          <a:bodyPr wrap="square" lIns="0" tIns="0" rIns="0" bIns="0" rtlCol="0" anchor="ctr"/>
+          <a:lstStyle/>
+          <a:p>
+            <a:pPr algn="ctr" indent="0" marL="0">
+              <a:buNone/>
+            </a:pPr>
+            <a:r>
+              <a:rPr lang="en-US" sz="900" b="1" dirty="0">
+                <a:solidFill>
+                  <a:srgbClr val="9D174D"/>
+                </a:solidFill>
+                <a:latin typeface="Trebuchet MS" pitchFamily="34" charset="0"/>
+                <a:ea typeface="Trebuchet MS" pitchFamily="34" charset="-122"/>
+                <a:cs typeface="Trebuchet MS" pitchFamily="34" charset="-120"/>
+              </a:rPr>
+              <a:t>e</a:t>
+            </a:r>
+            <a:endParaRPr lang="en-US" sz="900" dirty="0"/>
+          </a:p>
+        </p:txBody>
+      </p:sp>
+      <p:sp>
+        <p:nvSpPr>
+          <p:cNvPr id="45" name="Shape 43"/>
+          <p:cNvSpPr/>
+          <p:nvPr/>
+        </p:nvSpPr>
+        <p:spPr>
+          <a:xfrm>
+            <a:off x="6870192" y="4169664"/>
+            <a:ext cx="685800" cy="475488"/>
+          </a:xfrm>
+          <a:prstGeom prst="rect">
+            <a:avLst>
+              <a:gd name="adj" fmla="val 7692"/>
+            </a:avLst>
+          </a:prstGeom>
+          <a:solidFill>
+            <a:srgbClr val="FFFFFF"/>
+          </a:solidFill>
+          <a:ln w="12700">
+            <a:solidFill>
+              <a:srgbClr val="DB2777"/>
+            </a:solidFill>
+            <a:prstDash val="solid"/>
+          </a:ln>
+        </p:spPr>
+      </p:sp>
+      <p:sp>
+        <p:nvSpPr>
+          <p:cNvPr id="46" name="Text 44"/>
+          <p:cNvSpPr/>
+          <p:nvPr/>
+        </p:nvSpPr>
+        <p:spPr>
+          <a:xfrm>
+            <a:off x="6870192" y="4169664"/>
+            <a:ext cx="685800" cy="475488"/>
+          </a:xfrm>
+          <a:prstGeom prst="rect">
+            <a:avLst/>
+          </a:prstGeom>
+          <a:noFill/>
+          <a:ln/>
+        </p:spPr>
+        <p:txBody>
+          <a:bodyPr wrap="square" lIns="0" tIns="0" rIns="0" bIns="0" rtlCol="0" anchor="ctr"/>
+          <a:lstStyle/>
+          <a:p>
+            <a:pPr algn="ctr" indent="0" marL="0">
+              <a:buNone/>
+            </a:pPr>
+            <a:r>
+              <a:rPr lang="en-US" sz="900" b="1" dirty="0">
+                <a:solidFill>
+                  <a:srgbClr val="9D174D"/>
+                </a:solidFill>
+                <a:latin typeface="Trebuchet MS" pitchFamily="34" charset="0"/>
+                <a:ea typeface="Trebuchet MS" pitchFamily="34" charset="-122"/>
+                <a:cs typeface="Trebuchet MS" pitchFamily="34" charset="-120"/>
+              </a:rPr>
+              <a:t>n</a:t>
+            </a:r>
+            <a:endParaRPr lang="en-US" sz="900" dirty="0"/>
+          </a:p>
+        </p:txBody>
+      </p:sp>
+      <p:sp>
+        <p:nvSpPr>
+          <p:cNvPr id="47" name="Shape 45"/>
+          <p:cNvSpPr/>
+          <p:nvPr/>
+        </p:nvSpPr>
+        <p:spPr>
+          <a:xfrm>
+            <a:off x="7677912" y="4169664"/>
+            <a:ext cx="685800" cy="475488"/>
+          </a:xfrm>
+          <a:prstGeom prst="rect">
+            <a:avLst>
+              <a:gd name="adj" fmla="val 7692"/>
+            </a:avLst>
+          </a:prstGeom>
+          <a:solidFill>
+            <a:srgbClr val="FFFFFF"/>
+          </a:solidFill>
+          <a:ln w="12700">
+            <a:solidFill>
+              <a:srgbClr val="DB2777"/>
+            </a:solidFill>
+            <a:prstDash val="solid"/>
+          </a:ln>
+        </p:spPr>
+      </p:sp>
+      <p:sp>
+        <p:nvSpPr>
+          <p:cNvPr id="48" name="Text 46"/>
+          <p:cNvSpPr/>
+          <p:nvPr/>
+        </p:nvSpPr>
+        <p:spPr>
+          <a:xfrm>
+            <a:off x="7677912" y="4169664"/>
             <a:ext cx="685800" cy="475488"/>
           </a:xfrm>
           <a:prstGeom prst="rect">
@@ -22304,7 +22527,7 @@
                 <a:ea typeface="Calibri" pitchFamily="34" charset="-122"/>
                 <a:cs typeface="Calibri" pitchFamily="34" charset="-120"/>
               </a:rPr>
-              <a:t>Word Labs  •  wordlabs.app  •  Root: 'treat' = handle, deal with, negotiate</a:t>
+              <a:t>Word Labs  •  wordlabs.app  •  Root: 'treat' = to deal with; a special thing</a:t>
             </a:r>
             <a:endParaRPr lang="en-US" sz="800" dirty="0"/>
           </a:p>
@@ -22443,7 +22666,7 @@
                 <a:ea typeface="Trebuchet MS" pitchFamily="34" charset="-122"/>
                 <a:cs typeface="Trebuchet MS" pitchFamily="34" charset="-120"/>
               </a:rPr>
-              <a:t>mistreatment</a:t>
+              <a:t>treatments</a:t>
             </a:r>
             <a:endParaRPr lang="en-US" sz="2800" dirty="0"/>
           </a:p>
@@ -23131,7 +23354,7 @@
                 <a:ea typeface="Calibri" pitchFamily="34" charset="-122"/>
                 <a:cs typeface="Calibri" pitchFamily="34" charset="-120"/>
               </a:rPr>
-              <a:t>Word Labs  •  wordlabs.app  •  Root: 'treat' = handle, deal with, negotiate</a:t>
+              <a:t>Word Labs  •  wordlabs.app  •  Root: 'treat' = to deal with; a special thing</a:t>
             </a:r>
             <a:endParaRPr lang="en-US" sz="800" dirty="0"/>
           </a:p>
@@ -23270,7 +23493,7 @@
                 <a:ea typeface="Trebuchet MS" pitchFamily="34" charset="-122"/>
                 <a:cs typeface="Trebuchet MS" pitchFamily="34" charset="-120"/>
               </a:rPr>
-              <a:t>mistreatment</a:t>
+              <a:t>treatments</a:t>
             </a:r>
             <a:endParaRPr lang="en-US" sz="2800" dirty="0"/>
           </a:p>
@@ -23359,11 +23582,11 @@
             </a:avLst>
           </a:prstGeom>
           <a:solidFill>
-            <a:srgbClr val="DDD6FE"/>
+            <a:srgbClr val="CCFBF1"/>
           </a:solidFill>
           <a:ln w="19050">
             <a:solidFill>
-              <a:srgbClr val="7C3AED"/>
+              <a:srgbClr val="0D9488"/>
             </a:solidFill>
             <a:prstDash val="solid"/>
           </a:ln>
@@ -23403,13 +23626,13 @@
             <a:r>
               <a:rPr lang="en-US" sz="1300" b="1" dirty="0">
                 <a:solidFill>
-                  <a:srgbClr val="4C1D95"/>
+                  <a:srgbClr val="0F766E"/>
                 </a:solidFill>
                 <a:latin typeface="Trebuchet MS" pitchFamily="34" charset="0"/>
                 <a:ea typeface="Trebuchet MS" pitchFamily="34" charset="-122"/>
                 <a:cs typeface="Trebuchet MS" pitchFamily="34" charset="-120"/>
               </a:rPr>
-              <a:t>mis</a:t>
+              <a:t>treat</a:t>
             </a:r>
             <a:endParaRPr lang="en-US" sz="1300" dirty="0"/>
           </a:p>
@@ -23448,7 +23671,7 @@
                 <a:ea typeface="Calibri" pitchFamily="34" charset="-122"/>
                 <a:cs typeface="Calibri" pitchFamily="34" charset="-120"/>
               </a:rPr>
-              <a:t>wrongly or badly</a:t>
+              <a:t>to deal with; a special thing</a:t>
             </a:r>
             <a:endParaRPr lang="en-US" sz="850" dirty="0"/>
           </a:p>
@@ -23471,11 +23694,11 @@
             </a:avLst>
           </a:prstGeom>
           <a:solidFill>
-            <a:srgbClr val="CCFBF1"/>
+            <a:srgbClr val="FCE7F3"/>
           </a:solidFill>
           <a:ln w="19050">
             <a:solidFill>
-              <a:srgbClr val="0D9488"/>
+              <a:srgbClr val="DB2777"/>
             </a:solidFill>
             <a:prstDash val="solid"/>
           </a:ln>
@@ -23515,13 +23738,13 @@
             <a:r>
               <a:rPr lang="en-US" sz="1300" b="1" dirty="0">
                 <a:solidFill>
-                  <a:srgbClr val="0F766E"/>
+                  <a:srgbClr val="9D174D"/>
                 </a:solidFill>
                 <a:latin typeface="Trebuchet MS" pitchFamily="34" charset="0"/>
                 <a:ea typeface="Trebuchet MS" pitchFamily="34" charset="-122"/>
                 <a:cs typeface="Trebuchet MS" pitchFamily="34" charset="-120"/>
               </a:rPr>
-              <a:t>treat</a:t>
+              <a:t>ment</a:t>
             </a:r>
             <a:endParaRPr lang="en-US" sz="1300" dirty="0"/>
           </a:p>
@@ -23560,7 +23783,7 @@
                 <a:ea typeface="Calibri" pitchFamily="34" charset="-122"/>
                 <a:cs typeface="Calibri" pitchFamily="34" charset="-120"/>
               </a:rPr>
-              <a:t>handle or deal with</a:t>
+              <a:t>result of action</a:t>
             </a:r>
             <a:endParaRPr lang="en-US" sz="850" dirty="0"/>
           </a:p>
@@ -23633,7 +23856,7 @@
                 <a:ea typeface="Trebuchet MS" pitchFamily="34" charset="-122"/>
                 <a:cs typeface="Trebuchet MS" pitchFamily="34" charset="-120"/>
               </a:rPr>
-              <a:t>ment</a:t>
+              <a:t>s</a:t>
             </a:r>
             <a:endParaRPr lang="en-US" sz="1300" dirty="0"/>
           </a:p>
@@ -23672,7 +23895,7 @@
                 <a:ea typeface="Calibri" pitchFamily="34" charset="-122"/>
                 <a:cs typeface="Calibri" pitchFamily="34" charset="-120"/>
               </a:rPr>
-              <a:t>result or condition</a:t>
+              <a:t>plural or present tense</a:t>
             </a:r>
             <a:endParaRPr lang="en-US" sz="850" dirty="0"/>
           </a:p>
@@ -24228,7 +24451,7 @@
                 <a:ea typeface="Calibri" pitchFamily="34" charset="-122"/>
                 <a:cs typeface="Calibri" pitchFamily="34" charset="-120"/>
               </a:rPr>
-              <a:t>Word Labs  •  wordlabs.app  •  Root: 'treat' = handle, deal with, negotiate</a:t>
+              <a:t>Word Labs  •  wordlabs.app  •  Root: 'treat' = to deal with; a special thing</a:t>
             </a:r>
             <a:endParaRPr lang="en-US" sz="800" dirty="0"/>
           </a:p>
@@ -24301,7 +24524,7 @@
                 <a:ea typeface="Trebuchet MS" pitchFamily="34" charset="-122"/>
                 <a:cs typeface="Trebuchet MS" pitchFamily="34" charset="-120"/>
               </a:rPr>
-              <a:t>We are learning that the root 'treat' means 'handle, deal with, negotiate'.</a:t>
+              <a:t>We are learning that the root 'treat' means 'to deal with; a special thing'.</a:t>
             </a:r>
             <a:endParaRPr lang="en-US" sz="2000" dirty="0"/>
           </a:p>
@@ -24947,7 +25170,7 @@
                 <a:ea typeface="Calibri" pitchFamily="34" charset="-122"/>
                 <a:cs typeface="Calibri" pitchFamily="34" charset="-120"/>
               </a:rPr>
-              <a:t>Word Labs  •  wordlabs.app  •  Root: 'treat' = handle, deal with, negotiate</a:t>
+              <a:t>Word Labs  •  wordlabs.app  •  Root: 'treat' = to deal with; a special thing</a:t>
             </a:r>
             <a:endParaRPr lang="en-US" sz="800" dirty="0"/>
           </a:p>
@@ -25086,7 +25309,7 @@
                 <a:ea typeface="Trebuchet MS" pitchFamily="34" charset="-122"/>
                 <a:cs typeface="Trebuchet MS" pitchFamily="34" charset="-120"/>
               </a:rPr>
-              <a:t>mistreatment</a:t>
+              <a:t>treatments</a:t>
             </a:r>
             <a:endParaRPr lang="en-US" sz="2800" dirty="0"/>
           </a:p>
@@ -25175,11 +25398,11 @@
             </a:avLst>
           </a:prstGeom>
           <a:solidFill>
-            <a:srgbClr val="DDD6FE"/>
+            <a:srgbClr val="CCFBF1"/>
           </a:solidFill>
           <a:ln w="19050">
             <a:solidFill>
-              <a:srgbClr val="7C3AED"/>
+              <a:srgbClr val="0D9488"/>
             </a:solidFill>
             <a:prstDash val="solid"/>
           </a:ln>
@@ -25219,13 +25442,13 @@
             <a:r>
               <a:rPr lang="en-US" sz="1300" b="1" dirty="0">
                 <a:solidFill>
-                  <a:srgbClr val="4C1D95"/>
+                  <a:srgbClr val="0F766E"/>
                 </a:solidFill>
                 <a:latin typeface="Trebuchet MS" pitchFamily="34" charset="0"/>
                 <a:ea typeface="Trebuchet MS" pitchFamily="34" charset="-122"/>
                 <a:cs typeface="Trebuchet MS" pitchFamily="34" charset="-120"/>
               </a:rPr>
-              <a:t>mis</a:t>
+              <a:t>treat</a:t>
             </a:r>
             <a:endParaRPr lang="en-US" sz="1300" dirty="0"/>
           </a:p>
@@ -25264,7 +25487,7 @@
                 <a:ea typeface="Calibri" pitchFamily="34" charset="-122"/>
                 <a:cs typeface="Calibri" pitchFamily="34" charset="-120"/>
               </a:rPr>
-              <a:t>wrongly or badly</a:t>
+              <a:t>to deal with; a special thing</a:t>
             </a:r>
             <a:endParaRPr lang="en-US" sz="850" dirty="0"/>
           </a:p>
@@ -25287,11 +25510,11 @@
             </a:avLst>
           </a:prstGeom>
           <a:solidFill>
-            <a:srgbClr val="CCFBF1"/>
+            <a:srgbClr val="FCE7F3"/>
           </a:solidFill>
           <a:ln w="19050">
             <a:solidFill>
-              <a:srgbClr val="0D9488"/>
+              <a:srgbClr val="DB2777"/>
             </a:solidFill>
             <a:prstDash val="solid"/>
           </a:ln>
@@ -25331,13 +25554,13 @@
             <a:r>
               <a:rPr lang="en-US" sz="1300" b="1" dirty="0">
                 <a:solidFill>
-                  <a:srgbClr val="0F766E"/>
+                  <a:srgbClr val="9D174D"/>
                 </a:solidFill>
                 <a:latin typeface="Trebuchet MS" pitchFamily="34" charset="0"/>
                 <a:ea typeface="Trebuchet MS" pitchFamily="34" charset="-122"/>
                 <a:cs typeface="Trebuchet MS" pitchFamily="34" charset="-120"/>
               </a:rPr>
-              <a:t>treat</a:t>
+              <a:t>ment</a:t>
             </a:r>
             <a:endParaRPr lang="en-US" sz="1300" dirty="0"/>
           </a:p>
@@ -25376,7 +25599,7 @@
                 <a:ea typeface="Calibri" pitchFamily="34" charset="-122"/>
                 <a:cs typeface="Calibri" pitchFamily="34" charset="-120"/>
               </a:rPr>
-              <a:t>handle or deal with</a:t>
+              <a:t>result of action</a:t>
             </a:r>
             <a:endParaRPr lang="en-US" sz="850" dirty="0"/>
           </a:p>
@@ -25449,7 +25672,7 @@
                 <a:ea typeface="Trebuchet MS" pitchFamily="34" charset="-122"/>
                 <a:cs typeface="Trebuchet MS" pitchFamily="34" charset="-120"/>
               </a:rPr>
-              <a:t>ment</a:t>
+              <a:t>s</a:t>
             </a:r>
             <a:endParaRPr lang="en-US" sz="1300" dirty="0"/>
           </a:p>
@@ -25488,7 +25711,7 @@
                 <a:ea typeface="Calibri" pitchFamily="34" charset="-122"/>
                 <a:cs typeface="Calibri" pitchFamily="34" charset="-120"/>
               </a:rPr>
-              <a:t>result or condition</a:t>
+              <a:t>plural or present tense</a:t>
             </a:r>
             <a:endParaRPr lang="en-US" sz="850" dirty="0"/>
           </a:p>
@@ -25595,7 +25818,7 @@
         </p:nvSpPr>
         <p:spPr>
           <a:xfrm>
-            <a:off x="2313432" y="3364992"/>
+            <a:off x="2999232" y="3364992"/>
             <a:ext cx="1645920" cy="475488"/>
           </a:xfrm>
           <a:prstGeom prst="rect">
@@ -25622,7 +25845,7 @@
         </p:nvSpPr>
         <p:spPr>
           <a:xfrm>
-            <a:off x="2313432" y="3364992"/>
+            <a:off x="2999232" y="3364992"/>
             <a:ext cx="1645920" cy="475488"/>
           </a:xfrm>
           <a:prstGeom prst="rect">
@@ -25647,7 +25870,7 @@
                 <a:ea typeface="Trebuchet MS" pitchFamily="34" charset="-122"/>
                 <a:cs typeface="Trebuchet MS" pitchFamily="34" charset="-120"/>
               </a:rPr>
-              <a:t>mis</a:t>
+              <a:t>treat</a:t>
             </a:r>
             <a:endParaRPr lang="en-US" sz="1400" dirty="0"/>
           </a:p>
@@ -25661,8 +25884,8 @@
         </p:nvSpPr>
         <p:spPr>
           <a:xfrm>
-            <a:off x="3959352" y="3364992"/>
-            <a:ext cx="411480" cy="475488"/>
+            <a:off x="4645152" y="3364992"/>
+            <a:ext cx="1097280" cy="475488"/>
           </a:xfrm>
           <a:prstGeom prst="rect">
             <a:avLst/>
@@ -25700,7 +25923,7 @@
         </p:nvSpPr>
         <p:spPr>
           <a:xfrm>
-            <a:off x="4370832" y="3364992"/>
+            <a:off x="5742432" y="3364992"/>
             <a:ext cx="1645920" cy="475488"/>
           </a:xfrm>
           <a:prstGeom prst="rect">
@@ -25727,7 +25950,7 @@
         </p:nvSpPr>
         <p:spPr>
           <a:xfrm>
-            <a:off x="4370832" y="3364992"/>
+            <a:off x="5742432" y="3364992"/>
             <a:ext cx="1645920" cy="475488"/>
           </a:xfrm>
           <a:prstGeom prst="rect">
@@ -25752,7 +25975,7 @@
                 <a:ea typeface="Trebuchet MS" pitchFamily="34" charset="-122"/>
                 <a:cs typeface="Trebuchet MS" pitchFamily="34" charset="-120"/>
               </a:rPr>
-              <a:t>treat</a:t>
+              <a:t>ments</a:t>
             </a:r>
             <a:endParaRPr lang="en-US" sz="1400" dirty="0"/>
           </a:p>
@@ -25760,14 +25983,41 @@
       </p:sp>
       <p:sp>
         <p:nvSpPr>
-          <p:cNvPr id="33" name="Text 31"/>
-          <p:cNvSpPr/>
-          <p:nvPr/>
-        </p:nvSpPr>
-        <p:spPr>
-          <a:xfrm>
-            <a:off x="6016752" y="3364992"/>
-            <a:ext cx="411480" cy="475488"/>
+          <p:cNvPr id="33" name="Shape 31"/>
+          <p:cNvSpPr/>
+          <p:nvPr/>
+        </p:nvSpPr>
+        <p:spPr>
+          <a:xfrm>
+            <a:off x="365760" y="4096512"/>
+            <a:ext cx="1371600" cy="804672"/>
+          </a:xfrm>
+          <a:prstGeom prst="rect">
+            <a:avLst>
+              <a:gd name="adj" fmla="val 6818"/>
+            </a:avLst>
+          </a:prstGeom>
+          <a:solidFill>
+            <a:srgbClr val="E2E8F0"/>
+          </a:solidFill>
+          <a:ln w="12700">
+            <a:solidFill>
+              <a:srgbClr val="E2E8F0"/>
+            </a:solidFill>
+            <a:prstDash val="solid"/>
+          </a:ln>
+        </p:spPr>
+      </p:sp>
+      <p:sp>
+        <p:nvSpPr>
+          <p:cNvPr id="34" name="Text 32"/>
+          <p:cNvSpPr/>
+          <p:nvPr/>
+        </p:nvSpPr>
+        <p:spPr>
+          <a:xfrm>
+            <a:off x="365760" y="4096512"/>
+            <a:ext cx="1371600" cy="804672"/>
           </a:xfrm>
           <a:prstGeom prst="rect">
             <a:avLst/>
@@ -25783,96 +26033,30 @@
               <a:buNone/>
             </a:pPr>
             <a:r>
-              <a:rPr lang="en-US" sz="1600" b="1" dirty="0">
-                <a:solidFill>
-                  <a:srgbClr val="0D9488"/>
+              <a:rPr lang="en-US" sz="1100" b="1" dirty="0">
+                <a:solidFill>
+                  <a:srgbClr val="475569"/>
                 </a:solidFill>
                 <a:latin typeface="Trebuchet MS" pitchFamily="34" charset="0"/>
                 <a:ea typeface="Trebuchet MS" pitchFamily="34" charset="-122"/>
                 <a:cs typeface="Trebuchet MS" pitchFamily="34" charset="-120"/>
               </a:rPr>
-              <a:t>·</a:t>
-            </a:r>
-            <a:endParaRPr lang="en-US" sz="1600" dirty="0"/>
-          </a:p>
-        </p:txBody>
-      </p:sp>
-      <p:sp>
-        <p:nvSpPr>
-          <p:cNvPr id="34" name="Shape 32"/>
-          <p:cNvSpPr/>
-          <p:nvPr/>
-        </p:nvSpPr>
-        <p:spPr>
-          <a:xfrm>
-            <a:off x="6428232" y="3364992"/>
-            <a:ext cx="1645920" cy="475488"/>
-          </a:xfrm>
-          <a:prstGeom prst="rect">
-            <a:avLst>
-              <a:gd name="adj" fmla="val 9615"/>
-            </a:avLst>
-          </a:prstGeom>
-          <a:solidFill>
-            <a:srgbClr val="FFFFFF"/>
-          </a:solidFill>
-          <a:ln w="12700">
-            <a:solidFill>
-              <a:srgbClr val="0D9488"/>
-            </a:solidFill>
-            <a:prstDash val="solid"/>
-          </a:ln>
-        </p:spPr>
-      </p:sp>
-      <p:sp>
-        <p:nvSpPr>
-          <p:cNvPr id="35" name="Text 33"/>
-          <p:cNvSpPr/>
-          <p:nvPr/>
-        </p:nvSpPr>
-        <p:spPr>
-          <a:xfrm>
-            <a:off x="6428232" y="3364992"/>
-            <a:ext cx="1645920" cy="475488"/>
-          </a:xfrm>
-          <a:prstGeom prst="rect">
-            <a:avLst/>
-          </a:prstGeom>
-          <a:noFill/>
-          <a:ln/>
-        </p:spPr>
-        <p:txBody>
-          <a:bodyPr wrap="square" lIns="0" tIns="0" rIns="0" bIns="0" rtlCol="0" anchor="ctr"/>
-          <a:lstStyle/>
-          <a:p>
-            <a:pPr algn="ctr" indent="0" marL="0">
-              <a:buNone/>
-            </a:pPr>
-            <a:r>
-              <a:rPr lang="en-US" sz="1400" b="1" dirty="0">
-                <a:solidFill>
-                  <a:srgbClr val="0D9488"/>
-                </a:solidFill>
-                <a:latin typeface="Trebuchet MS" pitchFamily="34" charset="0"/>
-                <a:ea typeface="Trebuchet MS" pitchFamily="34" charset="-122"/>
-                <a:cs typeface="Trebuchet MS" pitchFamily="34" charset="-120"/>
-              </a:rPr>
-              <a:t>ment</a:t>
-            </a:r>
-            <a:endParaRPr lang="en-US" sz="1400" dirty="0"/>
-          </a:p>
-        </p:txBody>
-      </p:sp>
-      <p:sp>
-        <p:nvSpPr>
-          <p:cNvPr id="36" name="Shape 34"/>
-          <p:cNvSpPr/>
-          <p:nvPr/>
-        </p:nvSpPr>
-        <p:spPr>
-          <a:xfrm>
-            <a:off x="365760" y="4096512"/>
-            <a:ext cx="1371600" cy="804672"/>
+              <a:t>Phonemes</a:t>
+            </a:r>
+            <a:endParaRPr lang="en-US" sz="1100" dirty="0"/>
+          </a:p>
+        </p:txBody>
+      </p:sp>
+      <p:sp>
+        <p:nvSpPr>
+          <p:cNvPr id="35" name="Shape 33"/>
+          <p:cNvSpPr/>
+          <p:nvPr/>
+        </p:nvSpPr>
+        <p:spPr>
+          <a:xfrm>
+            <a:off x="1874520" y="4096512"/>
+            <a:ext cx="6903720" cy="804672"/>
           </a:xfrm>
           <a:prstGeom prst="rect">
             <a:avLst>
@@ -25880,85 +26064,19 @@
             </a:avLst>
           </a:prstGeom>
           <a:solidFill>
-            <a:srgbClr val="E2E8F0"/>
+            <a:srgbClr val="F8FAFC"/>
           </a:solidFill>
           <a:ln w="12700">
             <a:solidFill>
               <a:srgbClr val="E2E8F0"/>
             </a:solidFill>
-            <a:prstDash val="solid"/>
-          </a:ln>
-        </p:spPr>
-      </p:sp>
-      <p:sp>
-        <p:nvSpPr>
-          <p:cNvPr id="37" name="Text 35"/>
-          <p:cNvSpPr/>
-          <p:nvPr/>
-        </p:nvSpPr>
-        <p:spPr>
-          <a:xfrm>
-            <a:off x="365760" y="4096512"/>
-            <a:ext cx="1371600" cy="804672"/>
-          </a:xfrm>
-          <a:prstGeom prst="rect">
-            <a:avLst/>
-          </a:prstGeom>
-          <a:noFill/>
-          <a:ln/>
-        </p:spPr>
-        <p:txBody>
-          <a:bodyPr wrap="square" lIns="0" tIns="0" rIns="0" bIns="0" rtlCol="0" anchor="ctr"/>
-          <a:lstStyle/>
-          <a:p>
-            <a:pPr algn="ctr" indent="0" marL="0">
-              <a:buNone/>
-            </a:pPr>
-            <a:r>
-              <a:rPr lang="en-US" sz="1100" b="1" dirty="0">
-                <a:solidFill>
-                  <a:srgbClr val="475569"/>
-                </a:solidFill>
-                <a:latin typeface="Trebuchet MS" pitchFamily="34" charset="0"/>
-                <a:ea typeface="Trebuchet MS" pitchFamily="34" charset="-122"/>
-                <a:cs typeface="Trebuchet MS" pitchFamily="34" charset="-120"/>
-              </a:rPr>
-              <a:t>Phonemes</a:t>
-            </a:r>
-            <a:endParaRPr lang="en-US" sz="1100" dirty="0"/>
-          </a:p>
-        </p:txBody>
-      </p:sp>
-      <p:sp>
-        <p:nvSpPr>
-          <p:cNvPr id="38" name="Shape 36"/>
-          <p:cNvSpPr/>
-          <p:nvPr/>
-        </p:nvSpPr>
-        <p:spPr>
-          <a:xfrm>
-            <a:off x="1874520" y="4096512"/>
-            <a:ext cx="6903720" cy="804672"/>
-          </a:xfrm>
-          <a:prstGeom prst="rect">
-            <a:avLst>
-              <a:gd name="adj" fmla="val 6818"/>
-            </a:avLst>
-          </a:prstGeom>
-          <a:solidFill>
-            <a:srgbClr val="F8FAFC"/>
-          </a:solidFill>
-          <a:ln w="12700">
-            <a:solidFill>
-              <a:srgbClr val="E2E8F0"/>
-            </a:solidFill>
             <a:prstDash val="dash"/>
           </a:ln>
         </p:spPr>
       </p:sp>
       <p:sp>
         <p:nvSpPr>
-          <p:cNvPr id="39" name="Text 37"/>
+          <p:cNvPr id="36" name="Text 34"/>
           <p:cNvSpPr/>
           <p:nvPr/>
         </p:nvSpPr>
@@ -26281,7 +26399,7 @@
                 <a:ea typeface="Calibri" pitchFamily="34" charset="-122"/>
                 <a:cs typeface="Calibri" pitchFamily="34" charset="-120"/>
               </a:rPr>
-              <a:t>Word Labs  •  wordlabs.app  •  Root: 'treat' = handle, deal with, negotiate</a:t>
+              <a:t>Word Labs  •  wordlabs.app  •  Root: 'treat' = to deal with; a special thing</a:t>
             </a:r>
             <a:endParaRPr lang="en-US" sz="800" dirty="0"/>
           </a:p>
@@ -26420,7 +26538,7 @@
                 <a:ea typeface="Trebuchet MS" pitchFamily="34" charset="-122"/>
                 <a:cs typeface="Trebuchet MS" pitchFamily="34" charset="-120"/>
               </a:rPr>
-              <a:t>mistreatment</a:t>
+              <a:t>treatments</a:t>
             </a:r>
             <a:endParaRPr lang="en-US" sz="2800" dirty="0"/>
           </a:p>
@@ -26509,11 +26627,11 @@
             </a:avLst>
           </a:prstGeom>
           <a:solidFill>
-            <a:srgbClr val="DDD6FE"/>
+            <a:srgbClr val="CCFBF1"/>
           </a:solidFill>
           <a:ln w="19050">
             <a:solidFill>
-              <a:srgbClr val="7C3AED"/>
+              <a:srgbClr val="0D9488"/>
             </a:solidFill>
             <a:prstDash val="solid"/>
           </a:ln>
@@ -26553,13 +26671,13 @@
             <a:r>
               <a:rPr lang="en-US" sz="1300" b="1" dirty="0">
                 <a:solidFill>
-                  <a:srgbClr val="4C1D95"/>
+                  <a:srgbClr val="0F766E"/>
                 </a:solidFill>
                 <a:latin typeface="Trebuchet MS" pitchFamily="34" charset="0"/>
                 <a:ea typeface="Trebuchet MS" pitchFamily="34" charset="-122"/>
                 <a:cs typeface="Trebuchet MS" pitchFamily="34" charset="-120"/>
               </a:rPr>
-              <a:t>mis</a:t>
+              <a:t>treat</a:t>
             </a:r>
             <a:endParaRPr lang="en-US" sz="1300" dirty="0"/>
           </a:p>
@@ -26598,7 +26716,7 @@
                 <a:ea typeface="Calibri" pitchFamily="34" charset="-122"/>
                 <a:cs typeface="Calibri" pitchFamily="34" charset="-120"/>
               </a:rPr>
-              <a:t>wrongly or badly</a:t>
+              <a:t>to deal with; a special thing</a:t>
             </a:r>
             <a:endParaRPr lang="en-US" sz="850" dirty="0"/>
           </a:p>
@@ -26621,11 +26739,11 @@
             </a:avLst>
           </a:prstGeom>
           <a:solidFill>
-            <a:srgbClr val="CCFBF1"/>
+            <a:srgbClr val="FCE7F3"/>
           </a:solidFill>
           <a:ln w="19050">
             <a:solidFill>
-              <a:srgbClr val="0D9488"/>
+              <a:srgbClr val="DB2777"/>
             </a:solidFill>
             <a:prstDash val="solid"/>
           </a:ln>
@@ -26665,13 +26783,13 @@
             <a:r>
               <a:rPr lang="en-US" sz="1300" b="1" dirty="0">
                 <a:solidFill>
-                  <a:srgbClr val="0F766E"/>
+                  <a:srgbClr val="9D174D"/>
                 </a:solidFill>
                 <a:latin typeface="Trebuchet MS" pitchFamily="34" charset="0"/>
                 <a:ea typeface="Trebuchet MS" pitchFamily="34" charset="-122"/>
                 <a:cs typeface="Trebuchet MS" pitchFamily="34" charset="-120"/>
               </a:rPr>
-              <a:t>treat</a:t>
+              <a:t>ment</a:t>
             </a:r>
             <a:endParaRPr lang="en-US" sz="1300" dirty="0"/>
           </a:p>
@@ -26710,7 +26828,7 @@
                 <a:ea typeface="Calibri" pitchFamily="34" charset="-122"/>
                 <a:cs typeface="Calibri" pitchFamily="34" charset="-120"/>
               </a:rPr>
-              <a:t>handle or deal with</a:t>
+              <a:t>result of action</a:t>
             </a:r>
             <a:endParaRPr lang="en-US" sz="850" dirty="0"/>
           </a:p>
@@ -26783,7 +26901,7 @@
                 <a:ea typeface="Trebuchet MS" pitchFamily="34" charset="-122"/>
                 <a:cs typeface="Trebuchet MS" pitchFamily="34" charset="-120"/>
               </a:rPr>
-              <a:t>ment</a:t>
+              <a:t>s</a:t>
             </a:r>
             <a:endParaRPr lang="en-US" sz="1300" dirty="0"/>
           </a:p>
@@ -26822,7 +26940,7 @@
                 <a:ea typeface="Calibri" pitchFamily="34" charset="-122"/>
                 <a:cs typeface="Calibri" pitchFamily="34" charset="-120"/>
               </a:rPr>
-              <a:t>result or condition</a:t>
+              <a:t>plural or present tense</a:t>
             </a:r>
             <a:endParaRPr lang="en-US" sz="850" dirty="0"/>
           </a:p>
@@ -26929,7 +27047,7 @@
         </p:nvSpPr>
         <p:spPr>
           <a:xfrm>
-            <a:off x="2313432" y="3364992"/>
+            <a:off x="2999232" y="3364992"/>
             <a:ext cx="1645920" cy="475488"/>
           </a:xfrm>
           <a:prstGeom prst="rect">
@@ -26956,7 +27074,7 @@
         </p:nvSpPr>
         <p:spPr>
           <a:xfrm>
-            <a:off x="2313432" y="3364992"/>
+            <a:off x="2999232" y="3364992"/>
             <a:ext cx="1645920" cy="475488"/>
           </a:xfrm>
           <a:prstGeom prst="rect">
@@ -26981,7 +27099,7 @@
                 <a:ea typeface="Trebuchet MS" pitchFamily="34" charset="-122"/>
                 <a:cs typeface="Trebuchet MS" pitchFamily="34" charset="-120"/>
               </a:rPr>
-              <a:t>mis</a:t>
+              <a:t>treat</a:t>
             </a:r>
             <a:endParaRPr lang="en-US" sz="1400" dirty="0"/>
           </a:p>
@@ -26995,8 +27113,8 @@
         </p:nvSpPr>
         <p:spPr>
           <a:xfrm>
-            <a:off x="3959352" y="3364992"/>
-            <a:ext cx="411480" cy="475488"/>
+            <a:off x="4645152" y="3364992"/>
+            <a:ext cx="1097280" cy="475488"/>
           </a:xfrm>
           <a:prstGeom prst="rect">
             <a:avLst/>
@@ -27034,7 +27152,7 @@
         </p:nvSpPr>
         <p:spPr>
           <a:xfrm>
-            <a:off x="4370832" y="3364992"/>
+            <a:off x="5742432" y="3364992"/>
             <a:ext cx="1645920" cy="475488"/>
           </a:xfrm>
           <a:prstGeom prst="rect">
@@ -27061,7 +27179,7 @@
         </p:nvSpPr>
         <p:spPr>
           <a:xfrm>
-            <a:off x="4370832" y="3364992"/>
+            <a:off x="5742432" y="3364992"/>
             <a:ext cx="1645920" cy="475488"/>
           </a:xfrm>
           <a:prstGeom prst="rect">
@@ -27086,7 +27204,7 @@
                 <a:ea typeface="Trebuchet MS" pitchFamily="34" charset="-122"/>
                 <a:cs typeface="Trebuchet MS" pitchFamily="34" charset="-120"/>
               </a:rPr>
-              <a:t>treat</a:t>
+              <a:t>ments</a:t>
             </a:r>
             <a:endParaRPr lang="en-US" sz="1400" dirty="0"/>
           </a:p>
@@ -27094,14 +27212,41 @@
       </p:sp>
       <p:sp>
         <p:nvSpPr>
-          <p:cNvPr id="33" name="Text 31"/>
-          <p:cNvSpPr/>
-          <p:nvPr/>
-        </p:nvSpPr>
-        <p:spPr>
-          <a:xfrm>
-            <a:off x="6016752" y="3364992"/>
-            <a:ext cx="411480" cy="475488"/>
+          <p:cNvPr id="33" name="Shape 31"/>
+          <p:cNvSpPr/>
+          <p:nvPr/>
+        </p:nvSpPr>
+        <p:spPr>
+          <a:xfrm>
+            <a:off x="365760" y="4096512"/>
+            <a:ext cx="1371600" cy="804672"/>
+          </a:xfrm>
+          <a:prstGeom prst="rect">
+            <a:avLst>
+              <a:gd name="adj" fmla="val 6818"/>
+            </a:avLst>
+          </a:prstGeom>
+          <a:solidFill>
+            <a:srgbClr val="E2E8F0"/>
+          </a:solidFill>
+          <a:ln w="12700">
+            <a:solidFill>
+              <a:srgbClr val="E2E8F0"/>
+            </a:solidFill>
+            <a:prstDash val="solid"/>
+          </a:ln>
+        </p:spPr>
+      </p:sp>
+      <p:sp>
+        <p:nvSpPr>
+          <p:cNvPr id="34" name="Text 32"/>
+          <p:cNvSpPr/>
+          <p:nvPr/>
+        </p:nvSpPr>
+        <p:spPr>
+          <a:xfrm>
+            <a:off x="365760" y="4096512"/>
+            <a:ext cx="1371600" cy="804672"/>
           </a:xfrm>
           <a:prstGeom prst="rect">
             <a:avLst/>
@@ -27117,57 +27262,84 @@
               <a:buNone/>
             </a:pPr>
             <a:r>
-              <a:rPr lang="en-US" sz="1600" b="1" dirty="0">
-                <a:solidFill>
-                  <a:srgbClr val="0D9488"/>
+              <a:rPr lang="en-US" sz="1100" b="1" dirty="0">
+                <a:solidFill>
+                  <a:srgbClr val="475569"/>
                 </a:solidFill>
                 <a:latin typeface="Trebuchet MS" pitchFamily="34" charset="0"/>
                 <a:ea typeface="Trebuchet MS" pitchFamily="34" charset="-122"/>
                 <a:cs typeface="Trebuchet MS" pitchFamily="34" charset="-120"/>
               </a:rPr>
-              <a:t>·</a:t>
-            </a:r>
-            <a:endParaRPr lang="en-US" sz="1600" dirty="0"/>
-          </a:p>
-        </p:txBody>
-      </p:sp>
-      <p:sp>
-        <p:nvSpPr>
-          <p:cNvPr id="34" name="Shape 32"/>
-          <p:cNvSpPr/>
-          <p:nvPr/>
-        </p:nvSpPr>
-        <p:spPr>
-          <a:xfrm>
-            <a:off x="6428232" y="3364992"/>
-            <a:ext cx="1645920" cy="475488"/>
+              <a:t>Phonemes</a:t>
+            </a:r>
+            <a:endParaRPr lang="en-US" sz="1100" dirty="0"/>
+          </a:p>
+        </p:txBody>
+      </p:sp>
+      <p:sp>
+        <p:nvSpPr>
+          <p:cNvPr id="35" name="Shape 33"/>
+          <p:cNvSpPr/>
+          <p:nvPr/>
+        </p:nvSpPr>
+        <p:spPr>
+          <a:xfrm>
+            <a:off x="1874520" y="4096512"/>
+            <a:ext cx="6903720" cy="658368"/>
           </a:xfrm>
           <a:prstGeom prst="rect">
             <a:avLst>
-              <a:gd name="adj" fmla="val 9615"/>
+              <a:gd name="adj" fmla="val 8333"/>
             </a:avLst>
           </a:prstGeom>
           <a:solidFill>
+            <a:srgbClr val="FCE7F3"/>
+          </a:solidFill>
+          <a:ln w="12700">
+            <a:solidFill>
+              <a:srgbClr val="DB2777"/>
+            </a:solidFill>
+            <a:prstDash val="solid"/>
+          </a:ln>
+        </p:spPr>
+      </p:sp>
+      <p:sp>
+        <p:nvSpPr>
+          <p:cNvPr id="36" name="Shape 34"/>
+          <p:cNvSpPr/>
+          <p:nvPr/>
+        </p:nvSpPr>
+        <p:spPr>
+          <a:xfrm>
+            <a:off x="1951330" y="4169664"/>
+            <a:ext cx="676656" cy="475488"/>
+          </a:xfrm>
+          <a:prstGeom prst="rect">
+            <a:avLst>
+              <a:gd name="adj" fmla="val 7692"/>
+            </a:avLst>
+          </a:prstGeom>
+          <a:solidFill>
             <a:srgbClr val="FFFFFF"/>
           </a:solidFill>
           <a:ln w="12700">
             <a:solidFill>
-              <a:srgbClr val="0D9488"/>
-            </a:solidFill>
-            <a:prstDash val="solid"/>
-          </a:ln>
-        </p:spPr>
-      </p:sp>
-      <p:sp>
-        <p:nvSpPr>
-          <p:cNvPr id="35" name="Text 33"/>
-          <p:cNvSpPr/>
-          <p:nvPr/>
-        </p:nvSpPr>
-        <p:spPr>
-          <a:xfrm>
-            <a:off x="6428232" y="3364992"/>
-            <a:ext cx="1645920" cy="475488"/>
+              <a:srgbClr val="DB2777"/>
+            </a:solidFill>
+            <a:prstDash val="solid"/>
+          </a:ln>
+        </p:spPr>
+      </p:sp>
+      <p:sp>
+        <p:nvSpPr>
+          <p:cNvPr id="37" name="Text 35"/>
+          <p:cNvSpPr/>
+          <p:nvPr/>
+        </p:nvSpPr>
+        <p:spPr>
+          <a:xfrm>
+            <a:off x="1951330" y="4169664"/>
+            <a:ext cx="676656" cy="475488"/>
           </a:xfrm>
           <a:prstGeom prst="rect">
             <a:avLst/>
@@ -27183,57 +27355,57 @@
               <a:buNone/>
             </a:pPr>
             <a:r>
-              <a:rPr lang="en-US" sz="1400" b="1" dirty="0">
-                <a:solidFill>
-                  <a:srgbClr val="0D9488"/>
+              <a:rPr lang="en-US" sz="900" b="1" dirty="0">
+                <a:solidFill>
+                  <a:srgbClr val="9D174D"/>
                 </a:solidFill>
                 <a:latin typeface="Trebuchet MS" pitchFamily="34" charset="0"/>
                 <a:ea typeface="Trebuchet MS" pitchFamily="34" charset="-122"/>
                 <a:cs typeface="Trebuchet MS" pitchFamily="34" charset="-120"/>
               </a:rPr>
-              <a:t>ment</a:t>
-            </a:r>
-            <a:endParaRPr lang="en-US" sz="1400" dirty="0"/>
-          </a:p>
-        </p:txBody>
-      </p:sp>
-      <p:sp>
-        <p:nvSpPr>
-          <p:cNvPr id="36" name="Shape 34"/>
-          <p:cNvSpPr/>
-          <p:nvPr/>
-        </p:nvSpPr>
-        <p:spPr>
-          <a:xfrm>
-            <a:off x="365760" y="4096512"/>
-            <a:ext cx="1371600" cy="804672"/>
+              <a:t>t</a:t>
+            </a:r>
+            <a:endParaRPr lang="en-US" sz="900" dirty="0"/>
+          </a:p>
+        </p:txBody>
+      </p:sp>
+      <p:sp>
+        <p:nvSpPr>
+          <p:cNvPr id="38" name="Shape 36"/>
+          <p:cNvSpPr/>
+          <p:nvPr/>
+        </p:nvSpPr>
+        <p:spPr>
+          <a:xfrm>
+            <a:off x="2677363" y="4169664"/>
+            <a:ext cx="676656" cy="475488"/>
           </a:xfrm>
           <a:prstGeom prst="rect">
             <a:avLst>
-              <a:gd name="adj" fmla="val 6818"/>
+              <a:gd name="adj" fmla="val 7692"/>
             </a:avLst>
           </a:prstGeom>
           <a:solidFill>
-            <a:srgbClr val="E2E8F0"/>
-          </a:solidFill>
-          <a:ln w="12700">
-            <a:solidFill>
-              <a:srgbClr val="E2E8F0"/>
-            </a:solidFill>
-            <a:prstDash val="solid"/>
-          </a:ln>
-        </p:spPr>
-      </p:sp>
-      <p:sp>
-        <p:nvSpPr>
-          <p:cNvPr id="37" name="Text 35"/>
-          <p:cNvSpPr/>
-          <p:nvPr/>
-        </p:nvSpPr>
-        <p:spPr>
-          <a:xfrm>
-            <a:off x="365760" y="4096512"/>
-            <a:ext cx="1371600" cy="804672"/>
+            <a:srgbClr val="FFFFFF"/>
+          </a:solidFill>
+          <a:ln w="12700">
+            <a:solidFill>
+              <a:srgbClr val="DB2777"/>
+            </a:solidFill>
+            <a:prstDash val="solid"/>
+          </a:ln>
+        </p:spPr>
+      </p:sp>
+      <p:sp>
+        <p:nvSpPr>
+          <p:cNvPr id="39" name="Text 37"/>
+          <p:cNvSpPr/>
+          <p:nvPr/>
+        </p:nvSpPr>
+        <p:spPr>
+          <a:xfrm>
+            <a:off x="2677363" y="4169664"/>
+            <a:ext cx="676656" cy="475488"/>
           </a:xfrm>
           <a:prstGeom prst="rect">
             <a:avLst/>
@@ -27249,57 +27421,30 @@
               <a:buNone/>
             </a:pPr>
             <a:r>
-              <a:rPr lang="en-US" sz="1100" b="1" dirty="0">
-                <a:solidFill>
-                  <a:srgbClr val="475569"/>
+              <a:rPr lang="en-US" sz="900" b="1" dirty="0">
+                <a:solidFill>
+                  <a:srgbClr val="9D174D"/>
                 </a:solidFill>
                 <a:latin typeface="Trebuchet MS" pitchFamily="34" charset="0"/>
                 <a:ea typeface="Trebuchet MS" pitchFamily="34" charset="-122"/>
                 <a:cs typeface="Trebuchet MS" pitchFamily="34" charset="-120"/>
               </a:rPr>
-              <a:t>Phonemes</a:t>
-            </a:r>
-            <a:endParaRPr lang="en-US" sz="1100" dirty="0"/>
-          </a:p>
-        </p:txBody>
-      </p:sp>
-      <p:sp>
-        <p:nvSpPr>
-          <p:cNvPr id="38" name="Shape 36"/>
-          <p:cNvSpPr/>
-          <p:nvPr/>
-        </p:nvSpPr>
-        <p:spPr>
-          <a:xfrm>
-            <a:off x="1874520" y="4096512"/>
-            <a:ext cx="6903720" cy="658368"/>
-          </a:xfrm>
-          <a:prstGeom prst="rect">
-            <a:avLst>
-              <a:gd name="adj" fmla="val 8333"/>
-            </a:avLst>
-          </a:prstGeom>
-          <a:solidFill>
-            <a:srgbClr val="FCE7F3"/>
-          </a:solidFill>
-          <a:ln w="12700">
-            <a:solidFill>
-              <a:srgbClr val="DB2777"/>
-            </a:solidFill>
-            <a:prstDash val="solid"/>
-          </a:ln>
-        </p:spPr>
-      </p:sp>
-      <p:sp>
-        <p:nvSpPr>
-          <p:cNvPr id="39" name="Shape 37"/>
-          <p:cNvSpPr/>
-          <p:nvPr/>
-        </p:nvSpPr>
-        <p:spPr>
-          <a:xfrm>
-            <a:off x="1952244" y="4169664"/>
-            <a:ext cx="543652" cy="475488"/>
+              <a:t>r</a:t>
+            </a:r>
+            <a:endParaRPr lang="en-US" sz="900" dirty="0"/>
+          </a:p>
+        </p:txBody>
+      </p:sp>
+      <p:sp>
+        <p:nvSpPr>
+          <p:cNvPr id="40" name="Shape 38"/>
+          <p:cNvSpPr/>
+          <p:nvPr/>
+        </p:nvSpPr>
+        <p:spPr>
+          <a:xfrm>
+            <a:off x="3403397" y="4169664"/>
+            <a:ext cx="676656" cy="475488"/>
           </a:xfrm>
           <a:prstGeom prst="rect">
             <a:avLst>
@@ -27319,14 +27464,14 @@
       </p:sp>
       <p:sp>
         <p:nvSpPr>
-          <p:cNvPr id="40" name="Text 38"/>
-          <p:cNvSpPr/>
-          <p:nvPr/>
-        </p:nvSpPr>
-        <p:spPr>
-          <a:xfrm>
-            <a:off x="1952244" y="4169664"/>
-            <a:ext cx="543652" cy="475488"/>
+          <p:cNvPr id="41" name="Text 39"/>
+          <p:cNvSpPr/>
+          <p:nvPr/>
+        </p:nvSpPr>
+        <p:spPr>
+          <a:xfrm>
+            <a:off x="3403397" y="4169664"/>
+            <a:ext cx="676656" cy="475488"/>
           </a:xfrm>
           <a:prstGeom prst="rect">
             <a:avLst/>
@@ -27350,7 +27495,7 @@
                 <a:ea typeface="Trebuchet MS" pitchFamily="34" charset="-122"/>
                 <a:cs typeface="Trebuchet MS" pitchFamily="34" charset="-120"/>
               </a:rPr>
-              <a:t>m</a:t>
+              <a:t>ea</a:t>
             </a:r>
             <a:endParaRPr lang="en-US" sz="900" dirty="0"/>
           </a:p>
@@ -27358,14 +27503,14 @@
       </p:sp>
       <p:sp>
         <p:nvSpPr>
-          <p:cNvPr id="41" name="Shape 39"/>
-          <p:cNvSpPr/>
-          <p:nvPr/>
-        </p:nvSpPr>
-        <p:spPr>
-          <a:xfrm>
-            <a:off x="2546188" y="4169664"/>
-            <a:ext cx="543652" cy="475488"/>
+          <p:cNvPr id="42" name="Shape 40"/>
+          <p:cNvSpPr/>
+          <p:nvPr/>
+        </p:nvSpPr>
+        <p:spPr>
+          <a:xfrm>
+            <a:off x="4129430" y="4169664"/>
+            <a:ext cx="676656" cy="475488"/>
           </a:xfrm>
           <a:prstGeom prst="rect">
             <a:avLst>
@@ -27385,14 +27530,14 @@
       </p:sp>
       <p:sp>
         <p:nvSpPr>
-          <p:cNvPr id="42" name="Text 40"/>
-          <p:cNvSpPr/>
-          <p:nvPr/>
-        </p:nvSpPr>
-        <p:spPr>
-          <a:xfrm>
-            <a:off x="2546188" y="4169664"/>
-            <a:ext cx="543652" cy="475488"/>
+          <p:cNvPr id="43" name="Text 41"/>
+          <p:cNvSpPr/>
+          <p:nvPr/>
+        </p:nvSpPr>
+        <p:spPr>
+          <a:xfrm>
+            <a:off x="4129430" y="4169664"/>
+            <a:ext cx="676656" cy="475488"/>
           </a:xfrm>
           <a:prstGeom prst="rect">
             <a:avLst/>
@@ -27416,7 +27561,7 @@
                 <a:ea typeface="Trebuchet MS" pitchFamily="34" charset="-122"/>
                 <a:cs typeface="Trebuchet MS" pitchFamily="34" charset="-120"/>
               </a:rPr>
-              <a:t>i</a:t>
+              <a:t>t</a:t>
             </a:r>
             <a:endParaRPr lang="en-US" sz="900" dirty="0"/>
           </a:p>
@@ -27424,14 +27569,14 @@
       </p:sp>
       <p:sp>
         <p:nvSpPr>
-          <p:cNvPr id="43" name="Shape 41"/>
-          <p:cNvSpPr/>
-          <p:nvPr/>
-        </p:nvSpPr>
-        <p:spPr>
-          <a:xfrm>
-            <a:off x="3140133" y="4169664"/>
-            <a:ext cx="543652" cy="475488"/>
+          <p:cNvPr id="44" name="Shape 42"/>
+          <p:cNvSpPr/>
+          <p:nvPr/>
+        </p:nvSpPr>
+        <p:spPr>
+          <a:xfrm>
+            <a:off x="4855464" y="4169664"/>
+            <a:ext cx="676656" cy="475488"/>
           </a:xfrm>
           <a:prstGeom prst="rect">
             <a:avLst>
@@ -27451,14 +27596,14 @@
       </p:sp>
       <p:sp>
         <p:nvSpPr>
-          <p:cNvPr id="44" name="Text 42"/>
-          <p:cNvSpPr/>
-          <p:nvPr/>
-        </p:nvSpPr>
-        <p:spPr>
-          <a:xfrm>
-            <a:off x="3140133" y="4169664"/>
-            <a:ext cx="543652" cy="475488"/>
+          <p:cNvPr id="45" name="Text 43"/>
+          <p:cNvSpPr/>
+          <p:nvPr/>
+        </p:nvSpPr>
+        <p:spPr>
+          <a:xfrm>
+            <a:off x="4855464" y="4169664"/>
+            <a:ext cx="676656" cy="475488"/>
           </a:xfrm>
           <a:prstGeom prst="rect">
             <a:avLst/>
@@ -27482,7 +27627,7 @@
                 <a:ea typeface="Trebuchet MS" pitchFamily="34" charset="-122"/>
                 <a:cs typeface="Trebuchet MS" pitchFamily="34" charset="-120"/>
               </a:rPr>
-              <a:t>s</a:t>
+              <a:t>m</a:t>
             </a:r>
             <a:endParaRPr lang="en-US" sz="900" dirty="0"/>
           </a:p>
@@ -27490,14 +27635,14 @@
       </p:sp>
       <p:sp>
         <p:nvSpPr>
-          <p:cNvPr id="45" name="Shape 43"/>
-          <p:cNvSpPr/>
-          <p:nvPr/>
-        </p:nvSpPr>
-        <p:spPr>
-          <a:xfrm>
-            <a:off x="3734077" y="4169664"/>
-            <a:ext cx="543652" cy="475488"/>
+          <p:cNvPr id="46" name="Shape 44"/>
+          <p:cNvSpPr/>
+          <p:nvPr/>
+        </p:nvSpPr>
+        <p:spPr>
+          <a:xfrm>
+            <a:off x="5581498" y="4169664"/>
+            <a:ext cx="676656" cy="475488"/>
           </a:xfrm>
           <a:prstGeom prst="rect">
             <a:avLst>
@@ -27517,14 +27662,14 @@
       </p:sp>
       <p:sp>
         <p:nvSpPr>
-          <p:cNvPr id="46" name="Text 44"/>
-          <p:cNvSpPr/>
-          <p:nvPr/>
-        </p:nvSpPr>
-        <p:spPr>
-          <a:xfrm>
-            <a:off x="3734077" y="4169664"/>
-            <a:ext cx="543652" cy="475488"/>
+          <p:cNvPr id="47" name="Text 45"/>
+          <p:cNvSpPr/>
+          <p:nvPr/>
+        </p:nvSpPr>
+        <p:spPr>
+          <a:xfrm>
+            <a:off x="5581498" y="4169664"/>
+            <a:ext cx="676656" cy="475488"/>
           </a:xfrm>
           <a:prstGeom prst="rect">
             <a:avLst/>
@@ -27548,7 +27693,7 @@
                 <a:ea typeface="Trebuchet MS" pitchFamily="34" charset="-122"/>
                 <a:cs typeface="Trebuchet MS" pitchFamily="34" charset="-120"/>
               </a:rPr>
-              <a:t>t</a:t>
+              <a:t>e</a:t>
             </a:r>
             <a:endParaRPr lang="en-US" sz="900" dirty="0"/>
           </a:p>
@@ -27556,14 +27701,14 @@
       </p:sp>
       <p:sp>
         <p:nvSpPr>
-          <p:cNvPr id="47" name="Shape 45"/>
-          <p:cNvSpPr/>
-          <p:nvPr/>
-        </p:nvSpPr>
-        <p:spPr>
-          <a:xfrm>
-            <a:off x="4328021" y="4169664"/>
-            <a:ext cx="543652" cy="475488"/>
+          <p:cNvPr id="48" name="Shape 46"/>
+          <p:cNvSpPr/>
+          <p:nvPr/>
+        </p:nvSpPr>
+        <p:spPr>
+          <a:xfrm>
+            <a:off x="6307531" y="4169664"/>
+            <a:ext cx="676656" cy="475488"/>
           </a:xfrm>
           <a:prstGeom prst="rect">
             <a:avLst>
@@ -27583,14 +27728,14 @@
       </p:sp>
       <p:sp>
         <p:nvSpPr>
-          <p:cNvPr id="48" name="Text 46"/>
-          <p:cNvSpPr/>
-          <p:nvPr/>
-        </p:nvSpPr>
-        <p:spPr>
-          <a:xfrm>
-            <a:off x="4328021" y="4169664"/>
-            <a:ext cx="543652" cy="475488"/>
+          <p:cNvPr id="49" name="Text 47"/>
+          <p:cNvSpPr/>
+          <p:nvPr/>
+        </p:nvSpPr>
+        <p:spPr>
+          <a:xfrm>
+            <a:off x="6307531" y="4169664"/>
+            <a:ext cx="676656" cy="475488"/>
           </a:xfrm>
           <a:prstGeom prst="rect">
             <a:avLst/>
@@ -27614,7 +27759,7 @@
                 <a:ea typeface="Trebuchet MS" pitchFamily="34" charset="-122"/>
                 <a:cs typeface="Trebuchet MS" pitchFamily="34" charset="-120"/>
               </a:rPr>
-              <a:t>r</a:t>
+              <a:t>n</a:t>
             </a:r>
             <a:endParaRPr lang="en-US" sz="900" dirty="0"/>
           </a:p>
@@ -27622,14 +27767,14 @@
       </p:sp>
       <p:sp>
         <p:nvSpPr>
-          <p:cNvPr id="49" name="Shape 47"/>
-          <p:cNvSpPr/>
-          <p:nvPr/>
-        </p:nvSpPr>
-        <p:spPr>
-          <a:xfrm>
-            <a:off x="4921966" y="4169664"/>
-            <a:ext cx="543652" cy="475488"/>
+          <p:cNvPr id="50" name="Shape 48"/>
+          <p:cNvSpPr/>
+          <p:nvPr/>
+        </p:nvSpPr>
+        <p:spPr>
+          <a:xfrm>
+            <a:off x="7033565" y="4169664"/>
+            <a:ext cx="676656" cy="475488"/>
           </a:xfrm>
           <a:prstGeom prst="rect">
             <a:avLst>
@@ -27649,14 +27794,14 @@
       </p:sp>
       <p:sp>
         <p:nvSpPr>
-          <p:cNvPr id="50" name="Text 48"/>
-          <p:cNvSpPr/>
-          <p:nvPr/>
-        </p:nvSpPr>
-        <p:spPr>
-          <a:xfrm>
-            <a:off x="4921966" y="4169664"/>
-            <a:ext cx="543652" cy="475488"/>
+          <p:cNvPr id="51" name="Text 49"/>
+          <p:cNvSpPr/>
+          <p:nvPr/>
+        </p:nvSpPr>
+        <p:spPr>
+          <a:xfrm>
+            <a:off x="7033565" y="4169664"/>
+            <a:ext cx="676656" cy="475488"/>
           </a:xfrm>
           <a:prstGeom prst="rect">
             <a:avLst/>
@@ -27680,7 +27825,7 @@
                 <a:ea typeface="Trebuchet MS" pitchFamily="34" charset="-122"/>
                 <a:cs typeface="Trebuchet MS" pitchFamily="34" charset="-120"/>
               </a:rPr>
-              <a:t>ea</a:t>
+              <a:t>t</a:t>
             </a:r>
             <a:endParaRPr lang="en-US" sz="900" dirty="0"/>
           </a:p>
@@ -27688,14 +27833,14 @@
       </p:sp>
       <p:sp>
         <p:nvSpPr>
-          <p:cNvPr id="51" name="Shape 49"/>
-          <p:cNvSpPr/>
-          <p:nvPr/>
-        </p:nvSpPr>
-        <p:spPr>
-          <a:xfrm>
-            <a:off x="5515910" y="4169664"/>
-            <a:ext cx="543652" cy="475488"/>
+          <p:cNvPr id="52" name="Shape 50"/>
+          <p:cNvSpPr/>
+          <p:nvPr/>
+        </p:nvSpPr>
+        <p:spPr>
+          <a:xfrm>
+            <a:off x="7759598" y="4169664"/>
+            <a:ext cx="676656" cy="475488"/>
           </a:xfrm>
           <a:prstGeom prst="rect">
             <a:avLst>
@@ -27715,14 +27860,14 @@
       </p:sp>
       <p:sp>
         <p:nvSpPr>
-          <p:cNvPr id="52" name="Text 50"/>
-          <p:cNvSpPr/>
-          <p:nvPr/>
-        </p:nvSpPr>
-        <p:spPr>
-          <a:xfrm>
-            <a:off x="5515910" y="4169664"/>
-            <a:ext cx="543652" cy="475488"/>
+          <p:cNvPr id="53" name="Text 51"/>
+          <p:cNvSpPr/>
+          <p:nvPr/>
+        </p:nvSpPr>
+        <p:spPr>
+          <a:xfrm>
+            <a:off x="7759598" y="4169664"/>
+            <a:ext cx="676656" cy="475488"/>
           </a:xfrm>
           <a:prstGeom prst="rect">
             <a:avLst/>
@@ -27746,271 +27891,7 @@
                 <a:ea typeface="Trebuchet MS" pitchFamily="34" charset="-122"/>
                 <a:cs typeface="Trebuchet MS" pitchFamily="34" charset="-120"/>
               </a:rPr>
-              <a:t>t</a:t>
-            </a:r>
-            <a:endParaRPr lang="en-US" sz="900" dirty="0"/>
-          </a:p>
-        </p:txBody>
-      </p:sp>
-      <p:sp>
-        <p:nvSpPr>
-          <p:cNvPr id="53" name="Shape 51"/>
-          <p:cNvSpPr/>
-          <p:nvPr/>
-        </p:nvSpPr>
-        <p:spPr>
-          <a:xfrm>
-            <a:off x="6109855" y="4169664"/>
-            <a:ext cx="543652" cy="475488"/>
-          </a:xfrm>
-          <a:prstGeom prst="rect">
-            <a:avLst>
-              <a:gd name="adj" fmla="val 7692"/>
-            </a:avLst>
-          </a:prstGeom>
-          <a:solidFill>
-            <a:srgbClr val="FFFFFF"/>
-          </a:solidFill>
-          <a:ln w="12700">
-            <a:solidFill>
-              <a:srgbClr val="DB2777"/>
-            </a:solidFill>
-            <a:prstDash val="solid"/>
-          </a:ln>
-        </p:spPr>
-      </p:sp>
-      <p:sp>
-        <p:nvSpPr>
-          <p:cNvPr id="54" name="Text 52"/>
-          <p:cNvSpPr/>
-          <p:nvPr/>
-        </p:nvSpPr>
-        <p:spPr>
-          <a:xfrm>
-            <a:off x="6109855" y="4169664"/>
-            <a:ext cx="543652" cy="475488"/>
-          </a:xfrm>
-          <a:prstGeom prst="rect">
-            <a:avLst/>
-          </a:prstGeom>
-          <a:noFill/>
-          <a:ln/>
-        </p:spPr>
-        <p:txBody>
-          <a:bodyPr wrap="square" lIns="0" tIns="0" rIns="0" bIns="0" rtlCol="0" anchor="ctr"/>
-          <a:lstStyle/>
-          <a:p>
-            <a:pPr algn="ctr" indent="0" marL="0">
-              <a:buNone/>
-            </a:pPr>
-            <a:r>
-              <a:rPr lang="en-US" sz="900" b="1" dirty="0">
-                <a:solidFill>
-                  <a:srgbClr val="9D174D"/>
-                </a:solidFill>
-                <a:latin typeface="Trebuchet MS" pitchFamily="34" charset="0"/>
-                <a:ea typeface="Trebuchet MS" pitchFamily="34" charset="-122"/>
-                <a:cs typeface="Trebuchet MS" pitchFamily="34" charset="-120"/>
-              </a:rPr>
-              <a:t>m</a:t>
-            </a:r>
-            <a:endParaRPr lang="en-US" sz="900" dirty="0"/>
-          </a:p>
-        </p:txBody>
-      </p:sp>
-      <p:sp>
-        <p:nvSpPr>
-          <p:cNvPr id="55" name="Shape 53"/>
-          <p:cNvSpPr/>
-          <p:nvPr/>
-        </p:nvSpPr>
-        <p:spPr>
-          <a:xfrm>
-            <a:off x="6703799" y="4169664"/>
-            <a:ext cx="543652" cy="475488"/>
-          </a:xfrm>
-          <a:prstGeom prst="rect">
-            <a:avLst>
-              <a:gd name="adj" fmla="val 7692"/>
-            </a:avLst>
-          </a:prstGeom>
-          <a:solidFill>
-            <a:srgbClr val="FFFFFF"/>
-          </a:solidFill>
-          <a:ln w="12700">
-            <a:solidFill>
-              <a:srgbClr val="DB2777"/>
-            </a:solidFill>
-            <a:prstDash val="solid"/>
-          </a:ln>
-        </p:spPr>
-      </p:sp>
-      <p:sp>
-        <p:nvSpPr>
-          <p:cNvPr id="56" name="Text 54"/>
-          <p:cNvSpPr/>
-          <p:nvPr/>
-        </p:nvSpPr>
-        <p:spPr>
-          <a:xfrm>
-            <a:off x="6703799" y="4169664"/>
-            <a:ext cx="543652" cy="475488"/>
-          </a:xfrm>
-          <a:prstGeom prst="rect">
-            <a:avLst/>
-          </a:prstGeom>
-          <a:noFill/>
-          <a:ln/>
-        </p:spPr>
-        <p:txBody>
-          <a:bodyPr wrap="square" lIns="0" tIns="0" rIns="0" bIns="0" rtlCol="0" anchor="ctr"/>
-          <a:lstStyle/>
-          <a:p>
-            <a:pPr algn="ctr" indent="0" marL="0">
-              <a:buNone/>
-            </a:pPr>
-            <a:r>
-              <a:rPr lang="en-US" sz="900" b="1" dirty="0">
-                <a:solidFill>
-                  <a:srgbClr val="9D174D"/>
-                </a:solidFill>
-                <a:latin typeface="Trebuchet MS" pitchFamily="34" charset="0"/>
-                <a:ea typeface="Trebuchet MS" pitchFamily="34" charset="-122"/>
-                <a:cs typeface="Trebuchet MS" pitchFamily="34" charset="-120"/>
-              </a:rPr>
-              <a:t>e</a:t>
-            </a:r>
-            <a:endParaRPr lang="en-US" sz="900" dirty="0"/>
-          </a:p>
-        </p:txBody>
-      </p:sp>
-      <p:sp>
-        <p:nvSpPr>
-          <p:cNvPr id="57" name="Shape 55"/>
-          <p:cNvSpPr/>
-          <p:nvPr/>
-        </p:nvSpPr>
-        <p:spPr>
-          <a:xfrm>
-            <a:off x="7297743" y="4169664"/>
-            <a:ext cx="543652" cy="475488"/>
-          </a:xfrm>
-          <a:prstGeom prst="rect">
-            <a:avLst>
-              <a:gd name="adj" fmla="val 7692"/>
-            </a:avLst>
-          </a:prstGeom>
-          <a:solidFill>
-            <a:srgbClr val="FFFFFF"/>
-          </a:solidFill>
-          <a:ln w="12700">
-            <a:solidFill>
-              <a:srgbClr val="DB2777"/>
-            </a:solidFill>
-            <a:prstDash val="solid"/>
-          </a:ln>
-        </p:spPr>
-      </p:sp>
-      <p:sp>
-        <p:nvSpPr>
-          <p:cNvPr id="58" name="Text 56"/>
-          <p:cNvSpPr/>
-          <p:nvPr/>
-        </p:nvSpPr>
-        <p:spPr>
-          <a:xfrm>
-            <a:off x="7297743" y="4169664"/>
-            <a:ext cx="543652" cy="475488"/>
-          </a:xfrm>
-          <a:prstGeom prst="rect">
-            <a:avLst/>
-          </a:prstGeom>
-          <a:noFill/>
-          <a:ln/>
-        </p:spPr>
-        <p:txBody>
-          <a:bodyPr wrap="square" lIns="0" tIns="0" rIns="0" bIns="0" rtlCol="0" anchor="ctr"/>
-          <a:lstStyle/>
-          <a:p>
-            <a:pPr algn="ctr" indent="0" marL="0">
-              <a:buNone/>
-            </a:pPr>
-            <a:r>
-              <a:rPr lang="en-US" sz="900" b="1" dirty="0">
-                <a:solidFill>
-                  <a:srgbClr val="9D174D"/>
-                </a:solidFill>
-                <a:latin typeface="Trebuchet MS" pitchFamily="34" charset="0"/>
-                <a:ea typeface="Trebuchet MS" pitchFamily="34" charset="-122"/>
-                <a:cs typeface="Trebuchet MS" pitchFamily="34" charset="-120"/>
-              </a:rPr>
-              <a:t>n</a:t>
-            </a:r>
-            <a:endParaRPr lang="en-US" sz="900" dirty="0"/>
-          </a:p>
-        </p:txBody>
-      </p:sp>
-      <p:sp>
-        <p:nvSpPr>
-          <p:cNvPr id="59" name="Shape 57"/>
-          <p:cNvSpPr/>
-          <p:nvPr/>
-        </p:nvSpPr>
-        <p:spPr>
-          <a:xfrm>
-            <a:off x="7891688" y="4169664"/>
-            <a:ext cx="543652" cy="475488"/>
-          </a:xfrm>
-          <a:prstGeom prst="rect">
-            <a:avLst>
-              <a:gd name="adj" fmla="val 7692"/>
-            </a:avLst>
-          </a:prstGeom>
-          <a:solidFill>
-            <a:srgbClr val="FFFFFF"/>
-          </a:solidFill>
-          <a:ln w="12700">
-            <a:solidFill>
-              <a:srgbClr val="DB2777"/>
-            </a:solidFill>
-            <a:prstDash val="solid"/>
-          </a:ln>
-        </p:spPr>
-      </p:sp>
-      <p:sp>
-        <p:nvSpPr>
-          <p:cNvPr id="60" name="Text 58"/>
-          <p:cNvSpPr/>
-          <p:nvPr/>
-        </p:nvSpPr>
-        <p:spPr>
-          <a:xfrm>
-            <a:off x="7891688" y="4169664"/>
-            <a:ext cx="543652" cy="475488"/>
-          </a:xfrm>
-          <a:prstGeom prst="rect">
-            <a:avLst/>
-          </a:prstGeom>
-          <a:noFill/>
-          <a:ln/>
-        </p:spPr>
-        <p:txBody>
-          <a:bodyPr wrap="square" lIns="0" tIns="0" rIns="0" bIns="0" rtlCol="0" anchor="ctr"/>
-          <a:lstStyle/>
-          <a:p>
-            <a:pPr algn="ctr" indent="0" marL="0">
-              <a:buNone/>
-            </a:pPr>
-            <a:r>
-              <a:rPr lang="en-US" sz="900" b="1" dirty="0">
-                <a:solidFill>
-                  <a:srgbClr val="9D174D"/>
-                </a:solidFill>
-                <a:latin typeface="Trebuchet MS" pitchFamily="34" charset="0"/>
-                <a:ea typeface="Trebuchet MS" pitchFamily="34" charset="-122"/>
-                <a:cs typeface="Trebuchet MS" pitchFamily="34" charset="-120"/>
-              </a:rPr>
-              <a:t>t</a:t>
+              <a:t>s</a:t>
             </a:r>
             <a:endParaRPr lang="en-US" sz="900" dirty="0"/>
           </a:p>
@@ -28302,7 +28183,7 @@
                 <a:ea typeface="Calibri" pitchFamily="34" charset="-122"/>
                 <a:cs typeface="Calibri" pitchFamily="34" charset="-120"/>
               </a:rPr>
-              <a:t>Word Labs  •  wordlabs.app  •  Root: 'treat' = handle, deal with, negotiate</a:t>
+              <a:t>Word Labs  •  wordlabs.app  •  Root: 'treat' = to deal with; a special thing</a:t>
             </a:r>
             <a:endParaRPr lang="en-US" sz="800" dirty="0"/>
           </a:p>
@@ -28441,7 +28322,7 @@
                 <a:ea typeface="Trebuchet MS" pitchFamily="34" charset="-122"/>
                 <a:cs typeface="Trebuchet MS" pitchFamily="34" charset="-120"/>
               </a:rPr>
-              <a:t>mistreat</a:t>
+              <a:t>maltreat</a:t>
             </a:r>
             <a:endParaRPr lang="en-US" sz="2800" dirty="0"/>
           </a:p>
@@ -29129,7 +29010,7 @@
                 <a:ea typeface="Calibri" pitchFamily="34" charset="-122"/>
                 <a:cs typeface="Calibri" pitchFamily="34" charset="-120"/>
               </a:rPr>
-              <a:t>Word Labs  •  wordlabs.app  •  Root: 'treat' = handle, deal with, negotiate</a:t>
+              <a:t>Word Labs  •  wordlabs.app  •  Root: 'treat' = to deal with; a special thing</a:t>
             </a:r>
             <a:endParaRPr lang="en-US" sz="800" dirty="0"/>
           </a:p>
@@ -29268,7 +29149,7 @@
                 <a:ea typeface="Trebuchet MS" pitchFamily="34" charset="-122"/>
                 <a:cs typeface="Trebuchet MS" pitchFamily="34" charset="-120"/>
               </a:rPr>
-              <a:t>mistreat</a:t>
+              <a:t>maltreat</a:t>
             </a:r>
             <a:endParaRPr lang="en-US" sz="2800" dirty="0"/>
           </a:p>
@@ -29407,7 +29288,7 @@
                 <a:ea typeface="Trebuchet MS" pitchFamily="34" charset="-122"/>
                 <a:cs typeface="Trebuchet MS" pitchFamily="34" charset="-120"/>
               </a:rPr>
-              <a:t>mis</a:t>
+              <a:t>mal</a:t>
             </a:r>
             <a:endParaRPr lang="en-US" sz="1300" dirty="0"/>
           </a:p>
@@ -29446,7 +29327,7 @@
                 <a:ea typeface="Calibri" pitchFamily="34" charset="-122"/>
                 <a:cs typeface="Calibri" pitchFamily="34" charset="-120"/>
               </a:rPr>
-              <a:t>wrongly or badly</a:t>
+              <a:t>bad</a:t>
             </a:r>
             <a:endParaRPr lang="en-US" sz="850" dirty="0"/>
           </a:p>
@@ -29558,7 +29439,7 @@
                 <a:ea typeface="Calibri" pitchFamily="34" charset="-122"/>
                 <a:cs typeface="Calibri" pitchFamily="34" charset="-120"/>
               </a:rPr>
-              <a:t>handle or deal with</a:t>
+              <a:t>to deal with; a special thing</a:t>
             </a:r>
             <a:endParaRPr lang="en-US" sz="850" dirty="0"/>
           </a:p>
@@ -30114,7 +29995,7 @@
                 <a:ea typeface="Calibri" pitchFamily="34" charset="-122"/>
                 <a:cs typeface="Calibri" pitchFamily="34" charset="-120"/>
               </a:rPr>
-              <a:t>Word Labs  •  wordlabs.app  •  Root: 'treat' = handle, deal with, negotiate</a:t>
+              <a:t>Word Labs  •  wordlabs.app  •  Root: 'treat' = to deal with; a special thing</a:t>
             </a:r>
             <a:endParaRPr lang="en-US" sz="800" dirty="0"/>
           </a:p>
@@ -30253,7 +30134,7 @@
                 <a:ea typeface="Trebuchet MS" pitchFamily="34" charset="-122"/>
                 <a:cs typeface="Trebuchet MS" pitchFamily="34" charset="-120"/>
               </a:rPr>
-              <a:t>mistreat</a:t>
+              <a:t>maltreat</a:t>
             </a:r>
             <a:endParaRPr lang="en-US" sz="2800" dirty="0"/>
           </a:p>
@@ -30392,7 +30273,7 @@
                 <a:ea typeface="Trebuchet MS" pitchFamily="34" charset="-122"/>
                 <a:cs typeface="Trebuchet MS" pitchFamily="34" charset="-120"/>
               </a:rPr>
-              <a:t>mis</a:t>
+              <a:t>mal</a:t>
             </a:r>
             <a:endParaRPr lang="en-US" sz="1300" dirty="0"/>
           </a:p>
@@ -30431,7 +30312,7 @@
                 <a:ea typeface="Calibri" pitchFamily="34" charset="-122"/>
                 <a:cs typeface="Calibri" pitchFamily="34" charset="-120"/>
               </a:rPr>
-              <a:t>wrongly or badly</a:t>
+              <a:t>bad</a:t>
             </a:r>
             <a:endParaRPr lang="en-US" sz="850" dirty="0"/>
           </a:p>
@@ -30543,7 +30424,7 @@
                 <a:ea typeface="Calibri" pitchFamily="34" charset="-122"/>
                 <a:cs typeface="Calibri" pitchFamily="34" charset="-120"/>
               </a:rPr>
-              <a:t>handle or deal with</a:t>
+              <a:t>to deal with; a special thing</a:t>
             </a:r>
             <a:endParaRPr lang="en-US" sz="850" dirty="0"/>
           </a:p>
@@ -30702,7 +30583,7 @@
                 <a:ea typeface="Trebuchet MS" pitchFamily="34" charset="-122"/>
                 <a:cs typeface="Trebuchet MS" pitchFamily="34" charset="-120"/>
               </a:rPr>
-              <a:t>mis</a:t>
+              <a:t>mal</a:t>
             </a:r>
             <a:endParaRPr lang="en-US" sz="1400" dirty="0"/>
           </a:p>
@@ -31231,7 +31112,7 @@
                 <a:ea typeface="Calibri" pitchFamily="34" charset="-122"/>
                 <a:cs typeface="Calibri" pitchFamily="34" charset="-120"/>
               </a:rPr>
-              <a:t>Word Labs  •  wordlabs.app  •  Root: 'treat' = handle, deal with, negotiate</a:t>
+              <a:t>Word Labs  •  wordlabs.app  •  Root: 'treat' = to deal with; a special thing</a:t>
             </a:r>
             <a:endParaRPr lang="en-US" sz="800" dirty="0"/>
           </a:p>
@@ -31370,7 +31251,7 @@
                 <a:ea typeface="Trebuchet MS" pitchFamily="34" charset="-122"/>
                 <a:cs typeface="Trebuchet MS" pitchFamily="34" charset="-120"/>
               </a:rPr>
-              <a:t>mistreat</a:t>
+              <a:t>maltreat</a:t>
             </a:r>
             <a:endParaRPr lang="en-US" sz="2800" dirty="0"/>
           </a:p>
@@ -31509,7 +31390,7 @@
                 <a:ea typeface="Trebuchet MS" pitchFamily="34" charset="-122"/>
                 <a:cs typeface="Trebuchet MS" pitchFamily="34" charset="-120"/>
               </a:rPr>
-              <a:t>mis</a:t>
+              <a:t>mal</a:t>
             </a:r>
             <a:endParaRPr lang="en-US" sz="1300" dirty="0"/>
           </a:p>
@@ -31548,7 +31429,7 @@
                 <a:ea typeface="Calibri" pitchFamily="34" charset="-122"/>
                 <a:cs typeface="Calibri" pitchFamily="34" charset="-120"/>
               </a:rPr>
-              <a:t>wrongly or badly</a:t>
+              <a:t>bad</a:t>
             </a:r>
             <a:endParaRPr lang="en-US" sz="850" dirty="0"/>
           </a:p>
@@ -31660,7 +31541,7 @@
                 <a:ea typeface="Calibri" pitchFamily="34" charset="-122"/>
                 <a:cs typeface="Calibri" pitchFamily="34" charset="-120"/>
               </a:rPr>
-              <a:t>handle or deal with</a:t>
+              <a:t>to deal with; a special thing</a:t>
             </a:r>
             <a:endParaRPr lang="en-US" sz="850" dirty="0"/>
           </a:p>
@@ -31819,7 +31700,7 @@
                 <a:ea typeface="Trebuchet MS" pitchFamily="34" charset="-122"/>
                 <a:cs typeface="Trebuchet MS" pitchFamily="34" charset="-120"/>
               </a:rPr>
-              <a:t>mis</a:t>
+              <a:t>mal</a:t>
             </a:r>
             <a:endParaRPr lang="en-US" sz="1400" dirty="0"/>
           </a:p>
@@ -32149,7 +32030,7 @@
                 <a:ea typeface="Trebuchet MS" pitchFamily="34" charset="-122"/>
                 <a:cs typeface="Trebuchet MS" pitchFamily="34" charset="-120"/>
               </a:rPr>
-              <a:t>i</a:t>
+              <a:t>a</a:t>
             </a:r>
             <a:endParaRPr lang="en-US" sz="900" dirty="0"/>
           </a:p>
@@ -32215,7 +32096,7 @@
                 <a:ea typeface="Trebuchet MS" pitchFamily="34" charset="-122"/>
                 <a:cs typeface="Trebuchet MS" pitchFamily="34" charset="-120"/>
               </a:rPr>
-              <a:t>s</a:t>
+              <a:t>l</a:t>
             </a:r>
             <a:endParaRPr lang="en-US" sz="900" dirty="0"/>
           </a:p>
@@ -32771,7 +32652,7 @@
                 <a:ea typeface="Calibri" pitchFamily="34" charset="-122"/>
                 <a:cs typeface="Calibri" pitchFamily="34" charset="-120"/>
               </a:rPr>
-              <a:t>Word Labs  •  wordlabs.app  •  Root: 'treat' = handle, deal with, negotiate</a:t>
+              <a:t>Word Labs  •  wordlabs.app  •  Root: 'treat' = to deal with; a special thing</a:t>
             </a:r>
             <a:endParaRPr lang="en-US" sz="800" dirty="0"/>
           </a:p>
@@ -33940,7 +33821,7 @@
                 <a:ea typeface="Calibri" pitchFamily="34" charset="-122"/>
                 <a:cs typeface="Calibri" pitchFamily="34" charset="-120"/>
               </a:rPr>
-              <a:t>Word Labs  •  wordlabs.app  •  Root: 'treat' = handle, deal with, negotiate</a:t>
+              <a:t>Word Labs  •  wordlabs.app  •  Root: 'treat' = to deal with; a special thing</a:t>
             </a:r>
             <a:endParaRPr lang="en-US" sz="800" dirty="0"/>
           </a:p>
@@ -34241,7 +34122,7 @@
                 <a:ea typeface="Trebuchet MS" pitchFamily="34" charset="-122"/>
                 <a:cs typeface="Trebuchet MS" pitchFamily="34" charset="-120"/>
               </a:rPr>
-              <a:t>re-</a:t>
+              <a:t>mal-</a:t>
             </a:r>
             <a:endParaRPr lang="en-US" sz="1300" dirty="0"/>
           </a:p>
@@ -34369,7 +34250,7 @@
                 <a:ea typeface="Trebuchet MS" pitchFamily="34" charset="-122"/>
                 <a:cs typeface="Trebuchet MS" pitchFamily="34" charset="-120"/>
               </a:rPr>
-              <a:t>-ment</a:t>
+              <a:t>-s</a:t>
             </a:r>
             <a:endParaRPr lang="en-US" sz="1300" dirty="0"/>
           </a:p>
@@ -34433,7 +34314,7 @@
                 <a:ea typeface="Trebuchet MS" pitchFamily="34" charset="-122"/>
                 <a:cs typeface="Trebuchet MS" pitchFamily="34" charset="-120"/>
               </a:rPr>
-              <a:t>mis-</a:t>
+              <a:t>re-</a:t>
             </a:r>
             <a:endParaRPr lang="en-US" sz="1300" dirty="0"/>
           </a:p>
@@ -34543,7 +34424,7 @@
             <a:avLst/>
           </a:prstGeom>
           <a:solidFill>
-            <a:srgbClr val="DDD6FE"/>
+            <a:srgbClr val="F8FAFC"/>
           </a:solidFill>
           <a:ln w="12700">
             <a:solidFill>
@@ -34555,14 +34436,64 @@
       </p:sp>
       <p:sp>
         <p:nvSpPr>
-          <p:cNvPr id="29" name="Text 27"/>
-          <p:cNvSpPr/>
-          <p:nvPr/>
-        </p:nvSpPr>
-        <p:spPr>
-          <a:xfrm>
-            <a:off x="365760" y="2404872"/>
-            <a:ext cx="2468880" cy="402336"/>
+          <p:cNvPr id="29" name="Shape 27"/>
+          <p:cNvSpPr/>
+          <p:nvPr/>
+        </p:nvSpPr>
+        <p:spPr>
+          <a:xfrm>
+            <a:off x="2971800" y="2404872"/>
+            <a:ext cx="2834640" cy="402336"/>
+          </a:xfrm>
+          <a:prstGeom prst="rect">
+            <a:avLst/>
+          </a:prstGeom>
+          <a:solidFill>
+            <a:srgbClr val="F8FAFC"/>
+          </a:solidFill>
+          <a:ln w="12700">
+            <a:solidFill>
+              <a:srgbClr val="E2E8F0"/>
+            </a:solidFill>
+            <a:prstDash val="solid"/>
+          </a:ln>
+        </p:spPr>
+      </p:sp>
+      <p:sp>
+        <p:nvSpPr>
+          <p:cNvPr id="30" name="Shape 28"/>
+          <p:cNvSpPr/>
+          <p:nvPr/>
+        </p:nvSpPr>
+        <p:spPr>
+          <a:xfrm>
+            <a:off x="5943600" y="2404872"/>
+            <a:ext cx="2834640" cy="402336"/>
+          </a:xfrm>
+          <a:prstGeom prst="rect">
+            <a:avLst/>
+          </a:prstGeom>
+          <a:solidFill>
+            <a:srgbClr val="FCE7F3"/>
+          </a:solidFill>
+          <a:ln w="12700">
+            <a:solidFill>
+              <a:srgbClr val="E2E8F0"/>
+            </a:solidFill>
+            <a:prstDash val="solid"/>
+          </a:ln>
+        </p:spPr>
+      </p:sp>
+      <p:sp>
+        <p:nvSpPr>
+          <p:cNvPr id="31" name="Text 29"/>
+          <p:cNvSpPr/>
+          <p:nvPr/>
+        </p:nvSpPr>
+        <p:spPr>
+          <a:xfrm>
+            <a:off x="5943600" y="2404872"/>
+            <a:ext cx="2834640" cy="402336"/>
           </a:xfrm>
           <a:prstGeom prst="rect">
             <a:avLst/>
@@ -34580,13 +34511,13 @@
             <a:r>
               <a:rPr lang="en-US" sz="1300" b="1" dirty="0">
                 <a:solidFill>
-                  <a:srgbClr val="4C1D95"/>
+                  <a:srgbClr val="9D174D"/>
                 </a:solidFill>
                 <a:latin typeface="Trebuchet MS" pitchFamily="34" charset="0"/>
                 <a:ea typeface="Trebuchet MS" pitchFamily="34" charset="-122"/>
                 <a:cs typeface="Trebuchet MS" pitchFamily="34" charset="-120"/>
               </a:rPr>
-              <a:t>mal-</a:t>
+              <a:t>-y</a:t>
             </a:r>
             <a:endParaRPr lang="en-US" sz="1300" dirty="0"/>
           </a:p>
@@ -34594,20 +34525,45 @@
       </p:sp>
       <p:sp>
         <p:nvSpPr>
-          <p:cNvPr id="30" name="Shape 28"/>
-          <p:cNvSpPr/>
-          <p:nvPr/>
-        </p:nvSpPr>
-        <p:spPr>
-          <a:xfrm>
-            <a:off x="2971800" y="2404872"/>
+          <p:cNvPr id="32" name="Shape 30"/>
+          <p:cNvSpPr/>
+          <p:nvPr/>
+        </p:nvSpPr>
+        <p:spPr>
+          <a:xfrm>
+            <a:off x="365760" y="2825496"/>
+            <a:ext cx="2468880" cy="402336"/>
+          </a:xfrm>
+          <a:prstGeom prst="rect">
+            <a:avLst/>
+          </a:prstGeom>
+          <a:solidFill>
+            <a:srgbClr val="F1F5F9"/>
+          </a:solidFill>
+          <a:ln w="12700">
+            <a:solidFill>
+              <a:srgbClr val="E2E8F0"/>
+            </a:solidFill>
+            <a:prstDash val="solid"/>
+          </a:ln>
+        </p:spPr>
+      </p:sp>
+      <p:sp>
+        <p:nvSpPr>
+          <p:cNvPr id="33" name="Shape 31"/>
+          <p:cNvSpPr/>
+          <p:nvPr/>
+        </p:nvSpPr>
+        <p:spPr>
+          <a:xfrm>
+            <a:off x="2971800" y="2825496"/>
             <a:ext cx="2834640" cy="402336"/>
           </a:xfrm>
           <a:prstGeom prst="rect">
             <a:avLst/>
           </a:prstGeom>
           <a:solidFill>
-            <a:srgbClr val="F8FAFC"/>
+            <a:srgbClr val="F1F5F9"/>
           </a:solidFill>
           <a:ln w="12700">
             <a:solidFill>
@@ -34619,13 +34575,13 @@
       </p:sp>
       <p:sp>
         <p:nvSpPr>
-          <p:cNvPr id="31" name="Shape 29"/>
-          <p:cNvSpPr/>
-          <p:nvPr/>
-        </p:nvSpPr>
-        <p:spPr>
-          <a:xfrm>
-            <a:off x="5943600" y="2404872"/>
+          <p:cNvPr id="34" name="Shape 32"/>
+          <p:cNvSpPr/>
+          <p:nvPr/>
+        </p:nvSpPr>
+        <p:spPr>
+          <a:xfrm>
+            <a:off x="5943600" y="2825496"/>
             <a:ext cx="2834640" cy="402336"/>
           </a:xfrm>
           <a:prstGeom prst="rect">
@@ -34644,13 +34600,13 @@
       </p:sp>
       <p:sp>
         <p:nvSpPr>
-          <p:cNvPr id="32" name="Text 30"/>
-          <p:cNvSpPr/>
-          <p:nvPr/>
-        </p:nvSpPr>
-        <p:spPr>
-          <a:xfrm>
-            <a:off x="5943600" y="2404872"/>
+          <p:cNvPr id="35" name="Text 33"/>
+          <p:cNvSpPr/>
+          <p:nvPr/>
+        </p:nvSpPr>
+        <p:spPr>
+          <a:xfrm>
+            <a:off x="5943600" y="2825496"/>
             <a:ext cx="2834640" cy="402336"/>
           </a:xfrm>
           <a:prstGeom prst="rect">
@@ -34683,20 +34639,20 @@
       </p:sp>
       <p:sp>
         <p:nvSpPr>
-          <p:cNvPr id="33" name="Shape 31"/>
-          <p:cNvSpPr/>
-          <p:nvPr/>
-        </p:nvSpPr>
-        <p:spPr>
-          <a:xfrm>
-            <a:off x="365760" y="2825496"/>
+          <p:cNvPr id="36" name="Shape 34"/>
+          <p:cNvSpPr/>
+          <p:nvPr/>
+        </p:nvSpPr>
+        <p:spPr>
+          <a:xfrm>
+            <a:off x="365760" y="3246120"/>
             <a:ext cx="2468880" cy="402336"/>
           </a:xfrm>
           <a:prstGeom prst="rect">
             <a:avLst/>
           </a:prstGeom>
           <a:solidFill>
-            <a:srgbClr val="DDD6FE"/>
+            <a:srgbClr val="F8FAFC"/>
           </a:solidFill>
           <a:ln w="12700">
             <a:solidFill>
@@ -34708,14 +34664,64 @@
       </p:sp>
       <p:sp>
         <p:nvSpPr>
-          <p:cNvPr id="34" name="Text 32"/>
-          <p:cNvSpPr/>
-          <p:nvPr/>
-        </p:nvSpPr>
-        <p:spPr>
-          <a:xfrm>
-            <a:off x="365760" y="2825496"/>
-            <a:ext cx="2468880" cy="402336"/>
+          <p:cNvPr id="37" name="Shape 35"/>
+          <p:cNvSpPr/>
+          <p:nvPr/>
+        </p:nvSpPr>
+        <p:spPr>
+          <a:xfrm>
+            <a:off x="2971800" y="3246120"/>
+            <a:ext cx="2834640" cy="402336"/>
+          </a:xfrm>
+          <a:prstGeom prst="rect">
+            <a:avLst/>
+          </a:prstGeom>
+          <a:solidFill>
+            <a:srgbClr val="F8FAFC"/>
+          </a:solidFill>
+          <a:ln w="12700">
+            <a:solidFill>
+              <a:srgbClr val="E2E8F0"/>
+            </a:solidFill>
+            <a:prstDash val="solid"/>
+          </a:ln>
+        </p:spPr>
+      </p:sp>
+      <p:sp>
+        <p:nvSpPr>
+          <p:cNvPr id="38" name="Shape 36"/>
+          <p:cNvSpPr/>
+          <p:nvPr/>
+        </p:nvSpPr>
+        <p:spPr>
+          <a:xfrm>
+            <a:off x="5943600" y="3246120"/>
+            <a:ext cx="2834640" cy="402336"/>
+          </a:xfrm>
+          <a:prstGeom prst="rect">
+            <a:avLst/>
+          </a:prstGeom>
+          <a:solidFill>
+            <a:srgbClr val="FCE7F3"/>
+          </a:solidFill>
+          <a:ln w="12700">
+            <a:solidFill>
+              <a:srgbClr val="E2E8F0"/>
+            </a:solidFill>
+            <a:prstDash val="solid"/>
+          </a:ln>
+        </p:spPr>
+      </p:sp>
+      <p:sp>
+        <p:nvSpPr>
+          <p:cNvPr id="39" name="Text 37"/>
+          <p:cNvSpPr/>
+          <p:nvPr/>
+        </p:nvSpPr>
+        <p:spPr>
+          <a:xfrm>
+            <a:off x="5943600" y="3246120"/>
+            <a:ext cx="2834640" cy="402336"/>
           </a:xfrm>
           <a:prstGeom prst="rect">
             <a:avLst/>
@@ -34733,13 +34739,13 @@
             <a:r>
               <a:rPr lang="en-US" sz="1300" b="1" dirty="0">
                 <a:solidFill>
-                  <a:srgbClr val="4C1D95"/>
+                  <a:srgbClr val="9D174D"/>
                 </a:solidFill>
                 <a:latin typeface="Trebuchet MS" pitchFamily="34" charset="0"/>
                 <a:ea typeface="Trebuchet MS" pitchFamily="34" charset="-122"/>
                 <a:cs typeface="Trebuchet MS" pitchFamily="34" charset="-120"/>
               </a:rPr>
-              <a:t>en-</a:t>
+              <a:t>-ment</a:t>
             </a:r>
             <a:endParaRPr lang="en-US" sz="1300" dirty="0"/>
           </a:p>
@@ -34747,64 +34753,14 @@
       </p:sp>
       <p:sp>
         <p:nvSpPr>
-          <p:cNvPr id="35" name="Shape 33"/>
-          <p:cNvSpPr/>
-          <p:nvPr/>
-        </p:nvSpPr>
-        <p:spPr>
-          <a:xfrm>
-            <a:off x="2971800" y="2825496"/>
-            <a:ext cx="2834640" cy="402336"/>
-          </a:xfrm>
-          <a:prstGeom prst="rect">
-            <a:avLst/>
-          </a:prstGeom>
-          <a:solidFill>
-            <a:srgbClr val="F1F5F9"/>
-          </a:solidFill>
-          <a:ln w="12700">
-            <a:solidFill>
-              <a:srgbClr val="E2E8F0"/>
-            </a:solidFill>
-            <a:prstDash val="solid"/>
-          </a:ln>
-        </p:spPr>
-      </p:sp>
-      <p:sp>
-        <p:nvSpPr>
-          <p:cNvPr id="36" name="Shape 34"/>
-          <p:cNvSpPr/>
-          <p:nvPr/>
-        </p:nvSpPr>
-        <p:spPr>
-          <a:xfrm>
-            <a:off x="5943600" y="2825496"/>
-            <a:ext cx="2834640" cy="402336"/>
-          </a:xfrm>
-          <a:prstGeom prst="rect">
-            <a:avLst/>
-          </a:prstGeom>
-          <a:solidFill>
-            <a:srgbClr val="FCE7F3"/>
-          </a:solidFill>
-          <a:ln w="12700">
-            <a:solidFill>
-              <a:srgbClr val="E2E8F0"/>
-            </a:solidFill>
-            <a:prstDash val="solid"/>
-          </a:ln>
-        </p:spPr>
-      </p:sp>
-      <p:sp>
-        <p:nvSpPr>
-          <p:cNvPr id="37" name="Text 35"/>
-          <p:cNvSpPr/>
-          <p:nvPr/>
-        </p:nvSpPr>
-        <p:spPr>
-          <a:xfrm>
-            <a:off x="5943600" y="2825496"/>
-            <a:ext cx="2834640" cy="402336"/>
+          <p:cNvPr id="40" name="Text 38"/>
+          <p:cNvSpPr/>
+          <p:nvPr/>
+        </p:nvSpPr>
+        <p:spPr>
+          <a:xfrm>
+            <a:off x="365760" y="3611880"/>
+            <a:ext cx="1828800" cy="347472"/>
           </a:xfrm>
           <a:prstGeom prst="rect">
             <a:avLst/>
@@ -34816,59 +34772,61 @@
           <a:bodyPr wrap="square" lIns="0" tIns="0" rIns="0" bIns="0" rtlCol="0" anchor="ctr"/>
           <a:lstStyle/>
           <a:p>
-            <a:pPr algn="ctr" indent="0" marL="0">
-              <a:buNone/>
-            </a:pPr>
-            <a:r>
-              <a:rPr lang="en-US" sz="1300" b="1" dirty="0">
-                <a:solidFill>
-                  <a:srgbClr val="9D174D"/>
+            <a:pPr algn="l" indent="0" marL="0">
+              <a:buNone/>
+            </a:pPr>
+            <a:r>
+              <a:rPr lang="en-US" sz="1200" b="1" dirty="0">
+                <a:solidFill>
+                  <a:srgbClr val="0F172A"/>
                 </a:solidFill>
                 <a:latin typeface="Trebuchet MS" pitchFamily="34" charset="0"/>
                 <a:ea typeface="Trebuchet MS" pitchFamily="34" charset="-122"/>
                 <a:cs typeface="Trebuchet MS" pitchFamily="34" charset="-120"/>
               </a:rPr>
-              <a:t>-able</a:t>
-            </a:r>
-            <a:endParaRPr lang="en-US" sz="1300" dirty="0"/>
-          </a:p>
-        </p:txBody>
-      </p:sp>
-      <p:sp>
-        <p:nvSpPr>
-          <p:cNvPr id="38" name="Shape 36"/>
-          <p:cNvSpPr/>
-          <p:nvPr/>
-        </p:nvSpPr>
-        <p:spPr>
-          <a:xfrm>
-            <a:off x="365760" y="3246120"/>
-            <a:ext cx="2468880" cy="402336"/>
-          </a:xfrm>
-          <a:prstGeom prst="rect">
-            <a:avLst/>
-          </a:prstGeom>
-          <a:solidFill>
-            <a:srgbClr val="DDD6FE"/>
-          </a:solidFill>
-          <a:ln w="12700">
-            <a:solidFill>
-              <a:srgbClr val="E2E8F0"/>
-            </a:solidFill>
-            <a:prstDash val="solid"/>
-          </a:ln>
-        </p:spPr>
-      </p:sp>
-      <p:sp>
-        <p:nvSpPr>
-          <p:cNvPr id="39" name="Text 37"/>
-          <p:cNvSpPr/>
-          <p:nvPr/>
-        </p:nvSpPr>
-        <p:spPr>
-          <a:xfrm>
-            <a:off x="365760" y="3246120"/>
-            <a:ext cx="2468880" cy="402336"/>
+              <a:t>Sample words:</a:t>
+            </a:r>
+            <a:endParaRPr lang="en-US" sz="1200" dirty="0"/>
+          </a:p>
+        </p:txBody>
+      </p:sp>
+      <p:sp>
+        <p:nvSpPr>
+          <p:cNvPr id="41" name="Shape 39"/>
+          <p:cNvSpPr/>
+          <p:nvPr/>
+        </p:nvSpPr>
+        <p:spPr>
+          <a:xfrm>
+            <a:off x="365760" y="4023360"/>
+            <a:ext cx="2011680" cy="402336"/>
+          </a:xfrm>
+          <a:prstGeom prst="rect">
+            <a:avLst>
+              <a:gd name="adj" fmla="val 13636"/>
+            </a:avLst>
+          </a:prstGeom>
+          <a:solidFill>
+            <a:srgbClr val="EEF2FF"/>
+          </a:solidFill>
+          <a:ln w="12700">
+            <a:solidFill>
+              <a:srgbClr val="6366F1"/>
+            </a:solidFill>
+            <a:prstDash val="solid"/>
+          </a:ln>
+        </p:spPr>
+      </p:sp>
+      <p:sp>
+        <p:nvSpPr>
+          <p:cNvPr id="42" name="Text 40"/>
+          <p:cNvSpPr/>
+          <p:nvPr/>
+        </p:nvSpPr>
+        <p:spPr>
+          <a:xfrm>
+            <a:off x="365760" y="4023360"/>
+            <a:ext cx="2011680" cy="402336"/>
           </a:xfrm>
           <a:prstGeom prst="rect">
             <a:avLst/>
@@ -34884,80 +34842,57 @@
               <a:buNone/>
             </a:pPr>
             <a:r>
-              <a:rPr lang="en-US" sz="1300" b="1" dirty="0">
-                <a:solidFill>
-                  <a:srgbClr val="4C1D95"/>
+              <a:rPr lang="en-US" sz="1200" b="1" dirty="0">
+                <a:solidFill>
+                  <a:srgbClr val="4338CA"/>
                 </a:solidFill>
                 <a:latin typeface="Trebuchet MS" pitchFamily="34" charset="0"/>
                 <a:ea typeface="Trebuchet MS" pitchFamily="34" charset="-122"/>
                 <a:cs typeface="Trebuchet MS" pitchFamily="34" charset="-120"/>
               </a:rPr>
-              <a:t>ill-</a:t>
-            </a:r>
-            <a:endParaRPr lang="en-US" sz="1300" dirty="0"/>
-          </a:p>
-        </p:txBody>
-      </p:sp>
-      <p:sp>
-        <p:nvSpPr>
-          <p:cNvPr id="40" name="Shape 38"/>
-          <p:cNvSpPr/>
-          <p:nvPr/>
-        </p:nvSpPr>
-        <p:spPr>
-          <a:xfrm>
-            <a:off x="2971800" y="3246120"/>
-            <a:ext cx="2834640" cy="402336"/>
-          </a:xfrm>
-          <a:prstGeom prst="rect">
-            <a:avLst/>
-          </a:prstGeom>
-          <a:solidFill>
-            <a:srgbClr val="F8FAFC"/>
-          </a:solidFill>
-          <a:ln w="12700">
-            <a:solidFill>
-              <a:srgbClr val="E2E8F0"/>
-            </a:solidFill>
-            <a:prstDash val="solid"/>
-          </a:ln>
-        </p:spPr>
-      </p:sp>
-      <p:sp>
-        <p:nvSpPr>
-          <p:cNvPr id="41" name="Shape 39"/>
-          <p:cNvSpPr/>
-          <p:nvPr/>
-        </p:nvSpPr>
-        <p:spPr>
-          <a:xfrm>
-            <a:off x="5943600" y="3246120"/>
-            <a:ext cx="2834640" cy="402336"/>
-          </a:xfrm>
-          <a:prstGeom prst="rect">
-            <a:avLst/>
-          </a:prstGeom>
-          <a:solidFill>
-            <a:srgbClr val="FCE7F3"/>
-          </a:solidFill>
-          <a:ln w="12700">
-            <a:solidFill>
-              <a:srgbClr val="E2E8F0"/>
-            </a:solidFill>
-            <a:prstDash val="solid"/>
-          </a:ln>
-        </p:spPr>
-      </p:sp>
-      <p:sp>
-        <p:nvSpPr>
-          <p:cNvPr id="42" name="Text 40"/>
-          <p:cNvSpPr/>
-          <p:nvPr/>
-        </p:nvSpPr>
-        <p:spPr>
-          <a:xfrm>
-            <a:off x="5943600" y="3246120"/>
-            <a:ext cx="2834640" cy="402336"/>
+              <a:t>treat</a:t>
+            </a:r>
+            <a:endParaRPr lang="en-US" sz="1200" dirty="0"/>
+          </a:p>
+        </p:txBody>
+      </p:sp>
+      <p:sp>
+        <p:nvSpPr>
+          <p:cNvPr id="43" name="Shape 41"/>
+          <p:cNvSpPr/>
+          <p:nvPr/>
+        </p:nvSpPr>
+        <p:spPr>
+          <a:xfrm>
+            <a:off x="2542032" y="4023360"/>
+            <a:ext cx="2011680" cy="402336"/>
+          </a:xfrm>
+          <a:prstGeom prst="rect">
+            <a:avLst>
+              <a:gd name="adj" fmla="val 13636"/>
+            </a:avLst>
+          </a:prstGeom>
+          <a:solidFill>
+            <a:srgbClr val="EEF2FF"/>
+          </a:solidFill>
+          <a:ln w="12700">
+            <a:solidFill>
+              <a:srgbClr val="6366F1"/>
+            </a:solidFill>
+            <a:prstDash val="solid"/>
+          </a:ln>
+        </p:spPr>
+      </p:sp>
+      <p:sp>
+        <p:nvSpPr>
+          <p:cNvPr id="44" name="Text 42"/>
+          <p:cNvSpPr/>
+          <p:nvPr/>
+        </p:nvSpPr>
+        <p:spPr>
+          <a:xfrm>
+            <a:off x="2542032" y="4023360"/>
+            <a:ext cx="2011680" cy="402336"/>
           </a:xfrm>
           <a:prstGeom prst="rect">
             <a:avLst/>
@@ -34973,30 +34908,57 @@
               <a:buNone/>
             </a:pPr>
             <a:r>
-              <a:rPr lang="en-US" sz="1300" b="1" dirty="0">
-                <a:solidFill>
-                  <a:srgbClr val="9D174D"/>
+              <a:rPr lang="en-US" sz="1200" b="1" dirty="0">
+                <a:solidFill>
+                  <a:srgbClr val="4338CA"/>
                 </a:solidFill>
                 <a:latin typeface="Trebuchet MS" pitchFamily="34" charset="0"/>
                 <a:ea typeface="Trebuchet MS" pitchFamily="34" charset="-122"/>
                 <a:cs typeface="Trebuchet MS" pitchFamily="34" charset="-120"/>
               </a:rPr>
-              <a:t>-er</a:t>
-            </a:r>
-            <a:endParaRPr lang="en-US" sz="1300" dirty="0"/>
-          </a:p>
-        </p:txBody>
-      </p:sp>
-      <p:sp>
-        <p:nvSpPr>
-          <p:cNvPr id="43" name="Text 41"/>
-          <p:cNvSpPr/>
-          <p:nvPr/>
-        </p:nvSpPr>
-        <p:spPr>
-          <a:xfrm>
-            <a:off x="365760" y="3611880"/>
-            <a:ext cx="1828800" cy="347472"/>
+              <a:t>treats</a:t>
+            </a:r>
+            <a:endParaRPr lang="en-US" sz="1200" dirty="0"/>
+          </a:p>
+        </p:txBody>
+      </p:sp>
+      <p:sp>
+        <p:nvSpPr>
+          <p:cNvPr id="45" name="Shape 43"/>
+          <p:cNvSpPr/>
+          <p:nvPr/>
+        </p:nvSpPr>
+        <p:spPr>
+          <a:xfrm>
+            <a:off x="4718304" y="4023360"/>
+            <a:ext cx="2011680" cy="402336"/>
+          </a:xfrm>
+          <a:prstGeom prst="rect">
+            <a:avLst>
+              <a:gd name="adj" fmla="val 13636"/>
+            </a:avLst>
+          </a:prstGeom>
+          <a:solidFill>
+            <a:srgbClr val="EEF2FF"/>
+          </a:solidFill>
+          <a:ln w="12700">
+            <a:solidFill>
+              <a:srgbClr val="6366F1"/>
+            </a:solidFill>
+            <a:prstDash val="solid"/>
+          </a:ln>
+        </p:spPr>
+      </p:sp>
+      <p:sp>
+        <p:nvSpPr>
+          <p:cNvPr id="46" name="Text 44"/>
+          <p:cNvSpPr/>
+          <p:nvPr/>
+        </p:nvSpPr>
+        <p:spPr>
+          <a:xfrm>
+            <a:off x="4718304" y="4023360"/>
+            <a:ext cx="2011680" cy="402336"/>
           </a:xfrm>
           <a:prstGeom prst="rect">
             <a:avLst/>
@@ -35008,19 +34970,19 @@
           <a:bodyPr wrap="square" lIns="0" tIns="0" rIns="0" bIns="0" rtlCol="0" anchor="ctr"/>
           <a:lstStyle/>
           <a:p>
-            <a:pPr algn="l" indent="0" marL="0">
+            <a:pPr algn="ctr" indent="0" marL="0">
               <a:buNone/>
             </a:pPr>
             <a:r>
               <a:rPr lang="en-US" sz="1200" b="1" dirty="0">
                 <a:solidFill>
-                  <a:srgbClr val="0F172A"/>
+                  <a:srgbClr val="4338CA"/>
                 </a:solidFill>
                 <a:latin typeface="Trebuchet MS" pitchFamily="34" charset="0"/>
                 <a:ea typeface="Trebuchet MS" pitchFamily="34" charset="-122"/>
                 <a:cs typeface="Trebuchet MS" pitchFamily="34" charset="-120"/>
               </a:rPr>
-              <a:t>Sample words:</a:t>
+              <a:t>treaty</a:t>
             </a:r>
             <a:endParaRPr lang="en-US" sz="1200" dirty="0"/>
           </a:p>
@@ -35028,13 +34990,13 @@
       </p:sp>
       <p:sp>
         <p:nvSpPr>
-          <p:cNvPr id="44" name="Shape 42"/>
-          <p:cNvSpPr/>
-          <p:nvPr/>
-        </p:nvSpPr>
-        <p:spPr>
-          <a:xfrm>
-            <a:off x="365760" y="4023360"/>
+          <p:cNvPr id="47" name="Shape 45"/>
+          <p:cNvSpPr/>
+          <p:nvPr/>
+        </p:nvSpPr>
+        <p:spPr>
+          <a:xfrm>
+            <a:off x="6894576" y="4023360"/>
             <a:ext cx="2011680" cy="402336"/>
           </a:xfrm>
           <a:prstGeom prst="rect">
@@ -35055,13 +35017,13 @@
       </p:sp>
       <p:sp>
         <p:nvSpPr>
-          <p:cNvPr id="45" name="Text 43"/>
-          <p:cNvSpPr/>
-          <p:nvPr/>
-        </p:nvSpPr>
-        <p:spPr>
-          <a:xfrm>
-            <a:off x="365760" y="4023360"/>
+          <p:cNvPr id="48" name="Text 46"/>
+          <p:cNvSpPr/>
+          <p:nvPr/>
+        </p:nvSpPr>
+        <p:spPr>
+          <a:xfrm>
+            <a:off x="6894576" y="4023360"/>
             <a:ext cx="2011680" cy="402336"/>
           </a:xfrm>
           <a:prstGeom prst="rect">
@@ -35086,7 +35048,7 @@
                 <a:ea typeface="Trebuchet MS" pitchFamily="34" charset="-122"/>
                 <a:cs typeface="Trebuchet MS" pitchFamily="34" charset="-120"/>
               </a:rPr>
-              <a:t>treatment</a:t>
+              <a:t>retreat</a:t>
             </a:r>
             <a:endParaRPr lang="en-US" sz="1200" dirty="0"/>
           </a:p>
@@ -35094,13 +35056,13 @@
       </p:sp>
       <p:sp>
         <p:nvSpPr>
-          <p:cNvPr id="46" name="Shape 44"/>
-          <p:cNvSpPr/>
-          <p:nvPr/>
-        </p:nvSpPr>
-        <p:spPr>
-          <a:xfrm>
-            <a:off x="2542032" y="4023360"/>
+          <p:cNvPr id="49" name="Shape 47"/>
+          <p:cNvSpPr/>
+          <p:nvPr/>
+        </p:nvSpPr>
+        <p:spPr>
+          <a:xfrm>
+            <a:off x="365760" y="4498848"/>
             <a:ext cx="2011680" cy="402336"/>
           </a:xfrm>
           <a:prstGeom prst="rect">
@@ -35121,13 +35083,13 @@
       </p:sp>
       <p:sp>
         <p:nvSpPr>
-          <p:cNvPr id="47" name="Text 45"/>
-          <p:cNvSpPr/>
-          <p:nvPr/>
-        </p:nvSpPr>
-        <p:spPr>
-          <a:xfrm>
-            <a:off x="2542032" y="4023360"/>
+          <p:cNvPr id="50" name="Text 48"/>
+          <p:cNvSpPr/>
+          <p:nvPr/>
+        </p:nvSpPr>
+        <p:spPr>
+          <a:xfrm>
+            <a:off x="365760" y="4498848"/>
             <a:ext cx="2011680" cy="402336"/>
           </a:xfrm>
           <a:prstGeom prst="rect">
@@ -35152,7 +35114,7 @@
                 <a:ea typeface="Trebuchet MS" pitchFamily="34" charset="-122"/>
                 <a:cs typeface="Trebuchet MS" pitchFamily="34" charset="-120"/>
               </a:rPr>
-              <a:t>treating</a:t>
+              <a:t>treated</a:t>
             </a:r>
             <a:endParaRPr lang="en-US" sz="1200" dirty="0"/>
           </a:p>
@@ -35160,13 +35122,13 @@
       </p:sp>
       <p:sp>
         <p:nvSpPr>
-          <p:cNvPr id="48" name="Shape 46"/>
-          <p:cNvSpPr/>
-          <p:nvPr/>
-        </p:nvSpPr>
-        <p:spPr>
-          <a:xfrm>
-            <a:off x="4718304" y="4023360"/>
+          <p:cNvPr id="51" name="Shape 49"/>
+          <p:cNvSpPr/>
+          <p:nvPr/>
+        </p:nvSpPr>
+        <p:spPr>
+          <a:xfrm>
+            <a:off x="2542032" y="4498848"/>
             <a:ext cx="2011680" cy="402336"/>
           </a:xfrm>
           <a:prstGeom prst="rect">
@@ -35187,13 +35149,13 @@
       </p:sp>
       <p:sp>
         <p:nvSpPr>
-          <p:cNvPr id="49" name="Text 47"/>
-          <p:cNvSpPr/>
-          <p:nvPr/>
-        </p:nvSpPr>
-        <p:spPr>
-          <a:xfrm>
-            <a:off x="4718304" y="4023360"/>
+          <p:cNvPr id="52" name="Text 50"/>
+          <p:cNvSpPr/>
+          <p:nvPr/>
+        </p:nvSpPr>
+        <p:spPr>
+          <a:xfrm>
+            <a:off x="2542032" y="4498848"/>
             <a:ext cx="2011680" cy="402336"/>
           </a:xfrm>
           <a:prstGeom prst="rect">
@@ -35218,337 +35180,7 @@
                 <a:ea typeface="Trebuchet MS" pitchFamily="34" charset="-122"/>
                 <a:cs typeface="Trebuchet MS" pitchFamily="34" charset="-120"/>
               </a:rPr>
-              <a:t>retreat</a:t>
-            </a:r>
-            <a:endParaRPr lang="en-US" sz="1200" dirty="0"/>
-          </a:p>
-        </p:txBody>
-      </p:sp>
-      <p:sp>
-        <p:nvSpPr>
-          <p:cNvPr id="50" name="Shape 48"/>
-          <p:cNvSpPr/>
-          <p:nvPr/>
-        </p:nvSpPr>
-        <p:spPr>
-          <a:xfrm>
-            <a:off x="6894576" y="4023360"/>
-            <a:ext cx="2011680" cy="402336"/>
-          </a:xfrm>
-          <a:prstGeom prst="rect">
-            <a:avLst>
-              <a:gd name="adj" fmla="val 13636"/>
-            </a:avLst>
-          </a:prstGeom>
-          <a:solidFill>
-            <a:srgbClr val="EEF2FF"/>
-          </a:solidFill>
-          <a:ln w="12700">
-            <a:solidFill>
-              <a:srgbClr val="6366F1"/>
-            </a:solidFill>
-            <a:prstDash val="solid"/>
-          </a:ln>
-        </p:spPr>
-      </p:sp>
-      <p:sp>
-        <p:nvSpPr>
-          <p:cNvPr id="51" name="Text 49"/>
-          <p:cNvSpPr/>
-          <p:nvPr/>
-        </p:nvSpPr>
-        <p:spPr>
-          <a:xfrm>
-            <a:off x="6894576" y="4023360"/>
-            <a:ext cx="2011680" cy="402336"/>
-          </a:xfrm>
-          <a:prstGeom prst="rect">
-            <a:avLst/>
-          </a:prstGeom>
-          <a:noFill/>
-          <a:ln/>
-        </p:spPr>
-        <p:txBody>
-          <a:bodyPr wrap="square" lIns="0" tIns="0" rIns="0" bIns="0" rtlCol="0" anchor="ctr"/>
-          <a:lstStyle/>
-          <a:p>
-            <a:pPr algn="ctr" indent="0" marL="0">
-              <a:buNone/>
-            </a:pPr>
-            <a:r>
-              <a:rPr lang="en-US" sz="1200" b="1" dirty="0">
-                <a:solidFill>
-                  <a:srgbClr val="4338CA"/>
-                </a:solidFill>
-                <a:latin typeface="Trebuchet MS" pitchFamily="34" charset="0"/>
-                <a:ea typeface="Trebuchet MS" pitchFamily="34" charset="-122"/>
-                <a:cs typeface="Trebuchet MS" pitchFamily="34" charset="-120"/>
-              </a:rPr>
-              <a:t>mistreat</a:t>
-            </a:r>
-            <a:endParaRPr lang="en-US" sz="1200" dirty="0"/>
-          </a:p>
-        </p:txBody>
-      </p:sp>
-      <p:sp>
-        <p:nvSpPr>
-          <p:cNvPr id="52" name="Shape 50"/>
-          <p:cNvSpPr/>
-          <p:nvPr/>
-        </p:nvSpPr>
-        <p:spPr>
-          <a:xfrm>
-            <a:off x="365760" y="4498848"/>
-            <a:ext cx="2011680" cy="402336"/>
-          </a:xfrm>
-          <a:prstGeom prst="rect">
-            <a:avLst>
-              <a:gd name="adj" fmla="val 13636"/>
-            </a:avLst>
-          </a:prstGeom>
-          <a:solidFill>
-            <a:srgbClr val="EEF2FF"/>
-          </a:solidFill>
-          <a:ln w="12700">
-            <a:solidFill>
-              <a:srgbClr val="6366F1"/>
-            </a:solidFill>
-            <a:prstDash val="solid"/>
-          </a:ln>
-        </p:spPr>
-      </p:sp>
-      <p:sp>
-        <p:nvSpPr>
-          <p:cNvPr id="53" name="Text 51"/>
-          <p:cNvSpPr/>
-          <p:nvPr/>
-        </p:nvSpPr>
-        <p:spPr>
-          <a:xfrm>
-            <a:off x="365760" y="4498848"/>
-            <a:ext cx="2011680" cy="402336"/>
-          </a:xfrm>
-          <a:prstGeom prst="rect">
-            <a:avLst/>
-          </a:prstGeom>
-          <a:noFill/>
-          <a:ln/>
-        </p:spPr>
-        <p:txBody>
-          <a:bodyPr wrap="square" lIns="0" tIns="0" rIns="0" bIns="0" rtlCol="0" anchor="ctr"/>
-          <a:lstStyle/>
-          <a:p>
-            <a:pPr algn="ctr" indent="0" marL="0">
-              <a:buNone/>
-            </a:pPr>
-            <a:r>
-              <a:rPr lang="en-US" sz="1200" b="1" dirty="0">
-                <a:solidFill>
-                  <a:srgbClr val="4338CA"/>
-                </a:solidFill>
-                <a:latin typeface="Trebuchet MS" pitchFamily="34" charset="0"/>
-                <a:ea typeface="Trebuchet MS" pitchFamily="34" charset="-122"/>
-                <a:cs typeface="Trebuchet MS" pitchFamily="34" charset="-120"/>
-              </a:rPr>
-              <a:t>mistreatment</a:t>
-            </a:r>
-            <a:endParaRPr lang="en-US" sz="1200" dirty="0"/>
-          </a:p>
-        </p:txBody>
-      </p:sp>
-      <p:sp>
-        <p:nvSpPr>
-          <p:cNvPr id="54" name="Shape 52"/>
-          <p:cNvSpPr/>
-          <p:nvPr/>
-        </p:nvSpPr>
-        <p:spPr>
-          <a:xfrm>
-            <a:off x="2542032" y="4498848"/>
-            <a:ext cx="2011680" cy="402336"/>
-          </a:xfrm>
-          <a:prstGeom prst="rect">
-            <a:avLst>
-              <a:gd name="adj" fmla="val 13636"/>
-            </a:avLst>
-          </a:prstGeom>
-          <a:solidFill>
-            <a:srgbClr val="EEF2FF"/>
-          </a:solidFill>
-          <a:ln w="12700">
-            <a:solidFill>
-              <a:srgbClr val="6366F1"/>
-            </a:solidFill>
-            <a:prstDash val="solid"/>
-          </a:ln>
-        </p:spPr>
-      </p:sp>
-      <p:sp>
-        <p:nvSpPr>
-          <p:cNvPr id="55" name="Text 53"/>
-          <p:cNvSpPr/>
-          <p:nvPr/>
-        </p:nvSpPr>
-        <p:spPr>
-          <a:xfrm>
-            <a:off x="2542032" y="4498848"/>
-            <a:ext cx="2011680" cy="402336"/>
-          </a:xfrm>
-          <a:prstGeom prst="rect">
-            <a:avLst/>
-          </a:prstGeom>
-          <a:noFill/>
-          <a:ln/>
-        </p:spPr>
-        <p:txBody>
-          <a:bodyPr wrap="square" lIns="0" tIns="0" rIns="0" bIns="0" rtlCol="0" anchor="ctr"/>
-          <a:lstStyle/>
-          <a:p>
-            <a:pPr algn="ctr" indent="0" marL="0">
-              <a:buNone/>
-            </a:pPr>
-            <a:r>
-              <a:rPr lang="en-US" sz="1200" b="1" dirty="0">
-                <a:solidFill>
-                  <a:srgbClr val="4338CA"/>
-                </a:solidFill>
-                <a:latin typeface="Trebuchet MS" pitchFamily="34" charset="0"/>
-                <a:ea typeface="Trebuchet MS" pitchFamily="34" charset="-122"/>
-                <a:cs typeface="Trebuchet MS" pitchFamily="34" charset="-120"/>
-              </a:rPr>
-              <a:t>retreating</a:t>
-            </a:r>
-            <a:endParaRPr lang="en-US" sz="1200" dirty="0"/>
-          </a:p>
-        </p:txBody>
-      </p:sp>
-      <p:sp>
-        <p:nvSpPr>
-          <p:cNvPr id="56" name="Shape 54"/>
-          <p:cNvSpPr/>
-          <p:nvPr/>
-        </p:nvSpPr>
-        <p:spPr>
-          <a:xfrm>
-            <a:off x="4718304" y="4498848"/>
-            <a:ext cx="2011680" cy="402336"/>
-          </a:xfrm>
-          <a:prstGeom prst="rect">
-            <a:avLst>
-              <a:gd name="adj" fmla="val 13636"/>
-            </a:avLst>
-          </a:prstGeom>
-          <a:solidFill>
-            <a:srgbClr val="EEF2FF"/>
-          </a:solidFill>
-          <a:ln w="12700">
-            <a:solidFill>
-              <a:srgbClr val="6366F1"/>
-            </a:solidFill>
-            <a:prstDash val="solid"/>
-          </a:ln>
-        </p:spPr>
-      </p:sp>
-      <p:sp>
-        <p:nvSpPr>
-          <p:cNvPr id="57" name="Text 55"/>
-          <p:cNvSpPr/>
-          <p:nvPr/>
-        </p:nvSpPr>
-        <p:spPr>
-          <a:xfrm>
-            <a:off x="4718304" y="4498848"/>
-            <a:ext cx="2011680" cy="402336"/>
-          </a:xfrm>
-          <a:prstGeom prst="rect">
-            <a:avLst/>
-          </a:prstGeom>
-          <a:noFill/>
-          <a:ln/>
-        </p:spPr>
-        <p:txBody>
-          <a:bodyPr wrap="square" lIns="0" tIns="0" rIns="0" bIns="0" rtlCol="0" anchor="ctr"/>
-          <a:lstStyle/>
-          <a:p>
-            <a:pPr algn="ctr" indent="0" marL="0">
-              <a:buNone/>
-            </a:pPr>
-            <a:r>
-              <a:rPr lang="en-US" sz="1200" b="1" dirty="0">
-                <a:solidFill>
-                  <a:srgbClr val="4338CA"/>
-                </a:solidFill>
-                <a:latin typeface="Trebuchet MS" pitchFamily="34" charset="0"/>
-                <a:ea typeface="Trebuchet MS" pitchFamily="34" charset="-122"/>
-                <a:cs typeface="Trebuchet MS" pitchFamily="34" charset="-120"/>
-              </a:rPr>
-              <a:t>treatable</a:t>
-            </a:r>
-            <a:endParaRPr lang="en-US" sz="1200" dirty="0"/>
-          </a:p>
-        </p:txBody>
-      </p:sp>
-      <p:sp>
-        <p:nvSpPr>
-          <p:cNvPr id="58" name="Shape 56"/>
-          <p:cNvSpPr/>
-          <p:nvPr/>
-        </p:nvSpPr>
-        <p:spPr>
-          <a:xfrm>
-            <a:off x="6894576" y="4498848"/>
-            <a:ext cx="2011680" cy="402336"/>
-          </a:xfrm>
-          <a:prstGeom prst="rect">
-            <a:avLst>
-              <a:gd name="adj" fmla="val 13636"/>
-            </a:avLst>
-          </a:prstGeom>
-          <a:solidFill>
-            <a:srgbClr val="EEF2FF"/>
-          </a:solidFill>
-          <a:ln w="12700">
-            <a:solidFill>
-              <a:srgbClr val="6366F1"/>
-            </a:solidFill>
-            <a:prstDash val="solid"/>
-          </a:ln>
-        </p:spPr>
-      </p:sp>
-      <p:sp>
-        <p:nvSpPr>
-          <p:cNvPr id="59" name="Text 57"/>
-          <p:cNvSpPr/>
-          <p:nvPr/>
-        </p:nvSpPr>
-        <p:spPr>
-          <a:xfrm>
-            <a:off x="6894576" y="4498848"/>
-            <a:ext cx="2011680" cy="402336"/>
-          </a:xfrm>
-          <a:prstGeom prst="rect">
-            <a:avLst/>
-          </a:prstGeom>
-          <a:noFill/>
-          <a:ln/>
-        </p:spPr>
-        <p:txBody>
-          <a:bodyPr wrap="square" lIns="0" tIns="0" rIns="0" bIns="0" rtlCol="0" anchor="ctr"/>
-          <a:lstStyle/>
-          <a:p>
-            <a:pPr algn="ctr" indent="0" marL="0">
-              <a:buNone/>
-            </a:pPr>
-            <a:r>
-              <a:rPr lang="en-US" sz="1200" b="1" dirty="0">
-                <a:solidFill>
-                  <a:srgbClr val="4338CA"/>
-                </a:solidFill>
-                <a:latin typeface="Trebuchet MS" pitchFamily="34" charset="0"/>
-                <a:ea typeface="Trebuchet MS" pitchFamily="34" charset="-122"/>
-                <a:cs typeface="Trebuchet MS" pitchFamily="34" charset="-120"/>
-              </a:rPr>
-              <a:t>retreated</a:t>
+              <a:t>retreats</a:t>
             </a:r>
             <a:endParaRPr lang="en-US" sz="1200" dirty="0"/>
           </a:p>
@@ -35840,7 +35472,7 @@
                 <a:ea typeface="Calibri" pitchFamily="34" charset="-122"/>
                 <a:cs typeface="Calibri" pitchFamily="34" charset="-120"/>
               </a:rPr>
-              <a:t>Word Labs  •  wordlabs.app  •  Root: 'treat' = handle, deal with, negotiate</a:t>
+              <a:t>Word Labs  •  wordlabs.app  •  Root: 'treat' = to deal with; a special thing</a:t>
             </a:r>
             <a:endParaRPr lang="en-US" sz="800" dirty="0"/>
           </a:p>
@@ -36004,7 +35636,7 @@
                 <a:ea typeface="Calibri" pitchFamily="34" charset="-122"/>
                 <a:cs typeface="Calibri" pitchFamily="34" charset="-120"/>
               </a:rPr>
-              <a:t>The core part of a word carrying its basic meaning. For example, 'treat' means 'handle, deal with, negotiate'.</a:t>
+              <a:t>The core part of a word carrying its basic meaning. For example, 'treat' means 'to deal with; a special thing'.</a:t>
             </a:r>
             <a:endParaRPr lang="en-US" sz="1350" dirty="0"/>
           </a:p>
@@ -36624,7 +36256,7 @@
                 <a:ea typeface="Calibri" pitchFamily="34" charset="-122"/>
                 <a:cs typeface="Calibri" pitchFamily="34" charset="-120"/>
               </a:rPr>
-              <a:t>Word Labs  •  wordlabs.app  •  Root: 'treat' = handle, deal with, negotiate</a:t>
+              <a:t>Word Labs  •  wordlabs.app  •  Root: 'treat' = to deal with; a special thing</a:t>
             </a:r>
             <a:endParaRPr lang="en-US" sz="800" dirty="0"/>
           </a:p>
@@ -36736,7 +36368,7 @@
                 <a:ea typeface="Calibri" pitchFamily="34" charset="-122"/>
                 <a:cs typeface="Calibri" pitchFamily="34" charset="-120"/>
               </a:rPr>
-              <a:t>1.  The word 'retreat' means to move forward into a new place.</a:t>
+              <a:t>1.  'treat' means 'to completely ignore someone's feelings'.</a:t>
             </a:r>
             <a:endParaRPr lang="en-US" sz="1300" dirty="0"/>
           </a:p>
@@ -36875,7 +36507,7 @@
                 <a:ea typeface="Calibri" pitchFamily="34" charset="-122"/>
                 <a:cs typeface="Calibri" pitchFamily="34" charset="-120"/>
               </a:rPr>
-              <a:t>2.  The root 'treat' comes from ancient Greek.</a:t>
+              <a:t>2.  'treat' means 'to deal with; a special thing'.</a:t>
             </a:r>
             <a:endParaRPr lang="en-US" sz="1300" dirty="0"/>
           </a:p>
@@ -36898,11 +36530,11 @@
             </a:avLst>
           </a:prstGeom>
           <a:solidFill>
-            <a:srgbClr val="FEE2E2"/>
-          </a:solidFill>
-          <a:ln w="12700">
-            <a:solidFill>
-              <a:srgbClr val="DC2626"/>
+            <a:srgbClr val="DCFCE7"/>
+          </a:solidFill>
+          <a:ln w="12700">
+            <a:solidFill>
+              <a:srgbClr val="16A34A"/>
             </a:solidFill>
             <a:prstDash val="solid"/>
           </a:ln>
@@ -36935,13 +36567,13 @@
             <a:r>
               <a:rPr lang="en-US" sz="1100" b="1" dirty="0">
                 <a:solidFill>
-                  <a:srgbClr val="DC2626"/>
+                  <a:srgbClr val="16A34A"/>
                 </a:solidFill>
                 <a:latin typeface="Trebuchet MS" pitchFamily="34" charset="0"/>
                 <a:ea typeface="Trebuchet MS" pitchFamily="34" charset="-122"/>
                 <a:cs typeface="Trebuchet MS" pitchFamily="34" charset="-120"/>
               </a:rPr>
-              <a:t>FALSE</a:t>
+              <a:t>TRUE</a:t>
             </a:r>
             <a:endParaRPr lang="en-US" sz="1100" dirty="0"/>
           </a:p>
@@ -37014,7 +36646,7 @@
                 <a:ea typeface="Calibri" pitchFamily="34" charset="-122"/>
                 <a:cs typeface="Calibri" pitchFamily="34" charset="-120"/>
               </a:rPr>
-              <a:t>3.  The word 'treatment' contains the suffix '-ment', which turns a verb into a noun.</a:t>
+              <a:t>3.  'treats' means 'small gifts or nice things given to someone, often sweets'.</a:t>
             </a:r>
             <a:endParaRPr lang="en-US" sz="1300" dirty="0"/>
           </a:p>
@@ -37153,7 +36785,7 @@
                 <a:ea typeface="Calibri" pitchFamily="34" charset="-122"/>
                 <a:cs typeface="Calibri" pitchFamily="34" charset="-120"/>
               </a:rPr>
-              <a:t>4.  The word 'mistreat' uses the prefix 'mis-' meaning wrongly or badly.</a:t>
+              <a:t>4.  'treat' means 'to behave towards someone in a particular way, give medical care, or a pleasant thing given as a gift'.</a:t>
             </a:r>
             <a:endParaRPr lang="en-US" sz="1300" dirty="0"/>
           </a:p>
@@ -37292,7 +36924,7 @@
                 <a:ea typeface="Calibri" pitchFamily="34" charset="-122"/>
                 <a:cs typeface="Calibri" pitchFamily="34" charset="-120"/>
               </a:rPr>
-              <a:t>5.  Adding '-able' to 'treat' makes the word 'treatable', meaning able to be treated.</a:t>
+              <a:t>5.  'treats' means 'formal agreements signed by leaders'.</a:t>
             </a:r>
             <a:endParaRPr lang="en-US" sz="1300" dirty="0"/>
           </a:p>
@@ -37315,11 +36947,11 @@
             </a:avLst>
           </a:prstGeom>
           <a:solidFill>
-            <a:srgbClr val="DCFCE7"/>
-          </a:solidFill>
-          <a:ln w="12700">
-            <a:solidFill>
-              <a:srgbClr val="16A34A"/>
+            <a:srgbClr val="FEE2E2"/>
+          </a:solidFill>
+          <a:ln w="12700">
+            <a:solidFill>
+              <a:srgbClr val="DC2626"/>
             </a:solidFill>
             <a:prstDash val="solid"/>
           </a:ln>
@@ -37352,13 +36984,13 @@
             <a:r>
               <a:rPr lang="en-US" sz="1100" b="1" dirty="0">
                 <a:solidFill>
-                  <a:srgbClr val="16A34A"/>
+                  <a:srgbClr val="DC2626"/>
                 </a:solidFill>
                 <a:latin typeface="Trebuchet MS" pitchFamily="34" charset="0"/>
                 <a:ea typeface="Trebuchet MS" pitchFamily="34" charset="-122"/>
                 <a:cs typeface="Trebuchet MS" pitchFamily="34" charset="-120"/>
               </a:rPr>
-              <a:t>TRUE</a:t>
+              <a:t>FALSE</a:t>
             </a:r>
             <a:endParaRPr lang="en-US" sz="1100" dirty="0"/>
           </a:p>
@@ -37650,7 +37282,7 @@
                 <a:ea typeface="Calibri" pitchFamily="34" charset="-122"/>
                 <a:cs typeface="Calibri" pitchFamily="34" charset="-120"/>
               </a:rPr>
-              <a:t>Word Labs  •  wordlabs.app  •  Root: 'treat' = handle, deal with, negotiate</a:t>
+              <a:t>Word Labs  •  wordlabs.app  •  Root: 'treat' = to deal with; a special thing</a:t>
             </a:r>
             <a:endParaRPr lang="en-US" sz="800" dirty="0"/>
           </a:p>
@@ -37787,7 +37419,7 @@
                 <a:ea typeface="Trebuchet MS" pitchFamily="34" charset="-122"/>
                 <a:cs typeface="Trebuchet MS" pitchFamily="34" charset="-120"/>
               </a:rPr>
-              <a:t>handle, deal with, negotiate</a:t>
+              <a:t>to deal with; a special thing</a:t>
             </a:r>
             <a:endParaRPr lang="en-US" sz="2000" dirty="0"/>
           </a:p>
@@ -37826,7 +37458,7 @@
                 <a:ea typeface="Calibri" pitchFamily="34" charset="-122"/>
                 <a:cs typeface="Calibri" pitchFamily="34" charset="-120"/>
               </a:rPr>
-              <a:t>Origin: Latin: tractare</a:t>
+              <a:t>Origin: Core English root</a:t>
             </a:r>
             <a:endParaRPr lang="en-US" sz="1100" dirty="0"/>
           </a:p>
@@ -37931,7 +37563,7 @@
                 <a:ea typeface="Trebuchet MS" pitchFamily="34" charset="-122"/>
                 <a:cs typeface="Trebuchet MS" pitchFamily="34" charset="-120"/>
               </a:rPr>
-              <a:t>treatment</a:t>
+              <a:t>treat</a:t>
             </a:r>
             <a:endParaRPr lang="en-US" sz="1300" dirty="0"/>
           </a:p>
@@ -37997,7 +37629,7 @@
                 <a:ea typeface="Trebuchet MS" pitchFamily="34" charset="-122"/>
                 <a:cs typeface="Trebuchet MS" pitchFamily="34" charset="-120"/>
               </a:rPr>
-              <a:t>treating</a:t>
+              <a:t>treats</a:t>
             </a:r>
             <a:endParaRPr lang="en-US" sz="1300" dirty="0"/>
           </a:p>
@@ -38063,7 +37695,7 @@
                 <a:ea typeface="Trebuchet MS" pitchFamily="34" charset="-122"/>
                 <a:cs typeface="Trebuchet MS" pitchFamily="34" charset="-120"/>
               </a:rPr>
-              <a:t>retreat</a:t>
+              <a:t>treaty</a:t>
             </a:r>
             <a:endParaRPr lang="en-US" sz="1300" dirty="0"/>
           </a:p>
@@ -38129,7 +37761,7 @@
                 <a:ea typeface="Trebuchet MS" pitchFamily="34" charset="-122"/>
                 <a:cs typeface="Trebuchet MS" pitchFamily="34" charset="-120"/>
               </a:rPr>
-              <a:t>mistreat</a:t>
+              <a:t>retreat</a:t>
             </a:r>
             <a:endParaRPr lang="en-US" sz="1300" dirty="0"/>
           </a:p>
@@ -38195,7 +37827,7 @@
                 <a:ea typeface="Trebuchet MS" pitchFamily="34" charset="-122"/>
                 <a:cs typeface="Trebuchet MS" pitchFamily="34" charset="-120"/>
               </a:rPr>
-              <a:t>mistreatment</a:t>
+              <a:t>treated</a:t>
             </a:r>
             <a:endParaRPr lang="en-US" sz="1300" dirty="0"/>
           </a:p>
@@ -38261,73 +37893,7 @@
                 <a:ea typeface="Trebuchet MS" pitchFamily="34" charset="-122"/>
                 <a:cs typeface="Trebuchet MS" pitchFamily="34" charset="-120"/>
               </a:rPr>
-              <a:t>retreating</a:t>
-            </a:r>
-            <a:endParaRPr lang="en-US" sz="1300" dirty="0"/>
-          </a:p>
-        </p:txBody>
-      </p:sp>
-      <p:sp>
-        <p:nvSpPr>
-          <p:cNvPr id="28" name="Shape 26"/>
-          <p:cNvSpPr/>
-          <p:nvPr/>
-        </p:nvSpPr>
-        <p:spPr>
-          <a:xfrm>
-            <a:off x="4663440" y="3401568"/>
-            <a:ext cx="2011680" cy="502920"/>
-          </a:xfrm>
-          <a:prstGeom prst="rect">
-            <a:avLst>
-              <a:gd name="adj" fmla="val 14545"/>
-            </a:avLst>
-          </a:prstGeom>
-          <a:solidFill>
-            <a:srgbClr val="EEF2FF"/>
-          </a:solidFill>
-          <a:ln w="12700">
-            <a:solidFill>
-              <a:srgbClr val="6366F1"/>
-            </a:solidFill>
-            <a:prstDash val="solid"/>
-          </a:ln>
-        </p:spPr>
-      </p:sp>
-      <p:sp>
-        <p:nvSpPr>
-          <p:cNvPr id="29" name="Text 27"/>
-          <p:cNvSpPr/>
-          <p:nvPr/>
-        </p:nvSpPr>
-        <p:spPr>
-          <a:xfrm>
-            <a:off x="4663440" y="3401568"/>
-            <a:ext cx="2011680" cy="502920"/>
-          </a:xfrm>
-          <a:prstGeom prst="rect">
-            <a:avLst/>
-          </a:prstGeom>
-          <a:noFill/>
-          <a:ln/>
-        </p:spPr>
-        <p:txBody>
-          <a:bodyPr wrap="square" lIns="0" tIns="0" rIns="0" bIns="0" rtlCol="0" anchor="ctr"/>
-          <a:lstStyle/>
-          <a:p>
-            <a:pPr algn="ctr" indent="0" marL="0">
-              <a:buNone/>
-            </a:pPr>
-            <a:r>
-              <a:rPr lang="en-US" sz="1300" b="1" dirty="0">
-                <a:solidFill>
-                  <a:srgbClr val="4338CA"/>
-                </a:solidFill>
-                <a:latin typeface="Trebuchet MS" pitchFamily="34" charset="0"/>
-                <a:ea typeface="Trebuchet MS" pitchFamily="34" charset="-122"/>
-                <a:cs typeface="Trebuchet MS" pitchFamily="34" charset="-120"/>
-              </a:rPr>
-              <a:t>treatable</a:t>
+              <a:t>retreats</a:t>
             </a:r>
             <a:endParaRPr lang="en-US" sz="1300" dirty="0"/>
           </a:p>
@@ -38619,7 +38185,7 @@
                 <a:ea typeface="Calibri" pitchFamily="34" charset="-122"/>
                 <a:cs typeface="Calibri" pitchFamily="34" charset="-120"/>
               </a:rPr>
-              <a:t>Word Labs  •  wordlabs.app  •  Root: 'treat' = handle, deal with, negotiate</a:t>
+              <a:t>Word Labs  •  wordlabs.app  •  Root: 'treat' = to deal with; a special thing</a:t>
             </a:r>
             <a:endParaRPr lang="en-US" sz="800" dirty="0"/>
           </a:p>
@@ -38920,7 +38486,7 @@
                 <a:ea typeface="Trebuchet MS" pitchFamily="34" charset="-122"/>
                 <a:cs typeface="Trebuchet MS" pitchFamily="34" charset="-120"/>
               </a:rPr>
-              <a:t>re-</a:t>
+              <a:t>mal-</a:t>
             </a:r>
             <a:endParaRPr lang="en-US" sz="1300" dirty="0"/>
           </a:p>
@@ -39048,7 +38614,7 @@
                 <a:ea typeface="Trebuchet MS" pitchFamily="34" charset="-122"/>
                 <a:cs typeface="Trebuchet MS" pitchFamily="34" charset="-120"/>
               </a:rPr>
-              <a:t>-ment</a:t>
+              <a:t>-s</a:t>
             </a:r>
             <a:endParaRPr lang="en-US" sz="1300" dirty="0"/>
           </a:p>
@@ -39112,7 +38678,7 @@
                 <a:ea typeface="Trebuchet MS" pitchFamily="34" charset="-122"/>
                 <a:cs typeface="Trebuchet MS" pitchFamily="34" charset="-120"/>
               </a:rPr>
-              <a:t>mis-</a:t>
+              <a:t>re-</a:t>
             </a:r>
             <a:endParaRPr lang="en-US" sz="1300" dirty="0"/>
           </a:p>
@@ -39222,7 +38788,7 @@
             <a:avLst/>
           </a:prstGeom>
           <a:solidFill>
-            <a:srgbClr val="DDD6FE"/>
+            <a:srgbClr val="F8FAFC"/>
           </a:solidFill>
           <a:ln w="12700">
             <a:solidFill>
@@ -39234,18 +38800,68 @@
       </p:sp>
       <p:sp>
         <p:nvSpPr>
-          <p:cNvPr id="29" name="Text 27"/>
-          <p:cNvSpPr/>
-          <p:nvPr/>
-        </p:nvSpPr>
-        <p:spPr>
-          <a:xfrm>
-            <a:off x="640080" y="2670048"/>
+          <p:cNvPr id="29" name="Shape 27"/>
+          <p:cNvSpPr/>
+          <p:nvPr/>
+        </p:nvSpPr>
+        <p:spPr>
+          <a:xfrm>
+            <a:off x="3291840" y="2670048"/>
+            <a:ext cx="1645920" cy="420624"/>
+          </a:xfrm>
+          <a:prstGeom prst="rect">
+            <a:avLst/>
+          </a:prstGeom>
+          <a:solidFill>
+            <a:srgbClr val="F8FAFC"/>
+          </a:solidFill>
+          <a:ln w="12700">
+            <a:solidFill>
+              <a:srgbClr val="E5E7EB"/>
+            </a:solidFill>
+            <a:prstDash val="solid"/>
+          </a:ln>
+        </p:spPr>
+      </p:sp>
+      <p:sp>
+        <p:nvSpPr>
+          <p:cNvPr id="30" name="Shape 28"/>
+          <p:cNvSpPr/>
+          <p:nvPr/>
+        </p:nvSpPr>
+        <p:spPr>
+          <a:xfrm>
+            <a:off x="5943600" y="2670048"/>
             <a:ext cx="1463040" cy="420624"/>
           </a:xfrm>
           <a:prstGeom prst="rect">
             <a:avLst/>
           </a:prstGeom>
+          <a:solidFill>
+            <a:srgbClr val="FCE7F3"/>
+          </a:solidFill>
+          <a:ln w="12700">
+            <a:solidFill>
+              <a:srgbClr val="E5E7EB"/>
+            </a:solidFill>
+            <a:prstDash val="solid"/>
+          </a:ln>
+        </p:spPr>
+      </p:sp>
+      <p:sp>
+        <p:nvSpPr>
+          <p:cNvPr id="31" name="Text 29"/>
+          <p:cNvSpPr/>
+          <p:nvPr/>
+        </p:nvSpPr>
+        <p:spPr>
+          <a:xfrm>
+            <a:off x="5943600" y="2670048"/>
+            <a:ext cx="1463040" cy="420624"/>
+          </a:xfrm>
+          <a:prstGeom prst="rect">
+            <a:avLst/>
+          </a:prstGeom>
           <a:noFill/>
           <a:ln/>
         </p:spPr>
@@ -39259,13 +38875,13 @@
             <a:r>
               <a:rPr lang="en-US" sz="1300" b="1" dirty="0">
                 <a:solidFill>
-                  <a:srgbClr val="4C1D95"/>
+                  <a:srgbClr val="9D174D"/>
                 </a:solidFill>
                 <a:latin typeface="Trebuchet MS" pitchFamily="34" charset="0"/>
                 <a:ea typeface="Trebuchet MS" pitchFamily="34" charset="-122"/>
                 <a:cs typeface="Trebuchet MS" pitchFamily="34" charset="-120"/>
               </a:rPr>
-              <a:t>mal-</a:t>
+              <a:t>-y</a:t>
             </a:r>
             <a:endParaRPr lang="en-US" sz="1300" dirty="0"/>
           </a:p>
@@ -39273,20 +38889,45 @@
       </p:sp>
       <p:sp>
         <p:nvSpPr>
-          <p:cNvPr id="30" name="Shape 28"/>
-          <p:cNvSpPr/>
-          <p:nvPr/>
-        </p:nvSpPr>
-        <p:spPr>
-          <a:xfrm>
-            <a:off x="3291840" y="2670048"/>
+          <p:cNvPr id="32" name="Shape 30"/>
+          <p:cNvSpPr/>
+          <p:nvPr/>
+        </p:nvSpPr>
+        <p:spPr>
+          <a:xfrm>
+            <a:off x="640080" y="3127248"/>
+            <a:ext cx="1463040" cy="420624"/>
+          </a:xfrm>
+          <a:prstGeom prst="rect">
+            <a:avLst/>
+          </a:prstGeom>
+          <a:solidFill>
+            <a:srgbClr val="F1F5F9"/>
+          </a:solidFill>
+          <a:ln w="12700">
+            <a:solidFill>
+              <a:srgbClr val="E5E7EB"/>
+            </a:solidFill>
+            <a:prstDash val="solid"/>
+          </a:ln>
+        </p:spPr>
+      </p:sp>
+      <p:sp>
+        <p:nvSpPr>
+          <p:cNvPr id="33" name="Shape 31"/>
+          <p:cNvSpPr/>
+          <p:nvPr/>
+        </p:nvSpPr>
+        <p:spPr>
+          <a:xfrm>
+            <a:off x="3291840" y="3127248"/>
             <a:ext cx="1645920" cy="420624"/>
           </a:xfrm>
           <a:prstGeom prst="rect">
             <a:avLst/>
           </a:prstGeom>
           <a:solidFill>
-            <a:srgbClr val="F8FAFC"/>
+            <a:srgbClr val="F1F5F9"/>
           </a:solidFill>
           <a:ln w="12700">
             <a:solidFill>
@@ -39298,13 +38939,13 @@
       </p:sp>
       <p:sp>
         <p:nvSpPr>
-          <p:cNvPr id="31" name="Shape 29"/>
-          <p:cNvSpPr/>
-          <p:nvPr/>
-        </p:nvSpPr>
-        <p:spPr>
-          <a:xfrm>
-            <a:off x="5943600" y="2670048"/>
+          <p:cNvPr id="34" name="Shape 32"/>
+          <p:cNvSpPr/>
+          <p:nvPr/>
+        </p:nvSpPr>
+        <p:spPr>
+          <a:xfrm>
+            <a:off x="5943600" y="3127248"/>
             <a:ext cx="1463040" cy="420624"/>
           </a:xfrm>
           <a:prstGeom prst="rect">
@@ -39323,13 +38964,13 @@
       </p:sp>
       <p:sp>
         <p:nvSpPr>
-          <p:cNvPr id="32" name="Text 30"/>
-          <p:cNvSpPr/>
-          <p:nvPr/>
-        </p:nvSpPr>
-        <p:spPr>
-          <a:xfrm>
-            <a:off x="5943600" y="2670048"/>
+          <p:cNvPr id="35" name="Text 33"/>
+          <p:cNvSpPr/>
+          <p:nvPr/>
+        </p:nvSpPr>
+        <p:spPr>
+          <a:xfrm>
+            <a:off x="5943600" y="3127248"/>
             <a:ext cx="1463040" cy="420624"/>
           </a:xfrm>
           <a:prstGeom prst="rect">
@@ -39362,20 +39003,20 @@
       </p:sp>
       <p:sp>
         <p:nvSpPr>
-          <p:cNvPr id="33" name="Shape 31"/>
-          <p:cNvSpPr/>
-          <p:nvPr/>
-        </p:nvSpPr>
-        <p:spPr>
-          <a:xfrm>
-            <a:off x="640080" y="3127248"/>
+          <p:cNvPr id="36" name="Shape 34"/>
+          <p:cNvSpPr/>
+          <p:nvPr/>
+        </p:nvSpPr>
+        <p:spPr>
+          <a:xfrm>
+            <a:off x="640080" y="3584448"/>
             <a:ext cx="1463040" cy="420624"/>
           </a:xfrm>
           <a:prstGeom prst="rect">
             <a:avLst/>
           </a:prstGeom>
           <a:solidFill>
-            <a:srgbClr val="DDD6FE"/>
+            <a:srgbClr val="F8FAFC"/>
           </a:solidFill>
           <a:ln w="12700">
             <a:solidFill>
@@ -39387,18 +39028,68 @@
       </p:sp>
       <p:sp>
         <p:nvSpPr>
-          <p:cNvPr id="34" name="Text 32"/>
-          <p:cNvSpPr/>
-          <p:nvPr/>
-        </p:nvSpPr>
-        <p:spPr>
-          <a:xfrm>
-            <a:off x="640080" y="3127248"/>
+          <p:cNvPr id="37" name="Shape 35"/>
+          <p:cNvSpPr/>
+          <p:nvPr/>
+        </p:nvSpPr>
+        <p:spPr>
+          <a:xfrm>
+            <a:off x="3291840" y="3584448"/>
+            <a:ext cx="1645920" cy="420624"/>
+          </a:xfrm>
+          <a:prstGeom prst="rect">
+            <a:avLst/>
+          </a:prstGeom>
+          <a:solidFill>
+            <a:srgbClr val="F8FAFC"/>
+          </a:solidFill>
+          <a:ln w="12700">
+            <a:solidFill>
+              <a:srgbClr val="E5E7EB"/>
+            </a:solidFill>
+            <a:prstDash val="solid"/>
+          </a:ln>
+        </p:spPr>
+      </p:sp>
+      <p:sp>
+        <p:nvSpPr>
+          <p:cNvPr id="38" name="Shape 36"/>
+          <p:cNvSpPr/>
+          <p:nvPr/>
+        </p:nvSpPr>
+        <p:spPr>
+          <a:xfrm>
+            <a:off x="5943600" y="3584448"/>
             <a:ext cx="1463040" cy="420624"/>
           </a:xfrm>
           <a:prstGeom prst="rect">
             <a:avLst/>
           </a:prstGeom>
+          <a:solidFill>
+            <a:srgbClr val="FCE7F3"/>
+          </a:solidFill>
+          <a:ln w="12700">
+            <a:solidFill>
+              <a:srgbClr val="E5E7EB"/>
+            </a:solidFill>
+            <a:prstDash val="solid"/>
+          </a:ln>
+        </p:spPr>
+      </p:sp>
+      <p:sp>
+        <p:nvSpPr>
+          <p:cNvPr id="39" name="Text 37"/>
+          <p:cNvSpPr/>
+          <p:nvPr/>
+        </p:nvSpPr>
+        <p:spPr>
+          <a:xfrm>
+            <a:off x="5943600" y="3584448"/>
+            <a:ext cx="1463040" cy="420624"/>
+          </a:xfrm>
+          <a:prstGeom prst="rect">
+            <a:avLst/>
+          </a:prstGeom>
           <a:noFill/>
           <a:ln/>
         </p:spPr>
@@ -39412,13 +39103,13 @@
             <a:r>
               <a:rPr lang="en-US" sz="1300" b="1" dirty="0">
                 <a:solidFill>
-                  <a:srgbClr val="4C1D95"/>
+                  <a:srgbClr val="9D174D"/>
                 </a:solidFill>
                 <a:latin typeface="Trebuchet MS" pitchFamily="34" charset="0"/>
                 <a:ea typeface="Trebuchet MS" pitchFamily="34" charset="-122"/>
                 <a:cs typeface="Trebuchet MS" pitchFamily="34" charset="-120"/>
               </a:rPr>
-              <a:t>en-</a:t>
+              <a:t>-ment</a:t>
             </a:r>
             <a:endParaRPr lang="en-US" sz="1300" dirty="0"/>
           </a:p>
@@ -39426,249 +39117,7 @@
       </p:sp>
       <p:sp>
         <p:nvSpPr>
-          <p:cNvPr id="35" name="Shape 33"/>
-          <p:cNvSpPr/>
-          <p:nvPr/>
-        </p:nvSpPr>
-        <p:spPr>
-          <a:xfrm>
-            <a:off x="3291840" y="3127248"/>
-            <a:ext cx="1645920" cy="420624"/>
-          </a:xfrm>
-          <a:prstGeom prst="rect">
-            <a:avLst/>
-          </a:prstGeom>
-          <a:solidFill>
-            <a:srgbClr val="F1F5F9"/>
-          </a:solidFill>
-          <a:ln w="12700">
-            <a:solidFill>
-              <a:srgbClr val="E5E7EB"/>
-            </a:solidFill>
-            <a:prstDash val="solid"/>
-          </a:ln>
-        </p:spPr>
-      </p:sp>
-      <p:sp>
-        <p:nvSpPr>
-          <p:cNvPr id="36" name="Shape 34"/>
-          <p:cNvSpPr/>
-          <p:nvPr/>
-        </p:nvSpPr>
-        <p:spPr>
-          <a:xfrm>
-            <a:off x="5943600" y="3127248"/>
-            <a:ext cx="1463040" cy="420624"/>
-          </a:xfrm>
-          <a:prstGeom prst="rect">
-            <a:avLst/>
-          </a:prstGeom>
-          <a:solidFill>
-            <a:srgbClr val="FCE7F3"/>
-          </a:solidFill>
-          <a:ln w="12700">
-            <a:solidFill>
-              <a:srgbClr val="E5E7EB"/>
-            </a:solidFill>
-            <a:prstDash val="solid"/>
-          </a:ln>
-        </p:spPr>
-      </p:sp>
-      <p:sp>
-        <p:nvSpPr>
-          <p:cNvPr id="37" name="Text 35"/>
-          <p:cNvSpPr/>
-          <p:nvPr/>
-        </p:nvSpPr>
-        <p:spPr>
-          <a:xfrm>
-            <a:off x="5943600" y="3127248"/>
-            <a:ext cx="1463040" cy="420624"/>
-          </a:xfrm>
-          <a:prstGeom prst="rect">
-            <a:avLst/>
-          </a:prstGeom>
-          <a:noFill/>
-          <a:ln/>
-        </p:spPr>
-        <p:txBody>
-          <a:bodyPr wrap="square" lIns="0" tIns="0" rIns="0" bIns="0" rtlCol="0" anchor="ctr"/>
-          <a:lstStyle/>
-          <a:p>
-            <a:pPr algn="ctr" indent="0" marL="0">
-              <a:buNone/>
-            </a:pPr>
-            <a:r>
-              <a:rPr lang="en-US" sz="1300" b="1" dirty="0">
-                <a:solidFill>
-                  <a:srgbClr val="9D174D"/>
-                </a:solidFill>
-                <a:latin typeface="Trebuchet MS" pitchFamily="34" charset="0"/>
-                <a:ea typeface="Trebuchet MS" pitchFamily="34" charset="-122"/>
-                <a:cs typeface="Trebuchet MS" pitchFamily="34" charset="-120"/>
-              </a:rPr>
-              <a:t>-able</a:t>
-            </a:r>
-            <a:endParaRPr lang="en-US" sz="1300" dirty="0"/>
-          </a:p>
-        </p:txBody>
-      </p:sp>
-      <p:sp>
-        <p:nvSpPr>
-          <p:cNvPr id="38" name="Shape 36"/>
-          <p:cNvSpPr/>
-          <p:nvPr/>
-        </p:nvSpPr>
-        <p:spPr>
-          <a:xfrm>
-            <a:off x="640080" y="3584448"/>
-            <a:ext cx="1463040" cy="420624"/>
-          </a:xfrm>
-          <a:prstGeom prst="rect">
-            <a:avLst/>
-          </a:prstGeom>
-          <a:solidFill>
-            <a:srgbClr val="DDD6FE"/>
-          </a:solidFill>
-          <a:ln w="12700">
-            <a:solidFill>
-              <a:srgbClr val="E5E7EB"/>
-            </a:solidFill>
-            <a:prstDash val="solid"/>
-          </a:ln>
-        </p:spPr>
-      </p:sp>
-      <p:sp>
-        <p:nvSpPr>
-          <p:cNvPr id="39" name="Text 37"/>
-          <p:cNvSpPr/>
-          <p:nvPr/>
-        </p:nvSpPr>
-        <p:spPr>
-          <a:xfrm>
-            <a:off x="640080" y="3584448"/>
-            <a:ext cx="1463040" cy="420624"/>
-          </a:xfrm>
-          <a:prstGeom prst="rect">
-            <a:avLst/>
-          </a:prstGeom>
-          <a:noFill/>
-          <a:ln/>
-        </p:spPr>
-        <p:txBody>
-          <a:bodyPr wrap="square" lIns="0" tIns="0" rIns="0" bIns="0" rtlCol="0" anchor="ctr"/>
-          <a:lstStyle/>
-          <a:p>
-            <a:pPr algn="ctr" indent="0" marL="0">
-              <a:buNone/>
-            </a:pPr>
-            <a:r>
-              <a:rPr lang="en-US" sz="1300" b="1" dirty="0">
-                <a:solidFill>
-                  <a:srgbClr val="4C1D95"/>
-                </a:solidFill>
-                <a:latin typeface="Trebuchet MS" pitchFamily="34" charset="0"/>
-                <a:ea typeface="Trebuchet MS" pitchFamily="34" charset="-122"/>
-                <a:cs typeface="Trebuchet MS" pitchFamily="34" charset="-120"/>
-              </a:rPr>
-              <a:t>ill-</a:t>
-            </a:r>
-            <a:endParaRPr lang="en-US" sz="1300" dirty="0"/>
-          </a:p>
-        </p:txBody>
-      </p:sp>
-      <p:sp>
-        <p:nvSpPr>
-          <p:cNvPr id="40" name="Shape 38"/>
-          <p:cNvSpPr/>
-          <p:nvPr/>
-        </p:nvSpPr>
-        <p:spPr>
-          <a:xfrm>
-            <a:off x="3291840" y="3584448"/>
-            <a:ext cx="1645920" cy="420624"/>
-          </a:xfrm>
-          <a:prstGeom prst="rect">
-            <a:avLst/>
-          </a:prstGeom>
-          <a:solidFill>
-            <a:srgbClr val="F8FAFC"/>
-          </a:solidFill>
-          <a:ln w="12700">
-            <a:solidFill>
-              <a:srgbClr val="E5E7EB"/>
-            </a:solidFill>
-            <a:prstDash val="solid"/>
-          </a:ln>
-        </p:spPr>
-      </p:sp>
-      <p:sp>
-        <p:nvSpPr>
-          <p:cNvPr id="41" name="Shape 39"/>
-          <p:cNvSpPr/>
-          <p:nvPr/>
-        </p:nvSpPr>
-        <p:spPr>
-          <a:xfrm>
-            <a:off x="5943600" y="3584448"/>
-            <a:ext cx="1463040" cy="420624"/>
-          </a:xfrm>
-          <a:prstGeom prst="rect">
-            <a:avLst/>
-          </a:prstGeom>
-          <a:solidFill>
-            <a:srgbClr val="FCE7F3"/>
-          </a:solidFill>
-          <a:ln w="12700">
-            <a:solidFill>
-              <a:srgbClr val="E5E7EB"/>
-            </a:solidFill>
-            <a:prstDash val="solid"/>
-          </a:ln>
-        </p:spPr>
-      </p:sp>
-      <p:sp>
-        <p:nvSpPr>
-          <p:cNvPr id="42" name="Text 40"/>
-          <p:cNvSpPr/>
-          <p:nvPr/>
-        </p:nvSpPr>
-        <p:spPr>
-          <a:xfrm>
-            <a:off x="5943600" y="3584448"/>
-            <a:ext cx="1463040" cy="420624"/>
-          </a:xfrm>
-          <a:prstGeom prst="rect">
-            <a:avLst/>
-          </a:prstGeom>
-          <a:noFill/>
-          <a:ln/>
-        </p:spPr>
-        <p:txBody>
-          <a:bodyPr wrap="square" lIns="0" tIns="0" rIns="0" bIns="0" rtlCol="0" anchor="ctr"/>
-          <a:lstStyle/>
-          <a:p>
-            <a:pPr algn="ctr" indent="0" marL="0">
-              <a:buNone/>
-            </a:pPr>
-            <a:r>
-              <a:rPr lang="en-US" sz="1300" b="1" dirty="0">
-                <a:solidFill>
-                  <a:srgbClr val="9D174D"/>
-                </a:solidFill>
-                <a:latin typeface="Trebuchet MS" pitchFamily="34" charset="0"/>
-                <a:ea typeface="Trebuchet MS" pitchFamily="34" charset="-122"/>
-                <a:cs typeface="Trebuchet MS" pitchFamily="34" charset="-120"/>
-              </a:rPr>
-              <a:t>-er</a:t>
-            </a:r>
-            <a:endParaRPr lang="en-US" sz="1300" dirty="0"/>
-          </a:p>
-        </p:txBody>
-      </p:sp>
-      <p:sp>
-        <p:nvSpPr>
-          <p:cNvPr id="43" name="Text 41"/>
+          <p:cNvPr id="40" name="Text 38"/>
           <p:cNvSpPr/>
           <p:nvPr/>
         </p:nvSpPr>
@@ -39707,14 +39156,14 @@
       </p:sp>
       <p:sp>
         <p:nvSpPr>
-          <p:cNvPr id="44" name="Shape 42"/>
+          <p:cNvPr id="41" name="Shape 39"/>
           <p:cNvSpPr/>
           <p:nvPr/>
         </p:nvSpPr>
         <p:spPr>
           <a:xfrm>
             <a:off x="1508760" y="4178808"/>
-            <a:ext cx="822960" cy="420624"/>
+            <a:ext cx="950976" cy="420624"/>
           </a:xfrm>
           <a:prstGeom prst="rect">
             <a:avLst>
@@ -39741,14 +39190,14 @@
       </p:sp>
       <p:sp>
         <p:nvSpPr>
-          <p:cNvPr id="45" name="Text 43"/>
+          <p:cNvPr id="42" name="Text 40"/>
           <p:cNvSpPr/>
           <p:nvPr/>
         </p:nvSpPr>
         <p:spPr>
           <a:xfrm>
             <a:off x="1508760" y="4178808"/>
-            <a:ext cx="822960" cy="420624"/>
+            <a:ext cx="950976" cy="420624"/>
           </a:xfrm>
           <a:prstGeom prst="rect">
             <a:avLst/>
@@ -39772,7 +39221,7 @@
                 <a:ea typeface="Trebuchet MS" pitchFamily="34" charset="-122"/>
                 <a:cs typeface="Trebuchet MS" pitchFamily="34" charset="-120"/>
               </a:rPr>
-              <a:t>re-</a:t>
+              <a:t>mal-</a:t>
             </a:r>
             <a:endParaRPr lang="en-US" sz="1300" dirty="0"/>
           </a:p>
@@ -39780,13 +39229,13 @@
       </p:sp>
       <p:sp>
         <p:nvSpPr>
-          <p:cNvPr id="46" name="Text 44"/>
-          <p:cNvSpPr/>
-          <p:nvPr/>
-        </p:nvSpPr>
-        <p:spPr>
-          <a:xfrm>
-            <a:off x="2359152" y="4178808"/>
+          <p:cNvPr id="43" name="Text 41"/>
+          <p:cNvSpPr/>
+          <p:nvPr/>
+        </p:nvSpPr>
+        <p:spPr>
+          <a:xfrm>
+            <a:off x="2487168" y="4178808"/>
             <a:ext cx="320040" cy="420624"/>
           </a:xfrm>
           <a:prstGeom prst="rect">
@@ -39819,13 +39268,13 @@
       </p:sp>
       <p:sp>
         <p:nvSpPr>
-          <p:cNvPr id="47" name="Shape 45"/>
-          <p:cNvSpPr/>
-          <p:nvPr/>
-        </p:nvSpPr>
-        <p:spPr>
-          <a:xfrm>
-            <a:off x="2706624" y="4178808"/>
+          <p:cNvPr id="44" name="Shape 42"/>
+          <p:cNvSpPr/>
+          <p:nvPr/>
+        </p:nvSpPr>
+        <p:spPr>
+          <a:xfrm>
+            <a:off x="2834640" y="4178808"/>
             <a:ext cx="1389888" cy="420624"/>
           </a:xfrm>
           <a:prstGeom prst="rect">
@@ -39853,13 +39302,13 @@
       </p:sp>
       <p:sp>
         <p:nvSpPr>
-          <p:cNvPr id="48" name="Text 46"/>
-          <p:cNvSpPr/>
-          <p:nvPr/>
-        </p:nvSpPr>
-        <p:spPr>
-          <a:xfrm>
-            <a:off x="2706624" y="4178808"/>
+          <p:cNvPr id="45" name="Text 43"/>
+          <p:cNvSpPr/>
+          <p:nvPr/>
+        </p:nvSpPr>
+        <p:spPr>
+          <a:xfrm>
+            <a:off x="2834640" y="4178808"/>
             <a:ext cx="1389888" cy="420624"/>
           </a:xfrm>
           <a:prstGeom prst="rect">
@@ -39892,13 +39341,13 @@
       </p:sp>
       <p:sp>
         <p:nvSpPr>
-          <p:cNvPr id="49" name="Text 47"/>
-          <p:cNvSpPr/>
-          <p:nvPr/>
-        </p:nvSpPr>
-        <p:spPr>
-          <a:xfrm>
-            <a:off x="4123944" y="4178808"/>
+          <p:cNvPr id="46" name="Text 44"/>
+          <p:cNvSpPr/>
+          <p:nvPr/>
+        </p:nvSpPr>
+        <p:spPr>
+          <a:xfrm>
+            <a:off x="4251960" y="4178808"/>
             <a:ext cx="320040" cy="420624"/>
           </a:xfrm>
           <a:prstGeom prst="rect">
@@ -39931,14 +39380,14 @@
       </p:sp>
       <p:sp>
         <p:nvSpPr>
-          <p:cNvPr id="50" name="Shape 48"/>
-          <p:cNvSpPr/>
-          <p:nvPr/>
-        </p:nvSpPr>
-        <p:spPr>
-          <a:xfrm>
-            <a:off x="4471416" y="4178808"/>
-            <a:ext cx="1097280" cy="420624"/>
+          <p:cNvPr id="47" name="Shape 45"/>
+          <p:cNvSpPr/>
+          <p:nvPr/>
+        </p:nvSpPr>
+        <p:spPr>
+          <a:xfrm>
+            <a:off x="4599432" y="4178808"/>
+            <a:ext cx="822960" cy="420624"/>
           </a:xfrm>
           <a:prstGeom prst="rect">
             <a:avLst>
@@ -39965,14 +39414,14 @@
       </p:sp>
       <p:sp>
         <p:nvSpPr>
-          <p:cNvPr id="51" name="Text 49"/>
-          <p:cNvSpPr/>
-          <p:nvPr/>
-        </p:nvSpPr>
-        <p:spPr>
-          <a:xfrm>
-            <a:off x="4471416" y="4178808"/>
-            <a:ext cx="1097280" cy="420624"/>
+          <p:cNvPr id="48" name="Text 46"/>
+          <p:cNvSpPr/>
+          <p:nvPr/>
+        </p:nvSpPr>
+        <p:spPr>
+          <a:xfrm>
+            <a:off x="4599432" y="4178808"/>
+            <a:ext cx="822960" cy="420624"/>
           </a:xfrm>
           <a:prstGeom prst="rect">
             <a:avLst/>
@@ -39996,7 +39445,7 @@
                 <a:ea typeface="Trebuchet MS" pitchFamily="34" charset="-122"/>
                 <a:cs typeface="Trebuchet MS" pitchFamily="34" charset="-120"/>
               </a:rPr>
-              <a:t>-ment</a:t>
+              <a:t>-s</a:t>
             </a:r>
             <a:endParaRPr lang="en-US" sz="1300" dirty="0"/>
           </a:p>
@@ -40004,13 +39453,13 @@
       </p:sp>
       <p:sp>
         <p:nvSpPr>
-          <p:cNvPr id="52" name="Text 50"/>
-          <p:cNvSpPr/>
-          <p:nvPr/>
-        </p:nvSpPr>
-        <p:spPr>
-          <a:xfrm>
-            <a:off x="5641848" y="4178808"/>
+          <p:cNvPr id="49" name="Text 47"/>
+          <p:cNvSpPr/>
+          <p:nvPr/>
+        </p:nvSpPr>
+        <p:spPr>
+          <a:xfrm>
+            <a:off x="5495544" y="4178808"/>
             <a:ext cx="365760" cy="420624"/>
           </a:xfrm>
           <a:prstGeom prst="rect">
@@ -40043,13 +39492,13 @@
       </p:sp>
       <p:sp>
         <p:nvSpPr>
-          <p:cNvPr id="53" name="Shape 51"/>
-          <p:cNvSpPr/>
-          <p:nvPr/>
-        </p:nvSpPr>
-        <p:spPr>
-          <a:xfrm>
-            <a:off x="6053328" y="4178808"/>
+          <p:cNvPr id="50" name="Shape 48"/>
+          <p:cNvSpPr/>
+          <p:nvPr/>
+        </p:nvSpPr>
+        <p:spPr>
+          <a:xfrm>
+            <a:off x="5907024" y="4178808"/>
             <a:ext cx="2194560" cy="420624"/>
           </a:xfrm>
           <a:prstGeom prst="rect">
@@ -40070,13 +39519,13 @@
       </p:sp>
       <p:sp>
         <p:nvSpPr>
-          <p:cNvPr id="54" name="Text 52"/>
-          <p:cNvSpPr/>
-          <p:nvPr/>
-        </p:nvSpPr>
-        <p:spPr>
-          <a:xfrm>
-            <a:off x="6053328" y="4178808"/>
+          <p:cNvPr id="51" name="Text 49"/>
+          <p:cNvSpPr/>
+          <p:nvPr/>
+        </p:nvSpPr>
+        <p:spPr>
+          <a:xfrm>
+            <a:off x="5907024" y="4178808"/>
             <a:ext cx="2194560" cy="420624"/>
           </a:xfrm>
           <a:prstGeom prst="rect">
@@ -40101,7 +39550,7 @@
                 <a:ea typeface="Trebuchet MS" pitchFamily="34" charset="-122"/>
                 <a:cs typeface="Trebuchet MS" pitchFamily="34" charset="-120"/>
               </a:rPr>
-              <a:t>treatment</a:t>
+              <a:t>treat</a:t>
             </a:r>
             <a:endParaRPr lang="en-US" sz="1400" dirty="0"/>
           </a:p>
@@ -40393,7 +39842,7 @@
                 <a:ea typeface="Calibri" pitchFamily="34" charset="-122"/>
                 <a:cs typeface="Calibri" pitchFamily="34" charset="-120"/>
               </a:rPr>
-              <a:t>Word Labs  •  wordlabs.app  •  Root: 'treat' = handle, deal with, negotiate</a:t>
+              <a:t>Word Labs  •  wordlabs.app  •  Root: 'treat' = to deal with; a special thing</a:t>
             </a:r>
             <a:endParaRPr lang="en-US" sz="800" dirty="0"/>
           </a:p>
@@ -40505,7 +39954,7 @@
                 <a:ea typeface="Trebuchet MS" pitchFamily="34" charset="-122"/>
                 <a:cs typeface="Trebuchet MS" pitchFamily="34" charset="-120"/>
               </a:rPr>
-              <a:t>treatment</a:t>
+              <a:t>treat</a:t>
             </a:r>
             <a:endParaRPr lang="en-US" sz="1200" dirty="0"/>
           </a:p>
@@ -40571,7 +40020,7 @@
                 <a:ea typeface="Calibri" pitchFamily="34" charset="-122"/>
                 <a:cs typeface="Calibri" pitchFamily="34" charset="-120"/>
               </a:rPr>
-              <a:t>The way someone is cared for or dealt with, like medical treatment at a hospital.</a:t>
+              <a:t>to behave towards someone in a particular way, give medical care, or a pleasant thing given as a gift</a:t>
             </a:r>
             <a:endParaRPr lang="en-US" sz="1200" dirty="0"/>
           </a:p>
@@ -40644,7 +40093,7 @@
                 <a:ea typeface="Trebuchet MS" pitchFamily="34" charset="-122"/>
                 <a:cs typeface="Trebuchet MS" pitchFamily="34" charset="-120"/>
               </a:rPr>
-              <a:t>treating</a:t>
+              <a:t>treats</a:t>
             </a:r>
             <a:endParaRPr lang="en-US" sz="1200" dirty="0"/>
           </a:p>
@@ -40710,7 +40159,7 @@
                 <a:ea typeface="Calibri" pitchFamily="34" charset="-122"/>
                 <a:cs typeface="Calibri" pitchFamily="34" charset="-120"/>
               </a:rPr>
-              <a:t>To move back or away from a difficult situation, or a quiet place to rest and think.</a:t>
+              <a:t>a formal written agreement made between two or more countries</a:t>
             </a:r>
             <a:endParaRPr lang="en-US" sz="1200" dirty="0"/>
           </a:p>
@@ -40783,7 +40232,7 @@
                 <a:ea typeface="Trebuchet MS" pitchFamily="34" charset="-122"/>
                 <a:cs typeface="Trebuchet MS" pitchFamily="34" charset="-120"/>
               </a:rPr>
-              <a:t>retreat</a:t>
+              <a:t>treaty</a:t>
             </a:r>
             <a:endParaRPr lang="en-US" sz="1200" dirty="0"/>
           </a:p>
@@ -40849,7 +40298,7 @@
                 <a:ea typeface="Calibri" pitchFamily="34" charset="-122"/>
                 <a:cs typeface="Calibri" pitchFamily="34" charset="-120"/>
               </a:rPr>
-              <a:t>Moving away from a place or situation, especially during a battle or conflict.</a:t>
+              <a:t>moves back away from danger or difficulty</a:t>
             </a:r>
             <a:endParaRPr lang="en-US" sz="1200" dirty="0"/>
           </a:p>
@@ -40922,7 +40371,7 @@
                 <a:ea typeface="Trebuchet MS" pitchFamily="34" charset="-122"/>
                 <a:cs typeface="Trebuchet MS" pitchFamily="34" charset="-120"/>
               </a:rPr>
-              <a:t>mistreat</a:t>
+              <a:t>retreat</a:t>
             </a:r>
             <a:endParaRPr lang="en-US" sz="1200" dirty="0"/>
           </a:p>
@@ -40988,7 +40437,7 @@
                 <a:ea typeface="Calibri" pitchFamily="34" charset="-122"/>
                 <a:cs typeface="Calibri" pitchFamily="34" charset="-120"/>
               </a:rPr>
-              <a:t>To handle someone or something in a cruel or unkind way.</a:t>
+              <a:t>to move back away from something difficult or dangerous</a:t>
             </a:r>
             <a:endParaRPr lang="en-US" sz="1200" dirty="0"/>
           </a:p>
@@ -41061,7 +40510,7 @@
                 <a:ea typeface="Trebuchet MS" pitchFamily="34" charset="-122"/>
                 <a:cs typeface="Trebuchet MS" pitchFamily="34" charset="-120"/>
               </a:rPr>
-              <a:t>mistreatment</a:t>
+              <a:t>treated</a:t>
             </a:r>
             <a:endParaRPr lang="en-US" sz="1200" dirty="0"/>
           </a:p>
@@ -41127,7 +40576,7 @@
                 <a:ea typeface="Calibri" pitchFamily="34" charset="-122"/>
                 <a:cs typeface="Calibri" pitchFamily="34" charset="-120"/>
               </a:rPr>
-              <a:t>Cruel or unkind behaviour towards a person or animal.</a:t>
+              <a:t>behaved towards someone in a particular way, or given medical care</a:t>
             </a:r>
             <a:endParaRPr lang="en-US" sz="1200" dirty="0"/>
           </a:p>
@@ -41200,7 +40649,7 @@
                 <a:ea typeface="Trebuchet MS" pitchFamily="34" charset="-122"/>
                 <a:cs typeface="Trebuchet MS" pitchFamily="34" charset="-120"/>
               </a:rPr>
-              <a:t>retreating</a:t>
+              <a:t>retreats</a:t>
             </a:r>
             <a:endParaRPr lang="en-US" sz="1200" dirty="0"/>
           </a:p>
@@ -41266,146 +40715,7 @@
                 <a:ea typeface="Calibri" pitchFamily="34" charset="-122"/>
                 <a:cs typeface="Calibri" pitchFamily="34" charset="-120"/>
               </a:rPr>
-              <a:t>Describes an illness or problem that doctors or experts are able to fix or help with.</a:t>
-            </a:r>
-            <a:endParaRPr lang="en-US" sz="1200" dirty="0"/>
-          </a:p>
-        </p:txBody>
-      </p:sp>
-      <p:sp>
-        <p:nvSpPr>
-          <p:cNvPr id="35" name="Shape 33"/>
-          <p:cNvSpPr/>
-          <p:nvPr/>
-        </p:nvSpPr>
-        <p:spPr>
-          <a:xfrm>
-            <a:off x="365760" y="4370832"/>
-            <a:ext cx="2011680" cy="457200"/>
-          </a:xfrm>
-          <a:prstGeom prst="rect">
-            <a:avLst>
-              <a:gd name="adj" fmla="val 12000"/>
-            </a:avLst>
-          </a:prstGeom>
-          <a:solidFill>
-            <a:srgbClr val="EEF2FF"/>
-          </a:solidFill>
-          <a:ln w="12700">
-            <a:solidFill>
-              <a:srgbClr val="6366F1"/>
-            </a:solidFill>
-            <a:prstDash val="solid"/>
-          </a:ln>
-          <a:effectLst>
-            <a:outerShdw sx="100000" sy="100000" kx="0" ky="0" algn="bl" rotWithShape="0" blurRad="101600" dist="38100" dir="8100000">
-              <a:srgbClr val="000000">
-                <a:alpha val="12000"/>
-              </a:srgbClr>
-            </a:outerShdw>
-          </a:effectLst>
-        </p:spPr>
-      </p:sp>
-      <p:sp>
-        <p:nvSpPr>
-          <p:cNvPr id="36" name="Text 34"/>
-          <p:cNvSpPr/>
-          <p:nvPr/>
-        </p:nvSpPr>
-        <p:spPr>
-          <a:xfrm>
-            <a:off x="365760" y="4370832"/>
-            <a:ext cx="2011680" cy="457200"/>
-          </a:xfrm>
-          <a:prstGeom prst="rect">
-            <a:avLst/>
-          </a:prstGeom>
-          <a:noFill/>
-          <a:ln/>
-        </p:spPr>
-        <p:txBody>
-          <a:bodyPr wrap="square" lIns="0" tIns="0" rIns="0" bIns="0" rtlCol="0" anchor="ctr"/>
-          <a:lstStyle/>
-          <a:p>
-            <a:pPr algn="ctr" indent="0" marL="0">
-              <a:buNone/>
-            </a:pPr>
-            <a:r>
-              <a:rPr lang="en-US" sz="1200" b="1" dirty="0">
-                <a:solidFill>
-                  <a:srgbClr val="4338CA"/>
-                </a:solidFill>
-                <a:latin typeface="Trebuchet MS" pitchFamily="34" charset="0"/>
-                <a:ea typeface="Trebuchet MS" pitchFamily="34" charset="-122"/>
-                <a:cs typeface="Trebuchet MS" pitchFamily="34" charset="-120"/>
-              </a:rPr>
-              <a:t>treatable</a:t>
-            </a:r>
-            <a:endParaRPr lang="en-US" sz="1200" dirty="0"/>
-          </a:p>
-        </p:txBody>
-      </p:sp>
-      <p:sp>
-        <p:nvSpPr>
-          <p:cNvPr id="37" name="Shape 35"/>
-          <p:cNvSpPr/>
-          <p:nvPr/>
-        </p:nvSpPr>
-        <p:spPr>
-          <a:xfrm>
-            <a:off x="2514600" y="4370832"/>
-            <a:ext cx="6263640" cy="457200"/>
-          </a:xfrm>
-          <a:prstGeom prst="rect">
-            <a:avLst>
-              <a:gd name="adj" fmla="val 12000"/>
-            </a:avLst>
-          </a:prstGeom>
-          <a:solidFill>
-            <a:srgbClr val="F8FAFC"/>
-          </a:solidFill>
-          <a:ln w="12700">
-            <a:solidFill>
-              <a:srgbClr val="E2E8F0"/>
-            </a:solidFill>
-            <a:prstDash val="solid"/>
-          </a:ln>
-        </p:spPr>
-      </p:sp>
-      <p:sp>
-        <p:nvSpPr>
-          <p:cNvPr id="38" name="Text 36"/>
-          <p:cNvSpPr/>
-          <p:nvPr/>
-        </p:nvSpPr>
-        <p:spPr>
-          <a:xfrm>
-            <a:off x="2651760" y="4370832"/>
-            <a:ext cx="6035040" cy="457200"/>
-          </a:xfrm>
-          <a:prstGeom prst="rect">
-            <a:avLst/>
-          </a:prstGeom>
-          <a:noFill/>
-          <a:ln/>
-        </p:spPr>
-        <p:txBody>
-          <a:bodyPr wrap="square" rtlCol="0" anchor="ctr"/>
-          <a:lstStyle/>
-          <a:p>
-            <a:pPr algn="l" indent="0" marL="0">
-              <a:buNone/>
-            </a:pPr>
-            <a:r>
-              <a:rPr lang="en-US" sz="1200" dirty="0">
-                <a:solidFill>
-                  <a:srgbClr val="0F172A"/>
-                </a:solidFill>
-                <a:latin typeface="Calibri" pitchFamily="34" charset="0"/>
-                <a:ea typeface="Calibri" pitchFamily="34" charset="-122"/>
-                <a:cs typeface="Calibri" pitchFamily="34" charset="-120"/>
-              </a:rPr>
-              <a:t>The act of dealing with or looking after someone or something right now.</a:t>
+              <a:t>small gifts or nice things given to someone, often sweets</a:t>
             </a:r>
             <a:endParaRPr lang="en-US" sz="1200" dirty="0"/>
           </a:p>
@@ -41697,7 +41007,7 @@
                 <a:ea typeface="Calibri" pitchFamily="34" charset="-122"/>
                 <a:cs typeface="Calibri" pitchFamily="34" charset="-120"/>
               </a:rPr>
-              <a:t>Word Labs  •  wordlabs.app  •  Root: 'treat' = handle, deal with, negotiate</a:t>
+              <a:t>Word Labs  •  wordlabs.app  •  Root: 'treat' = to deal with; a special thing</a:t>
             </a:r>
             <a:endParaRPr lang="en-US" sz="800" dirty="0"/>
           </a:p>
@@ -41900,7 +41210,7 @@
                 <a:ea typeface="Calibri" pitchFamily="34" charset="-122"/>
                 <a:cs typeface="Calibri" pitchFamily="34" charset="-120"/>
               </a:rPr>
-              <a:t>The doctor explained that the patient's infection was treatable with the right medicine.</a:t>
+              <a:t>Grandma bought us an ice cream as a special treat.</a:t>
             </a:r>
             <a:endParaRPr lang="en-US" sz="1500" dirty="0"/>
           </a:p>
@@ -42064,7 +41374,7 @@
                 <a:ea typeface="Calibri" pitchFamily="34" charset="-122"/>
                 <a:cs typeface="Calibri" pitchFamily="34" charset="-120"/>
               </a:rPr>
-              <a:t>It is important that we treat all living creatures with kindness and respect.</a:t>
+              <a:t>Mum gave the children some treats for being good.</a:t>
             </a:r>
             <a:endParaRPr lang="en-US" sz="1500" dirty="0"/>
           </a:p>
@@ -42228,7 +41538,7 @@
                 <a:ea typeface="Calibri" pitchFamily="34" charset="-122"/>
                 <a:cs typeface="Calibri" pitchFamily="34" charset="-120"/>
               </a:rPr>
-              <a:t>After a long week, Mum organised a special retreat to the mountains for our family.</a:t>
+              <a:t>Leaders from both countries met to sign the peace treaty.</a:t>
             </a:r>
             <a:endParaRPr lang="en-US" sz="1500" dirty="0"/>
           </a:p>
